--- a/Drowsiness Detection for Truck Drivers.pptx
+++ b/Drowsiness Detection for Truck Drivers.pptx
@@ -2551,6 +2551,1535 @@
     <dgm:fillClrLst meth="repeat">
       <a:schemeClr val="accent5">
         <a:tint val="40000"/>
+      </a:schemeClr>
+    </dgm:fillClrLst>
+    <dgm:linClrLst meth="repeat">
+      <a:schemeClr val="lt1"/>
+    </dgm:linClrLst>
+    <dgm:effectClrLst/>
+    <dgm:txLinClrLst/>
+    <dgm:txFillClrLst meth="repeat">
+      <a:schemeClr val="dk1"/>
+    </dgm:txFillClrLst>
+    <dgm:txEffectClrLst/>
+  </dgm:styleLbl>
+  <dgm:styleLbl name="revTx">
+    <dgm:fillClrLst meth="repeat">
+      <a:schemeClr val="lt1">
+        <a:alpha val="0"/>
+      </a:schemeClr>
+    </dgm:fillClrLst>
+    <dgm:linClrLst meth="repeat">
+      <a:schemeClr val="dk1">
+        <a:alpha val="0"/>
+      </a:schemeClr>
+    </dgm:linClrLst>
+    <dgm:effectClrLst/>
+    <dgm:txLinClrLst/>
+    <dgm:txFillClrLst meth="repeat">
+      <a:schemeClr val="tx1"/>
+    </dgm:txFillClrLst>
+    <dgm:txEffectClrLst/>
+  </dgm:styleLbl>
+</dgm:colorsDef>
+</file>
+
+<file path=ppt/diagrams/colors4.xml><?xml version="1.0" encoding="utf-8"?>
+<dgm:colorsDef xmlns:dgm="http://schemas.openxmlformats.org/drawingml/2006/diagram" xmlns:a="http://schemas.openxmlformats.org/drawingml/2006/main" uniqueId="urn:microsoft.com/office/officeart/2005/8/colors/colorful2">
+  <dgm:title val=""/>
+  <dgm:desc val=""/>
+  <dgm:catLst>
+    <dgm:cat type="colorful" pri="10200"/>
+  </dgm:catLst>
+  <dgm:styleLbl name="node0">
+    <dgm:fillClrLst meth="repeat">
+      <a:schemeClr val="accent1"/>
+    </dgm:fillClrLst>
+    <dgm:linClrLst meth="repeat">
+      <a:schemeClr val="lt1"/>
+    </dgm:linClrLst>
+    <dgm:effectClrLst/>
+    <dgm:txLinClrLst/>
+    <dgm:txFillClrLst/>
+    <dgm:txEffectClrLst/>
+  </dgm:styleLbl>
+  <dgm:styleLbl name="node1">
+    <dgm:fillClrLst>
+      <a:schemeClr val="accent2"/>
+      <a:schemeClr val="accent3"/>
+    </dgm:fillClrLst>
+    <dgm:linClrLst meth="repeat">
+      <a:schemeClr val="lt1"/>
+    </dgm:linClrLst>
+    <dgm:effectClrLst/>
+    <dgm:txLinClrLst/>
+    <dgm:txFillClrLst/>
+    <dgm:txEffectClrLst/>
+  </dgm:styleLbl>
+  <dgm:styleLbl name="alignNode1">
+    <dgm:fillClrLst>
+      <a:schemeClr val="accent2"/>
+      <a:schemeClr val="accent3"/>
+    </dgm:fillClrLst>
+    <dgm:linClrLst>
+      <a:schemeClr val="accent2"/>
+      <a:schemeClr val="accent3"/>
+    </dgm:linClrLst>
+    <dgm:effectClrLst/>
+    <dgm:txLinClrLst/>
+    <dgm:txFillClrLst/>
+    <dgm:txEffectClrLst/>
+  </dgm:styleLbl>
+  <dgm:styleLbl name="lnNode1">
+    <dgm:fillClrLst>
+      <a:schemeClr val="accent2"/>
+      <a:schemeClr val="accent3"/>
+    </dgm:fillClrLst>
+    <dgm:linClrLst meth="repeat">
+      <a:schemeClr val="lt1"/>
+    </dgm:linClrLst>
+    <dgm:effectClrLst/>
+    <dgm:txLinClrLst/>
+    <dgm:txFillClrLst/>
+    <dgm:txEffectClrLst/>
+  </dgm:styleLbl>
+  <dgm:styleLbl name="vennNode1">
+    <dgm:fillClrLst>
+      <a:schemeClr val="accent2">
+        <a:alpha val="50000"/>
+      </a:schemeClr>
+      <a:schemeClr val="accent3">
+        <a:alpha val="50000"/>
+      </a:schemeClr>
+    </dgm:fillClrLst>
+    <dgm:linClrLst meth="repeat">
+      <a:schemeClr val="lt1"/>
+    </dgm:linClrLst>
+    <dgm:effectClrLst/>
+    <dgm:txLinClrLst/>
+    <dgm:txFillClrLst/>
+    <dgm:txEffectClrLst/>
+  </dgm:styleLbl>
+  <dgm:styleLbl name="node2">
+    <dgm:fillClrLst>
+      <a:schemeClr val="accent3"/>
+    </dgm:fillClrLst>
+    <dgm:linClrLst meth="repeat">
+      <a:schemeClr val="lt1"/>
+    </dgm:linClrLst>
+    <dgm:effectClrLst/>
+    <dgm:txLinClrLst/>
+    <dgm:txFillClrLst/>
+    <dgm:txEffectClrLst/>
+  </dgm:styleLbl>
+  <dgm:styleLbl name="node3">
+    <dgm:fillClrLst>
+      <a:schemeClr val="accent4"/>
+    </dgm:fillClrLst>
+    <dgm:linClrLst meth="repeat">
+      <a:schemeClr val="lt1"/>
+    </dgm:linClrLst>
+    <dgm:effectClrLst/>
+    <dgm:txLinClrLst/>
+    <dgm:txFillClrLst/>
+    <dgm:txEffectClrLst/>
+  </dgm:styleLbl>
+  <dgm:styleLbl name="node4">
+    <dgm:fillClrLst>
+      <a:schemeClr val="accent5"/>
+    </dgm:fillClrLst>
+    <dgm:linClrLst meth="repeat">
+      <a:schemeClr val="lt1"/>
+    </dgm:linClrLst>
+    <dgm:effectClrLst/>
+    <dgm:txLinClrLst/>
+    <dgm:txFillClrLst/>
+    <dgm:txEffectClrLst/>
+  </dgm:styleLbl>
+  <dgm:styleLbl name="fgImgPlace1">
+    <dgm:fillClrLst>
+      <a:schemeClr val="accent2">
+        <a:tint val="50000"/>
+      </a:schemeClr>
+      <a:schemeClr val="accent3">
+        <a:tint val="50000"/>
+      </a:schemeClr>
+    </dgm:fillClrLst>
+    <dgm:linClrLst meth="repeat">
+      <a:schemeClr val="lt1"/>
+    </dgm:linClrLst>
+    <dgm:effectClrLst/>
+    <dgm:txLinClrLst/>
+    <dgm:txFillClrLst meth="repeat">
+      <a:schemeClr val="lt1"/>
+    </dgm:txFillClrLst>
+    <dgm:txEffectClrLst/>
+  </dgm:styleLbl>
+  <dgm:styleLbl name="alignImgPlace1">
+    <dgm:fillClrLst>
+      <a:schemeClr val="accent2">
+        <a:tint val="50000"/>
+      </a:schemeClr>
+      <a:schemeClr val="accent3">
+        <a:tint val="20000"/>
+      </a:schemeClr>
+    </dgm:fillClrLst>
+    <dgm:linClrLst meth="repeat">
+      <a:schemeClr val="lt1"/>
+    </dgm:linClrLst>
+    <dgm:effectClrLst/>
+    <dgm:txLinClrLst/>
+    <dgm:txFillClrLst meth="repeat">
+      <a:schemeClr val="lt1"/>
+    </dgm:txFillClrLst>
+    <dgm:txEffectClrLst/>
+  </dgm:styleLbl>
+  <dgm:styleLbl name="bgImgPlace1">
+    <dgm:fillClrLst>
+      <a:schemeClr val="accent2">
+        <a:tint val="50000"/>
+      </a:schemeClr>
+      <a:schemeClr val="accent3">
+        <a:tint val="20000"/>
+      </a:schemeClr>
+    </dgm:fillClrLst>
+    <dgm:linClrLst meth="repeat">
+      <a:schemeClr val="lt1"/>
+    </dgm:linClrLst>
+    <dgm:effectClrLst/>
+    <dgm:txLinClrLst/>
+    <dgm:txFillClrLst meth="repeat">
+      <a:schemeClr val="lt1"/>
+    </dgm:txFillClrLst>
+    <dgm:txEffectClrLst/>
+  </dgm:styleLbl>
+  <dgm:styleLbl name="sibTrans2D1">
+    <dgm:fillClrLst>
+      <a:schemeClr val="accent2"/>
+      <a:schemeClr val="accent3"/>
+    </dgm:fillClrLst>
+    <dgm:linClrLst meth="repeat">
+      <a:schemeClr val="lt1"/>
+    </dgm:linClrLst>
+    <dgm:effectClrLst/>
+    <dgm:txLinClrLst/>
+    <dgm:txFillClrLst/>
+    <dgm:txEffectClrLst/>
+  </dgm:styleLbl>
+  <dgm:styleLbl name="fgSibTrans2D1">
+    <dgm:fillClrLst>
+      <a:schemeClr val="accent2"/>
+      <a:schemeClr val="accent3"/>
+    </dgm:fillClrLst>
+    <dgm:linClrLst meth="repeat">
+      <a:schemeClr val="lt1"/>
+    </dgm:linClrLst>
+    <dgm:effectClrLst/>
+    <dgm:txLinClrLst/>
+    <dgm:txFillClrLst meth="repeat">
+      <a:schemeClr val="lt1"/>
+    </dgm:txFillClrLst>
+    <dgm:txEffectClrLst/>
+  </dgm:styleLbl>
+  <dgm:styleLbl name="bgSibTrans2D1">
+    <dgm:fillClrLst>
+      <a:schemeClr val="accent2"/>
+      <a:schemeClr val="accent3"/>
+    </dgm:fillClrLst>
+    <dgm:linClrLst meth="repeat">
+      <a:schemeClr val="lt1"/>
+    </dgm:linClrLst>
+    <dgm:effectClrLst/>
+    <dgm:txLinClrLst/>
+    <dgm:txFillClrLst meth="repeat">
+      <a:schemeClr val="lt1"/>
+    </dgm:txFillClrLst>
+    <dgm:txEffectClrLst/>
+  </dgm:styleLbl>
+  <dgm:styleLbl name="sibTrans1D1">
+    <dgm:fillClrLst/>
+    <dgm:linClrLst>
+      <a:schemeClr val="accent2"/>
+      <a:schemeClr val="accent3"/>
+    </dgm:linClrLst>
+    <dgm:effectClrLst/>
+    <dgm:txLinClrLst/>
+    <dgm:txFillClrLst meth="repeat">
+      <a:schemeClr val="tx1"/>
+    </dgm:txFillClrLst>
+    <dgm:txEffectClrLst/>
+  </dgm:styleLbl>
+  <dgm:styleLbl name="callout">
+    <dgm:fillClrLst meth="repeat">
+      <a:schemeClr val="accent2"/>
+    </dgm:fillClrLst>
+    <dgm:linClrLst meth="repeat">
+      <a:schemeClr val="accent2">
+        <a:tint val="50000"/>
+      </a:schemeClr>
+    </dgm:linClrLst>
+    <dgm:effectClrLst/>
+    <dgm:txLinClrLst/>
+    <dgm:txFillClrLst meth="repeat">
+      <a:schemeClr val="tx1"/>
+    </dgm:txFillClrLst>
+    <dgm:txEffectClrLst/>
+  </dgm:styleLbl>
+  <dgm:styleLbl name="asst0">
+    <dgm:fillClrLst meth="repeat">
+      <a:schemeClr val="accent2"/>
+    </dgm:fillClrLst>
+    <dgm:linClrLst meth="repeat">
+      <a:schemeClr val="lt1">
+        <a:shade val="80000"/>
+      </a:schemeClr>
+    </dgm:linClrLst>
+    <dgm:effectClrLst/>
+    <dgm:txLinClrLst/>
+    <dgm:txFillClrLst/>
+    <dgm:txEffectClrLst/>
+  </dgm:styleLbl>
+  <dgm:styleLbl name="asst1">
+    <dgm:fillClrLst meth="repeat">
+      <a:schemeClr val="accent3"/>
+    </dgm:fillClrLst>
+    <dgm:linClrLst meth="repeat">
+      <a:schemeClr val="lt1">
+        <a:shade val="80000"/>
+      </a:schemeClr>
+    </dgm:linClrLst>
+    <dgm:effectClrLst/>
+    <dgm:txLinClrLst/>
+    <dgm:txFillClrLst/>
+    <dgm:txEffectClrLst/>
+  </dgm:styleLbl>
+  <dgm:styleLbl name="asst2">
+    <dgm:fillClrLst>
+      <a:schemeClr val="accent4"/>
+    </dgm:fillClrLst>
+    <dgm:linClrLst meth="repeat">
+      <a:schemeClr val="lt1"/>
+    </dgm:linClrLst>
+    <dgm:effectClrLst/>
+    <dgm:txLinClrLst/>
+    <dgm:txFillClrLst/>
+    <dgm:txEffectClrLst/>
+  </dgm:styleLbl>
+  <dgm:styleLbl name="asst3">
+    <dgm:fillClrLst>
+      <a:schemeClr val="accent5"/>
+    </dgm:fillClrLst>
+    <dgm:linClrLst meth="repeat">
+      <a:schemeClr val="lt1"/>
+    </dgm:linClrLst>
+    <dgm:effectClrLst/>
+    <dgm:txLinClrLst/>
+    <dgm:txFillClrLst/>
+    <dgm:txEffectClrLst/>
+  </dgm:styleLbl>
+  <dgm:styleLbl name="asst4">
+    <dgm:fillClrLst>
+      <a:schemeClr val="accent6"/>
+    </dgm:fillClrLst>
+    <dgm:linClrLst meth="repeat">
+      <a:schemeClr val="lt1"/>
+    </dgm:linClrLst>
+    <dgm:effectClrLst/>
+    <dgm:txLinClrLst/>
+    <dgm:txFillClrLst/>
+    <dgm:txEffectClrLst/>
+  </dgm:styleLbl>
+  <dgm:styleLbl name="parChTrans2D1">
+    <dgm:fillClrLst meth="repeat">
+      <a:schemeClr val="accent2"/>
+    </dgm:fillClrLst>
+    <dgm:linClrLst meth="repeat">
+      <a:schemeClr val="lt1"/>
+    </dgm:linClrLst>
+    <dgm:effectClrLst/>
+    <dgm:txLinClrLst/>
+    <dgm:txFillClrLst meth="repeat">
+      <a:schemeClr val="lt1"/>
+    </dgm:txFillClrLst>
+    <dgm:txEffectClrLst/>
+  </dgm:styleLbl>
+  <dgm:styleLbl name="parChTrans2D2">
+    <dgm:fillClrLst meth="repeat">
+      <a:schemeClr val="accent3"/>
+    </dgm:fillClrLst>
+    <dgm:linClrLst meth="repeat">
+      <a:schemeClr val="lt1"/>
+    </dgm:linClrLst>
+    <dgm:effectClrLst/>
+    <dgm:txLinClrLst/>
+    <dgm:txFillClrLst/>
+    <dgm:txEffectClrLst/>
+  </dgm:styleLbl>
+  <dgm:styleLbl name="parChTrans2D3">
+    <dgm:fillClrLst meth="repeat">
+      <a:schemeClr val="accent4"/>
+    </dgm:fillClrLst>
+    <dgm:linClrLst meth="repeat">
+      <a:schemeClr val="lt1"/>
+    </dgm:linClrLst>
+    <dgm:effectClrLst/>
+    <dgm:txLinClrLst/>
+    <dgm:txFillClrLst/>
+    <dgm:txEffectClrLst/>
+  </dgm:styleLbl>
+  <dgm:styleLbl name="parChTrans2D4">
+    <dgm:fillClrLst meth="repeat">
+      <a:schemeClr val="accent5"/>
+    </dgm:fillClrLst>
+    <dgm:linClrLst meth="repeat">
+      <a:schemeClr val="lt1"/>
+    </dgm:linClrLst>
+    <dgm:effectClrLst/>
+    <dgm:txLinClrLst/>
+    <dgm:txFillClrLst meth="repeat">
+      <a:schemeClr val="lt1"/>
+    </dgm:txFillClrLst>
+    <dgm:txEffectClrLst/>
+  </dgm:styleLbl>
+  <dgm:styleLbl name="parChTrans1D1">
+    <dgm:fillClrLst meth="repeat">
+      <a:schemeClr val="accent2"/>
+    </dgm:fillClrLst>
+    <dgm:linClrLst meth="repeat">
+      <a:schemeClr val="accent2"/>
+    </dgm:linClrLst>
+    <dgm:effectClrLst/>
+    <dgm:txLinClrLst/>
+    <dgm:txFillClrLst meth="repeat">
+      <a:schemeClr val="tx1"/>
+    </dgm:txFillClrLst>
+    <dgm:txEffectClrLst/>
+  </dgm:styleLbl>
+  <dgm:styleLbl name="parChTrans1D2">
+    <dgm:fillClrLst meth="repeat">
+      <a:schemeClr val="accent2">
+        <a:tint val="90000"/>
+      </a:schemeClr>
+    </dgm:fillClrLst>
+    <dgm:linClrLst meth="repeat">
+      <a:schemeClr val="accent3"/>
+    </dgm:linClrLst>
+    <dgm:effectClrLst/>
+    <dgm:txLinClrLst/>
+    <dgm:txFillClrLst meth="repeat">
+      <a:schemeClr val="tx1"/>
+    </dgm:txFillClrLst>
+    <dgm:txEffectClrLst/>
+  </dgm:styleLbl>
+  <dgm:styleLbl name="parChTrans1D3">
+    <dgm:fillClrLst meth="repeat">
+      <a:schemeClr val="accent2">
+        <a:tint val="70000"/>
+      </a:schemeClr>
+    </dgm:fillClrLst>
+    <dgm:linClrLst meth="repeat">
+      <a:schemeClr val="accent4"/>
+    </dgm:linClrLst>
+    <dgm:effectClrLst/>
+    <dgm:txLinClrLst/>
+    <dgm:txFillClrLst meth="repeat">
+      <a:schemeClr val="tx1"/>
+    </dgm:txFillClrLst>
+    <dgm:txEffectClrLst/>
+  </dgm:styleLbl>
+  <dgm:styleLbl name="parChTrans1D4">
+    <dgm:fillClrLst meth="repeat">
+      <a:schemeClr val="accent2">
+        <a:tint val="50000"/>
+      </a:schemeClr>
+    </dgm:fillClrLst>
+    <dgm:linClrLst meth="repeat">
+      <a:schemeClr val="accent5"/>
+    </dgm:linClrLst>
+    <dgm:effectClrLst/>
+    <dgm:txLinClrLst/>
+    <dgm:txFillClrLst meth="repeat">
+      <a:schemeClr val="tx1"/>
+    </dgm:txFillClrLst>
+    <dgm:txEffectClrLst/>
+  </dgm:styleLbl>
+  <dgm:styleLbl name="fgAcc1">
+    <dgm:fillClrLst meth="repeat">
+      <a:schemeClr val="lt1">
+        <a:alpha val="90000"/>
+      </a:schemeClr>
+    </dgm:fillClrLst>
+    <dgm:linClrLst>
+      <a:schemeClr val="accent2"/>
+      <a:schemeClr val="accent3"/>
+    </dgm:linClrLst>
+    <dgm:effectClrLst/>
+    <dgm:txLinClrLst/>
+    <dgm:txFillClrLst meth="repeat">
+      <a:schemeClr val="dk1"/>
+    </dgm:txFillClrLst>
+    <dgm:txEffectClrLst/>
+  </dgm:styleLbl>
+  <dgm:styleLbl name="conFgAcc1">
+    <dgm:fillClrLst meth="repeat">
+      <a:schemeClr val="lt1">
+        <a:alpha val="90000"/>
+      </a:schemeClr>
+    </dgm:fillClrLst>
+    <dgm:linClrLst>
+      <a:schemeClr val="accent2"/>
+      <a:schemeClr val="accent3"/>
+    </dgm:linClrLst>
+    <dgm:effectClrLst/>
+    <dgm:txLinClrLst/>
+    <dgm:txFillClrLst meth="repeat">
+      <a:schemeClr val="dk1"/>
+    </dgm:txFillClrLst>
+    <dgm:txEffectClrLst/>
+  </dgm:styleLbl>
+  <dgm:styleLbl name="alignAcc1">
+    <dgm:fillClrLst meth="repeat">
+      <a:schemeClr val="lt1">
+        <a:alpha val="90000"/>
+      </a:schemeClr>
+    </dgm:fillClrLst>
+    <dgm:linClrLst>
+      <a:schemeClr val="accent2"/>
+      <a:schemeClr val="accent3"/>
+    </dgm:linClrLst>
+    <dgm:effectClrLst/>
+    <dgm:txLinClrLst/>
+    <dgm:txFillClrLst meth="repeat">
+      <a:schemeClr val="dk1"/>
+    </dgm:txFillClrLst>
+    <dgm:txEffectClrLst/>
+  </dgm:styleLbl>
+  <dgm:styleLbl name="trAlignAcc1">
+    <dgm:fillClrLst meth="repeat">
+      <a:schemeClr val="lt1">
+        <a:alpha val="40000"/>
+      </a:schemeClr>
+    </dgm:fillClrLst>
+    <dgm:linClrLst meth="repeat">
+      <a:schemeClr val="accent2"/>
+    </dgm:linClrLst>
+    <dgm:effectClrLst/>
+    <dgm:txLinClrLst/>
+    <dgm:txFillClrLst meth="repeat">
+      <a:schemeClr val="dk1"/>
+    </dgm:txFillClrLst>
+    <dgm:txEffectClrLst/>
+  </dgm:styleLbl>
+  <dgm:styleLbl name="bgAcc1">
+    <dgm:fillClrLst meth="repeat">
+      <a:schemeClr val="lt1">
+        <a:alpha val="90000"/>
+      </a:schemeClr>
+    </dgm:fillClrLst>
+    <dgm:linClrLst>
+      <a:schemeClr val="accent2"/>
+      <a:schemeClr val="accent3"/>
+    </dgm:linClrLst>
+    <dgm:effectClrLst/>
+    <dgm:txLinClrLst/>
+    <dgm:txFillClrLst meth="repeat">
+      <a:schemeClr val="dk1"/>
+    </dgm:txFillClrLst>
+    <dgm:txEffectClrLst/>
+  </dgm:styleLbl>
+  <dgm:styleLbl name="solidFgAcc1">
+    <dgm:fillClrLst meth="repeat">
+      <a:schemeClr val="lt1"/>
+    </dgm:fillClrLst>
+    <dgm:linClrLst>
+      <a:schemeClr val="accent2"/>
+      <a:schemeClr val="accent3"/>
+    </dgm:linClrLst>
+    <dgm:effectClrLst/>
+    <dgm:txLinClrLst/>
+    <dgm:txFillClrLst meth="repeat">
+      <a:schemeClr val="dk1"/>
+    </dgm:txFillClrLst>
+    <dgm:txEffectClrLst/>
+  </dgm:styleLbl>
+  <dgm:styleLbl name="solidAlignAcc1">
+    <dgm:fillClrLst meth="repeat">
+      <a:schemeClr val="lt1"/>
+    </dgm:fillClrLst>
+    <dgm:linClrLst>
+      <a:schemeClr val="accent2"/>
+      <a:schemeClr val="accent3"/>
+    </dgm:linClrLst>
+    <dgm:effectClrLst/>
+    <dgm:txLinClrLst/>
+    <dgm:txFillClrLst meth="repeat">
+      <a:schemeClr val="dk1"/>
+    </dgm:txFillClrLst>
+    <dgm:txEffectClrLst/>
+  </dgm:styleLbl>
+  <dgm:styleLbl name="solidBgAcc1">
+    <dgm:fillClrLst meth="repeat">
+      <a:schemeClr val="lt1"/>
+    </dgm:fillClrLst>
+    <dgm:linClrLst>
+      <a:schemeClr val="accent2"/>
+      <a:schemeClr val="accent3"/>
+    </dgm:linClrLst>
+    <dgm:effectClrLst/>
+    <dgm:txLinClrLst/>
+    <dgm:txFillClrLst meth="repeat">
+      <a:schemeClr val="dk1"/>
+    </dgm:txFillClrLst>
+    <dgm:txEffectClrLst/>
+  </dgm:styleLbl>
+  <dgm:styleLbl name="fgAccFollowNode1">
+    <dgm:fillClrLst>
+      <a:schemeClr val="accent2">
+        <a:tint val="40000"/>
+        <a:alpha val="90000"/>
+      </a:schemeClr>
+      <a:schemeClr val="accent3">
+        <a:tint val="40000"/>
+        <a:alpha val="90000"/>
+      </a:schemeClr>
+    </dgm:fillClrLst>
+    <dgm:linClrLst>
+      <a:schemeClr val="accent2">
+        <a:tint val="40000"/>
+        <a:alpha val="90000"/>
+      </a:schemeClr>
+      <a:schemeClr val="accent3">
+        <a:tint val="40000"/>
+        <a:alpha val="90000"/>
+      </a:schemeClr>
+    </dgm:linClrLst>
+    <dgm:effectClrLst/>
+    <dgm:txLinClrLst/>
+    <dgm:txFillClrLst meth="repeat">
+      <a:schemeClr val="dk1"/>
+    </dgm:txFillClrLst>
+    <dgm:txEffectClrLst/>
+  </dgm:styleLbl>
+  <dgm:styleLbl name="alignAccFollowNode1">
+    <dgm:fillClrLst>
+      <a:schemeClr val="accent2">
+        <a:tint val="40000"/>
+        <a:alpha val="90000"/>
+      </a:schemeClr>
+      <a:schemeClr val="accent3">
+        <a:tint val="40000"/>
+        <a:alpha val="90000"/>
+      </a:schemeClr>
+    </dgm:fillClrLst>
+    <dgm:linClrLst>
+      <a:schemeClr val="accent2">
+        <a:tint val="40000"/>
+        <a:alpha val="90000"/>
+      </a:schemeClr>
+      <a:schemeClr val="accent3">
+        <a:tint val="40000"/>
+        <a:alpha val="90000"/>
+      </a:schemeClr>
+    </dgm:linClrLst>
+    <dgm:effectClrLst/>
+    <dgm:txLinClrLst/>
+    <dgm:txFillClrLst meth="repeat">
+      <a:schemeClr val="dk1"/>
+    </dgm:txFillClrLst>
+    <dgm:txEffectClrLst/>
+  </dgm:styleLbl>
+  <dgm:styleLbl name="bgAccFollowNode1">
+    <dgm:fillClrLst>
+      <a:schemeClr val="accent2">
+        <a:tint val="40000"/>
+        <a:alpha val="90000"/>
+      </a:schemeClr>
+      <a:schemeClr val="accent3">
+        <a:tint val="40000"/>
+        <a:alpha val="90000"/>
+      </a:schemeClr>
+    </dgm:fillClrLst>
+    <dgm:linClrLst>
+      <a:schemeClr val="accent2">
+        <a:tint val="40000"/>
+        <a:alpha val="90000"/>
+      </a:schemeClr>
+      <a:schemeClr val="accent3">
+        <a:tint val="40000"/>
+        <a:alpha val="90000"/>
+      </a:schemeClr>
+    </dgm:linClrLst>
+    <dgm:effectClrLst/>
+    <dgm:txLinClrLst/>
+    <dgm:txFillClrLst meth="repeat">
+      <a:schemeClr val="dk1"/>
+    </dgm:txFillClrLst>
+    <dgm:txEffectClrLst/>
+  </dgm:styleLbl>
+  <dgm:styleLbl name="fgAcc0">
+    <dgm:fillClrLst meth="repeat">
+      <a:schemeClr val="lt1">
+        <a:alpha val="90000"/>
+      </a:schemeClr>
+    </dgm:fillClrLst>
+    <dgm:linClrLst>
+      <a:schemeClr val="accent1"/>
+    </dgm:linClrLst>
+    <dgm:effectClrLst/>
+    <dgm:txLinClrLst/>
+    <dgm:txFillClrLst meth="repeat">
+      <a:schemeClr val="dk1"/>
+    </dgm:txFillClrLst>
+    <dgm:txEffectClrLst/>
+  </dgm:styleLbl>
+  <dgm:styleLbl name="fgAcc2">
+    <dgm:fillClrLst meth="repeat">
+      <a:schemeClr val="lt1">
+        <a:alpha val="90000"/>
+      </a:schemeClr>
+    </dgm:fillClrLst>
+    <dgm:linClrLst>
+      <a:schemeClr val="accent3"/>
+    </dgm:linClrLst>
+    <dgm:effectClrLst/>
+    <dgm:txLinClrLst/>
+    <dgm:txFillClrLst meth="repeat">
+      <a:schemeClr val="dk1"/>
+    </dgm:txFillClrLst>
+    <dgm:txEffectClrLst/>
+  </dgm:styleLbl>
+  <dgm:styleLbl name="fgAcc3">
+    <dgm:fillClrLst meth="repeat">
+      <a:schemeClr val="lt1">
+        <a:alpha val="90000"/>
+      </a:schemeClr>
+    </dgm:fillClrLst>
+    <dgm:linClrLst>
+      <a:schemeClr val="accent4"/>
+    </dgm:linClrLst>
+    <dgm:effectClrLst/>
+    <dgm:txLinClrLst/>
+    <dgm:txFillClrLst meth="repeat">
+      <a:schemeClr val="dk1"/>
+    </dgm:txFillClrLst>
+    <dgm:txEffectClrLst/>
+  </dgm:styleLbl>
+  <dgm:styleLbl name="fgAcc4">
+    <dgm:fillClrLst meth="repeat">
+      <a:schemeClr val="lt1">
+        <a:alpha val="90000"/>
+      </a:schemeClr>
+    </dgm:fillClrLst>
+    <dgm:linClrLst>
+      <a:schemeClr val="accent5"/>
+    </dgm:linClrLst>
+    <dgm:effectClrLst/>
+    <dgm:txLinClrLst/>
+    <dgm:txFillClrLst meth="repeat">
+      <a:schemeClr val="dk1"/>
+    </dgm:txFillClrLst>
+    <dgm:txEffectClrLst/>
+  </dgm:styleLbl>
+  <dgm:styleLbl name="bgShp">
+    <dgm:fillClrLst meth="repeat">
+      <a:schemeClr val="accent2">
+        <a:tint val="40000"/>
+      </a:schemeClr>
+    </dgm:fillClrLst>
+    <dgm:linClrLst meth="repeat">
+      <a:schemeClr val="dk1"/>
+    </dgm:linClrLst>
+    <dgm:effectClrLst/>
+    <dgm:txLinClrLst/>
+    <dgm:txFillClrLst meth="repeat">
+      <a:schemeClr val="dk1"/>
+    </dgm:txFillClrLst>
+    <dgm:txEffectClrLst/>
+  </dgm:styleLbl>
+  <dgm:styleLbl name="dkBgShp">
+    <dgm:fillClrLst meth="repeat">
+      <a:schemeClr val="accent2">
+        <a:shade val="90000"/>
+      </a:schemeClr>
+    </dgm:fillClrLst>
+    <dgm:linClrLst meth="repeat">
+      <a:schemeClr val="dk1"/>
+    </dgm:linClrLst>
+    <dgm:effectClrLst/>
+    <dgm:txLinClrLst/>
+    <dgm:txFillClrLst meth="repeat">
+      <a:schemeClr val="lt1"/>
+    </dgm:txFillClrLst>
+    <dgm:txEffectClrLst/>
+  </dgm:styleLbl>
+  <dgm:styleLbl name="trBgShp">
+    <dgm:fillClrLst meth="repeat">
+      <a:schemeClr val="accent2">
+        <a:tint val="50000"/>
+        <a:alpha val="40000"/>
+      </a:schemeClr>
+    </dgm:fillClrLst>
+    <dgm:linClrLst meth="repeat">
+      <a:schemeClr val="accent2"/>
+    </dgm:linClrLst>
+    <dgm:effectClrLst/>
+    <dgm:txLinClrLst/>
+    <dgm:txFillClrLst meth="repeat">
+      <a:schemeClr val="lt1"/>
+    </dgm:txFillClrLst>
+    <dgm:txEffectClrLst/>
+  </dgm:styleLbl>
+  <dgm:styleLbl name="fgShp">
+    <dgm:fillClrLst meth="repeat">
+      <a:schemeClr val="accent2">
+        <a:tint val="40000"/>
+      </a:schemeClr>
+    </dgm:fillClrLst>
+    <dgm:linClrLst meth="repeat">
+      <a:schemeClr val="lt1"/>
+    </dgm:linClrLst>
+    <dgm:effectClrLst/>
+    <dgm:txLinClrLst/>
+    <dgm:txFillClrLst meth="repeat">
+      <a:schemeClr val="dk1"/>
+    </dgm:txFillClrLst>
+    <dgm:txEffectClrLst/>
+  </dgm:styleLbl>
+  <dgm:styleLbl name="revTx">
+    <dgm:fillClrLst meth="repeat">
+      <a:schemeClr val="lt1">
+        <a:alpha val="0"/>
+      </a:schemeClr>
+    </dgm:fillClrLst>
+    <dgm:linClrLst meth="repeat">
+      <a:schemeClr val="dk1">
+        <a:alpha val="0"/>
+      </a:schemeClr>
+    </dgm:linClrLst>
+    <dgm:effectClrLst/>
+    <dgm:txLinClrLst/>
+    <dgm:txFillClrLst meth="repeat">
+      <a:schemeClr val="tx1"/>
+    </dgm:txFillClrLst>
+    <dgm:txEffectClrLst/>
+  </dgm:styleLbl>
+</dgm:colorsDef>
+</file>
+
+<file path=ppt/diagrams/colors5.xml><?xml version="1.0" encoding="utf-8"?>
+<dgm:colorsDef xmlns:dgm="http://schemas.openxmlformats.org/drawingml/2006/diagram" xmlns:a="http://schemas.openxmlformats.org/drawingml/2006/main" uniqueId="urn:microsoft.com/office/officeart/2005/8/colors/accent1_2">
+  <dgm:title val=""/>
+  <dgm:desc val=""/>
+  <dgm:catLst>
+    <dgm:cat type="accent1" pri="11200"/>
+  </dgm:catLst>
+  <dgm:styleLbl name="node0">
+    <dgm:fillClrLst meth="repeat">
+      <a:schemeClr val="accent1"/>
+    </dgm:fillClrLst>
+    <dgm:linClrLst meth="repeat">
+      <a:schemeClr val="lt1"/>
+    </dgm:linClrLst>
+    <dgm:effectClrLst/>
+    <dgm:txLinClrLst/>
+    <dgm:txFillClrLst/>
+    <dgm:txEffectClrLst/>
+  </dgm:styleLbl>
+  <dgm:styleLbl name="alignNode1">
+    <dgm:fillClrLst meth="repeat">
+      <a:schemeClr val="accent1"/>
+    </dgm:fillClrLst>
+    <dgm:linClrLst meth="repeat">
+      <a:schemeClr val="accent1"/>
+    </dgm:linClrLst>
+    <dgm:effectClrLst/>
+    <dgm:txLinClrLst/>
+    <dgm:txFillClrLst/>
+    <dgm:txEffectClrLst/>
+  </dgm:styleLbl>
+  <dgm:styleLbl name="node1">
+    <dgm:fillClrLst meth="repeat">
+      <a:schemeClr val="accent1"/>
+    </dgm:fillClrLst>
+    <dgm:linClrLst meth="repeat">
+      <a:schemeClr val="lt1"/>
+    </dgm:linClrLst>
+    <dgm:effectClrLst/>
+    <dgm:txLinClrLst/>
+    <dgm:txFillClrLst/>
+    <dgm:txEffectClrLst/>
+  </dgm:styleLbl>
+  <dgm:styleLbl name="lnNode1">
+    <dgm:fillClrLst meth="repeat">
+      <a:schemeClr val="accent1"/>
+    </dgm:fillClrLst>
+    <dgm:linClrLst meth="repeat">
+      <a:schemeClr val="lt1"/>
+    </dgm:linClrLst>
+    <dgm:effectClrLst/>
+    <dgm:txLinClrLst/>
+    <dgm:txFillClrLst/>
+    <dgm:txEffectClrLst/>
+  </dgm:styleLbl>
+  <dgm:styleLbl name="vennNode1">
+    <dgm:fillClrLst meth="repeat">
+      <a:schemeClr val="accent1">
+        <a:alpha val="50000"/>
+      </a:schemeClr>
+    </dgm:fillClrLst>
+    <dgm:linClrLst meth="repeat">
+      <a:schemeClr val="lt1"/>
+    </dgm:linClrLst>
+    <dgm:effectClrLst/>
+    <dgm:txLinClrLst/>
+    <dgm:txFillClrLst/>
+    <dgm:txEffectClrLst/>
+  </dgm:styleLbl>
+  <dgm:styleLbl name="node2">
+    <dgm:fillClrLst meth="repeat">
+      <a:schemeClr val="accent1"/>
+    </dgm:fillClrLst>
+    <dgm:linClrLst meth="repeat">
+      <a:schemeClr val="lt1"/>
+    </dgm:linClrLst>
+    <dgm:effectClrLst/>
+    <dgm:txLinClrLst/>
+    <dgm:txFillClrLst/>
+    <dgm:txEffectClrLst/>
+  </dgm:styleLbl>
+  <dgm:styleLbl name="node3">
+    <dgm:fillClrLst meth="repeat">
+      <a:schemeClr val="accent1"/>
+    </dgm:fillClrLst>
+    <dgm:linClrLst meth="repeat">
+      <a:schemeClr val="lt1"/>
+    </dgm:linClrLst>
+    <dgm:effectClrLst/>
+    <dgm:txLinClrLst/>
+    <dgm:txFillClrLst/>
+    <dgm:txEffectClrLst/>
+  </dgm:styleLbl>
+  <dgm:styleLbl name="node4">
+    <dgm:fillClrLst meth="repeat">
+      <a:schemeClr val="accent1"/>
+    </dgm:fillClrLst>
+    <dgm:linClrLst meth="repeat">
+      <a:schemeClr val="lt1"/>
+    </dgm:linClrLst>
+    <dgm:effectClrLst/>
+    <dgm:txLinClrLst/>
+    <dgm:txFillClrLst/>
+    <dgm:txEffectClrLst/>
+  </dgm:styleLbl>
+  <dgm:styleLbl name="fgImgPlace1">
+    <dgm:fillClrLst meth="repeat">
+      <a:schemeClr val="accent1">
+        <a:tint val="50000"/>
+      </a:schemeClr>
+    </dgm:fillClrLst>
+    <dgm:linClrLst meth="repeat">
+      <a:schemeClr val="lt1"/>
+    </dgm:linClrLst>
+    <dgm:effectClrLst/>
+    <dgm:txLinClrLst/>
+    <dgm:txFillClrLst meth="repeat">
+      <a:schemeClr val="lt1"/>
+    </dgm:txFillClrLst>
+    <dgm:txEffectClrLst/>
+  </dgm:styleLbl>
+  <dgm:styleLbl name="alignImgPlace1">
+    <dgm:fillClrLst meth="repeat">
+      <a:schemeClr val="accent1">
+        <a:tint val="50000"/>
+      </a:schemeClr>
+    </dgm:fillClrLst>
+    <dgm:linClrLst meth="repeat">
+      <a:schemeClr val="lt1"/>
+    </dgm:linClrLst>
+    <dgm:effectClrLst/>
+    <dgm:txLinClrLst/>
+    <dgm:txFillClrLst meth="repeat">
+      <a:schemeClr val="lt1"/>
+    </dgm:txFillClrLst>
+    <dgm:txEffectClrLst/>
+  </dgm:styleLbl>
+  <dgm:styleLbl name="bgImgPlace1">
+    <dgm:fillClrLst meth="repeat">
+      <a:schemeClr val="accent1">
+        <a:tint val="50000"/>
+      </a:schemeClr>
+    </dgm:fillClrLst>
+    <dgm:linClrLst meth="repeat">
+      <a:schemeClr val="lt1"/>
+    </dgm:linClrLst>
+    <dgm:effectClrLst/>
+    <dgm:txLinClrLst/>
+    <dgm:txFillClrLst meth="repeat">
+      <a:schemeClr val="lt1"/>
+    </dgm:txFillClrLst>
+    <dgm:txEffectClrLst/>
+  </dgm:styleLbl>
+  <dgm:styleLbl name="sibTrans2D1">
+    <dgm:fillClrLst meth="repeat">
+      <a:schemeClr val="accent1">
+        <a:tint val="60000"/>
+      </a:schemeClr>
+    </dgm:fillClrLst>
+    <dgm:linClrLst meth="repeat">
+      <a:schemeClr val="accent1">
+        <a:tint val="60000"/>
+      </a:schemeClr>
+    </dgm:linClrLst>
+    <dgm:effectClrLst/>
+    <dgm:txLinClrLst/>
+    <dgm:txFillClrLst/>
+    <dgm:txEffectClrLst/>
+  </dgm:styleLbl>
+  <dgm:styleLbl name="fgSibTrans2D1">
+    <dgm:fillClrLst meth="repeat">
+      <a:schemeClr val="accent1">
+        <a:tint val="60000"/>
+      </a:schemeClr>
+    </dgm:fillClrLst>
+    <dgm:linClrLst meth="repeat">
+      <a:schemeClr val="accent1">
+        <a:tint val="60000"/>
+      </a:schemeClr>
+    </dgm:linClrLst>
+    <dgm:effectClrLst/>
+    <dgm:txLinClrLst/>
+    <dgm:txFillClrLst/>
+    <dgm:txEffectClrLst/>
+  </dgm:styleLbl>
+  <dgm:styleLbl name="bgSibTrans2D1">
+    <dgm:fillClrLst meth="repeat">
+      <a:schemeClr val="accent1">
+        <a:tint val="60000"/>
+      </a:schemeClr>
+    </dgm:fillClrLst>
+    <dgm:linClrLst meth="repeat">
+      <a:schemeClr val="accent1">
+        <a:tint val="60000"/>
+      </a:schemeClr>
+    </dgm:linClrLst>
+    <dgm:effectClrLst/>
+    <dgm:txLinClrLst/>
+    <dgm:txFillClrLst/>
+    <dgm:txEffectClrLst/>
+  </dgm:styleLbl>
+  <dgm:styleLbl name="sibTrans1D1">
+    <dgm:fillClrLst meth="repeat">
+      <a:schemeClr val="accent1"/>
+    </dgm:fillClrLst>
+    <dgm:linClrLst meth="repeat">
+      <a:schemeClr val="accent1"/>
+    </dgm:linClrLst>
+    <dgm:effectClrLst/>
+    <dgm:txLinClrLst/>
+    <dgm:txFillClrLst meth="repeat">
+      <a:schemeClr val="tx1"/>
+    </dgm:txFillClrLst>
+    <dgm:txEffectClrLst/>
+  </dgm:styleLbl>
+  <dgm:styleLbl name="callout">
+    <dgm:fillClrLst meth="repeat">
+      <a:schemeClr val="accent1"/>
+    </dgm:fillClrLst>
+    <dgm:linClrLst meth="repeat">
+      <a:schemeClr val="accent1">
+        <a:tint val="50000"/>
+      </a:schemeClr>
+    </dgm:linClrLst>
+    <dgm:effectClrLst/>
+    <dgm:txLinClrLst/>
+    <dgm:txFillClrLst meth="repeat">
+      <a:schemeClr val="tx1"/>
+    </dgm:txFillClrLst>
+    <dgm:txEffectClrLst/>
+  </dgm:styleLbl>
+  <dgm:styleLbl name="asst0">
+    <dgm:fillClrLst meth="repeat">
+      <a:schemeClr val="accent1"/>
+    </dgm:fillClrLst>
+    <dgm:linClrLst meth="repeat">
+      <a:schemeClr val="lt1"/>
+    </dgm:linClrLst>
+    <dgm:effectClrLst/>
+    <dgm:txLinClrLst/>
+    <dgm:txFillClrLst/>
+    <dgm:txEffectClrLst/>
+  </dgm:styleLbl>
+  <dgm:styleLbl name="asst1">
+    <dgm:fillClrLst meth="repeat">
+      <a:schemeClr val="accent1"/>
+    </dgm:fillClrLst>
+    <dgm:linClrLst meth="repeat">
+      <a:schemeClr val="lt1"/>
+    </dgm:linClrLst>
+    <dgm:effectClrLst/>
+    <dgm:txLinClrLst/>
+    <dgm:txFillClrLst/>
+    <dgm:txEffectClrLst/>
+  </dgm:styleLbl>
+  <dgm:styleLbl name="asst2">
+    <dgm:fillClrLst meth="repeat">
+      <a:schemeClr val="accent1"/>
+    </dgm:fillClrLst>
+    <dgm:linClrLst meth="repeat">
+      <a:schemeClr val="lt1"/>
+    </dgm:linClrLst>
+    <dgm:effectClrLst/>
+    <dgm:txLinClrLst/>
+    <dgm:txFillClrLst/>
+    <dgm:txEffectClrLst/>
+  </dgm:styleLbl>
+  <dgm:styleLbl name="asst3">
+    <dgm:fillClrLst meth="repeat">
+      <a:schemeClr val="accent1"/>
+    </dgm:fillClrLst>
+    <dgm:linClrLst meth="repeat">
+      <a:schemeClr val="lt1"/>
+    </dgm:linClrLst>
+    <dgm:effectClrLst/>
+    <dgm:txLinClrLst/>
+    <dgm:txFillClrLst/>
+    <dgm:txEffectClrLst/>
+  </dgm:styleLbl>
+  <dgm:styleLbl name="asst4">
+    <dgm:fillClrLst meth="repeat">
+      <a:schemeClr val="accent1"/>
+    </dgm:fillClrLst>
+    <dgm:linClrLst meth="repeat">
+      <a:schemeClr val="lt1"/>
+    </dgm:linClrLst>
+    <dgm:effectClrLst/>
+    <dgm:txLinClrLst/>
+    <dgm:txFillClrLst/>
+    <dgm:txEffectClrLst/>
+  </dgm:styleLbl>
+  <dgm:styleLbl name="parChTrans2D1">
+    <dgm:fillClrLst meth="repeat">
+      <a:schemeClr val="accent1">
+        <a:tint val="60000"/>
+      </a:schemeClr>
+    </dgm:fillClrLst>
+    <dgm:linClrLst meth="repeat">
+      <a:schemeClr val="accent1">
+        <a:tint val="60000"/>
+      </a:schemeClr>
+    </dgm:linClrLst>
+    <dgm:effectClrLst/>
+    <dgm:txLinClrLst/>
+    <dgm:txFillClrLst meth="repeat">
+      <a:schemeClr val="lt1"/>
+    </dgm:txFillClrLst>
+    <dgm:txEffectClrLst/>
+  </dgm:styleLbl>
+  <dgm:styleLbl name="parChTrans2D2">
+    <dgm:fillClrLst meth="repeat">
+      <a:schemeClr val="accent1"/>
+    </dgm:fillClrLst>
+    <dgm:linClrLst meth="repeat">
+      <a:schemeClr val="accent1"/>
+    </dgm:linClrLst>
+    <dgm:effectClrLst/>
+    <dgm:txLinClrLst/>
+    <dgm:txFillClrLst meth="repeat">
+      <a:schemeClr val="lt1"/>
+    </dgm:txFillClrLst>
+    <dgm:txEffectClrLst/>
+  </dgm:styleLbl>
+  <dgm:styleLbl name="parChTrans2D3">
+    <dgm:fillClrLst meth="repeat">
+      <a:schemeClr val="accent1"/>
+    </dgm:fillClrLst>
+    <dgm:linClrLst meth="repeat">
+      <a:schemeClr val="accent1"/>
+    </dgm:linClrLst>
+    <dgm:effectClrLst/>
+    <dgm:txLinClrLst/>
+    <dgm:txFillClrLst meth="repeat">
+      <a:schemeClr val="lt1"/>
+    </dgm:txFillClrLst>
+    <dgm:txEffectClrLst/>
+  </dgm:styleLbl>
+  <dgm:styleLbl name="parChTrans2D4">
+    <dgm:fillClrLst meth="repeat">
+      <a:schemeClr val="accent1"/>
+    </dgm:fillClrLst>
+    <dgm:linClrLst meth="repeat">
+      <a:schemeClr val="accent1"/>
+    </dgm:linClrLst>
+    <dgm:effectClrLst/>
+    <dgm:txLinClrLst/>
+    <dgm:txFillClrLst meth="repeat">
+      <a:schemeClr val="lt1"/>
+    </dgm:txFillClrLst>
+    <dgm:txEffectClrLst/>
+  </dgm:styleLbl>
+  <dgm:styleLbl name="parChTrans1D1">
+    <dgm:fillClrLst meth="repeat">
+      <a:schemeClr val="accent1"/>
+    </dgm:fillClrLst>
+    <dgm:linClrLst meth="repeat">
+      <a:schemeClr val="accent1">
+        <a:shade val="60000"/>
+      </a:schemeClr>
+    </dgm:linClrLst>
+    <dgm:effectClrLst/>
+    <dgm:txLinClrLst/>
+    <dgm:txFillClrLst meth="repeat">
+      <a:schemeClr val="tx1"/>
+    </dgm:txFillClrLst>
+    <dgm:txEffectClrLst/>
+  </dgm:styleLbl>
+  <dgm:styleLbl name="parChTrans1D2">
+    <dgm:fillClrLst meth="repeat">
+      <a:schemeClr val="accent1"/>
+    </dgm:fillClrLst>
+    <dgm:linClrLst meth="repeat">
+      <a:schemeClr val="accent1">
+        <a:shade val="60000"/>
+      </a:schemeClr>
+    </dgm:linClrLst>
+    <dgm:effectClrLst/>
+    <dgm:txLinClrLst/>
+    <dgm:txFillClrLst meth="repeat">
+      <a:schemeClr val="tx1"/>
+    </dgm:txFillClrLst>
+    <dgm:txEffectClrLst/>
+  </dgm:styleLbl>
+  <dgm:styleLbl name="parChTrans1D3">
+    <dgm:fillClrLst meth="repeat">
+      <a:schemeClr val="accent1"/>
+    </dgm:fillClrLst>
+    <dgm:linClrLst meth="repeat">
+      <a:schemeClr val="accent1">
+        <a:shade val="80000"/>
+      </a:schemeClr>
+    </dgm:linClrLst>
+    <dgm:effectClrLst/>
+    <dgm:txLinClrLst/>
+    <dgm:txFillClrLst meth="repeat">
+      <a:schemeClr val="tx1"/>
+    </dgm:txFillClrLst>
+    <dgm:txEffectClrLst/>
+  </dgm:styleLbl>
+  <dgm:styleLbl name="parChTrans1D4">
+    <dgm:fillClrLst meth="repeat">
+      <a:schemeClr val="accent1"/>
+    </dgm:fillClrLst>
+    <dgm:linClrLst meth="repeat">
+      <a:schemeClr val="accent1">
+        <a:shade val="80000"/>
+      </a:schemeClr>
+    </dgm:linClrLst>
+    <dgm:effectClrLst/>
+    <dgm:txLinClrLst/>
+    <dgm:txFillClrLst meth="repeat">
+      <a:schemeClr val="tx1"/>
+    </dgm:txFillClrLst>
+    <dgm:txEffectClrLst/>
+  </dgm:styleLbl>
+  <dgm:styleLbl name="fgAcc1">
+    <dgm:fillClrLst meth="repeat">
+      <a:schemeClr val="lt1">
+        <a:alpha val="90000"/>
+      </a:schemeClr>
+    </dgm:fillClrLst>
+    <dgm:linClrLst meth="repeat">
+      <a:schemeClr val="accent1"/>
+    </dgm:linClrLst>
+    <dgm:effectClrLst/>
+    <dgm:txLinClrLst/>
+    <dgm:txFillClrLst meth="repeat">
+      <a:schemeClr val="dk1"/>
+    </dgm:txFillClrLst>
+    <dgm:txEffectClrLst/>
+  </dgm:styleLbl>
+  <dgm:styleLbl name="conFgAcc1">
+    <dgm:fillClrLst meth="repeat">
+      <a:schemeClr val="lt1">
+        <a:alpha val="90000"/>
+      </a:schemeClr>
+    </dgm:fillClrLst>
+    <dgm:linClrLst meth="repeat">
+      <a:schemeClr val="accent1"/>
+    </dgm:linClrLst>
+    <dgm:effectClrLst/>
+    <dgm:txLinClrLst/>
+    <dgm:txFillClrLst meth="repeat">
+      <a:schemeClr val="dk1"/>
+    </dgm:txFillClrLst>
+    <dgm:txEffectClrLst/>
+  </dgm:styleLbl>
+  <dgm:styleLbl name="alignAcc1">
+    <dgm:fillClrLst meth="repeat">
+      <a:schemeClr val="lt1">
+        <a:alpha val="90000"/>
+      </a:schemeClr>
+    </dgm:fillClrLst>
+    <dgm:linClrLst meth="repeat">
+      <a:schemeClr val="accent1"/>
+    </dgm:linClrLst>
+    <dgm:effectClrLst/>
+    <dgm:txLinClrLst/>
+    <dgm:txFillClrLst meth="repeat">
+      <a:schemeClr val="dk1"/>
+    </dgm:txFillClrLst>
+    <dgm:txEffectClrLst/>
+  </dgm:styleLbl>
+  <dgm:styleLbl name="trAlignAcc1">
+    <dgm:fillClrLst meth="repeat">
+      <a:schemeClr val="lt1">
+        <a:alpha val="40000"/>
+      </a:schemeClr>
+    </dgm:fillClrLst>
+    <dgm:linClrLst meth="repeat">
+      <a:schemeClr val="accent1"/>
+    </dgm:linClrLst>
+    <dgm:effectClrLst/>
+    <dgm:txLinClrLst/>
+    <dgm:txFillClrLst meth="repeat">
+      <a:schemeClr val="dk1"/>
+    </dgm:txFillClrLst>
+    <dgm:txEffectClrLst/>
+  </dgm:styleLbl>
+  <dgm:styleLbl name="bgAcc1">
+    <dgm:fillClrLst meth="repeat">
+      <a:schemeClr val="lt1">
+        <a:alpha val="90000"/>
+      </a:schemeClr>
+    </dgm:fillClrLst>
+    <dgm:linClrLst meth="repeat">
+      <a:schemeClr val="accent1"/>
+    </dgm:linClrLst>
+    <dgm:effectClrLst/>
+    <dgm:txLinClrLst/>
+    <dgm:txFillClrLst meth="repeat">
+      <a:schemeClr val="dk1"/>
+    </dgm:txFillClrLst>
+    <dgm:txEffectClrLst/>
+  </dgm:styleLbl>
+  <dgm:styleLbl name="solidFgAcc1">
+    <dgm:fillClrLst meth="repeat">
+      <a:schemeClr val="lt1"/>
+    </dgm:fillClrLst>
+    <dgm:linClrLst meth="repeat">
+      <a:schemeClr val="accent1"/>
+    </dgm:linClrLst>
+    <dgm:effectClrLst/>
+    <dgm:txLinClrLst/>
+    <dgm:txFillClrLst meth="repeat">
+      <a:schemeClr val="dk1"/>
+    </dgm:txFillClrLst>
+    <dgm:txEffectClrLst/>
+  </dgm:styleLbl>
+  <dgm:styleLbl name="solidAlignAcc1">
+    <dgm:fillClrLst meth="repeat">
+      <a:schemeClr val="lt1"/>
+    </dgm:fillClrLst>
+    <dgm:linClrLst meth="repeat">
+      <a:schemeClr val="accent1"/>
+    </dgm:linClrLst>
+    <dgm:effectClrLst/>
+    <dgm:txLinClrLst/>
+    <dgm:txFillClrLst meth="repeat">
+      <a:schemeClr val="dk1"/>
+    </dgm:txFillClrLst>
+    <dgm:txEffectClrLst/>
+  </dgm:styleLbl>
+  <dgm:styleLbl name="solidBgAcc1">
+    <dgm:fillClrLst meth="repeat">
+      <a:schemeClr val="lt1"/>
+    </dgm:fillClrLst>
+    <dgm:linClrLst meth="repeat">
+      <a:schemeClr val="accent1"/>
+    </dgm:linClrLst>
+    <dgm:effectClrLst/>
+    <dgm:txLinClrLst/>
+    <dgm:txFillClrLst meth="repeat">
+      <a:schemeClr val="dk1"/>
+    </dgm:txFillClrLst>
+    <dgm:txEffectClrLst/>
+  </dgm:styleLbl>
+  <dgm:styleLbl name="fgAccFollowNode1">
+    <dgm:fillClrLst meth="repeat">
+      <a:schemeClr val="accent1">
+        <a:alpha val="90000"/>
+        <a:tint val="40000"/>
+      </a:schemeClr>
+    </dgm:fillClrLst>
+    <dgm:linClrLst meth="repeat">
+      <a:schemeClr val="accent1">
+        <a:alpha val="90000"/>
+        <a:tint val="40000"/>
+      </a:schemeClr>
+    </dgm:linClrLst>
+    <dgm:effectClrLst/>
+    <dgm:txLinClrLst/>
+    <dgm:txFillClrLst meth="repeat">
+      <a:schemeClr val="dk1"/>
+    </dgm:txFillClrLst>
+    <dgm:txEffectClrLst/>
+  </dgm:styleLbl>
+  <dgm:styleLbl name="alignAccFollowNode1">
+    <dgm:fillClrLst meth="repeat">
+      <a:schemeClr val="accent1">
+        <a:alpha val="90000"/>
+        <a:tint val="40000"/>
+      </a:schemeClr>
+    </dgm:fillClrLst>
+    <dgm:linClrLst meth="repeat">
+      <a:schemeClr val="accent1">
+        <a:alpha val="90000"/>
+        <a:tint val="40000"/>
+      </a:schemeClr>
+    </dgm:linClrLst>
+    <dgm:effectClrLst/>
+    <dgm:txLinClrLst/>
+    <dgm:txFillClrLst meth="repeat">
+      <a:schemeClr val="dk1"/>
+    </dgm:txFillClrLst>
+    <dgm:txEffectClrLst/>
+  </dgm:styleLbl>
+  <dgm:styleLbl name="bgAccFollowNode1">
+    <dgm:fillClrLst meth="repeat">
+      <a:schemeClr val="accent1">
+        <a:alpha val="90000"/>
+        <a:tint val="40000"/>
+      </a:schemeClr>
+    </dgm:fillClrLst>
+    <dgm:linClrLst meth="repeat">
+      <a:schemeClr val="accent1">
+        <a:alpha val="90000"/>
+        <a:tint val="40000"/>
+      </a:schemeClr>
+    </dgm:linClrLst>
+    <dgm:effectClrLst/>
+    <dgm:txLinClrLst/>
+    <dgm:txFillClrLst meth="repeat">
+      <a:schemeClr val="dk1"/>
+    </dgm:txFillClrLst>
+    <dgm:txEffectClrLst/>
+  </dgm:styleLbl>
+  <dgm:styleLbl name="fgAcc0">
+    <dgm:fillClrLst meth="repeat">
+      <a:schemeClr val="lt1">
+        <a:alpha val="90000"/>
+      </a:schemeClr>
+    </dgm:fillClrLst>
+    <dgm:linClrLst meth="repeat">
+      <a:schemeClr val="accent1"/>
+    </dgm:linClrLst>
+    <dgm:effectClrLst/>
+    <dgm:txLinClrLst/>
+    <dgm:txFillClrLst meth="repeat">
+      <a:schemeClr val="dk1"/>
+    </dgm:txFillClrLst>
+    <dgm:txEffectClrLst/>
+  </dgm:styleLbl>
+  <dgm:styleLbl name="fgAcc2">
+    <dgm:fillClrLst meth="repeat">
+      <a:schemeClr val="lt1">
+        <a:alpha val="90000"/>
+      </a:schemeClr>
+    </dgm:fillClrLst>
+    <dgm:linClrLst meth="repeat">
+      <a:schemeClr val="accent1"/>
+    </dgm:linClrLst>
+    <dgm:effectClrLst/>
+    <dgm:txLinClrLst/>
+    <dgm:txFillClrLst meth="repeat">
+      <a:schemeClr val="dk1"/>
+    </dgm:txFillClrLst>
+    <dgm:txEffectClrLst/>
+  </dgm:styleLbl>
+  <dgm:styleLbl name="fgAcc3">
+    <dgm:fillClrLst meth="repeat">
+      <a:schemeClr val="lt1">
+        <a:alpha val="90000"/>
+      </a:schemeClr>
+    </dgm:fillClrLst>
+    <dgm:linClrLst meth="repeat">
+      <a:schemeClr val="accent1"/>
+    </dgm:linClrLst>
+    <dgm:effectClrLst/>
+    <dgm:txLinClrLst/>
+    <dgm:txFillClrLst meth="repeat">
+      <a:schemeClr val="dk1"/>
+    </dgm:txFillClrLst>
+    <dgm:txEffectClrLst/>
+  </dgm:styleLbl>
+  <dgm:styleLbl name="fgAcc4">
+    <dgm:fillClrLst meth="repeat">
+      <a:schemeClr val="lt1">
+        <a:alpha val="90000"/>
+      </a:schemeClr>
+    </dgm:fillClrLst>
+    <dgm:linClrLst meth="repeat">
+      <a:schemeClr val="accent1"/>
+    </dgm:linClrLst>
+    <dgm:effectClrLst/>
+    <dgm:txLinClrLst/>
+    <dgm:txFillClrLst meth="repeat">
+      <a:schemeClr val="dk1"/>
+    </dgm:txFillClrLst>
+    <dgm:txEffectClrLst/>
+  </dgm:styleLbl>
+  <dgm:styleLbl name="bgShp">
+    <dgm:fillClrLst meth="repeat">
+      <a:schemeClr val="accent1">
+        <a:tint val="40000"/>
+      </a:schemeClr>
+    </dgm:fillClrLst>
+    <dgm:linClrLst meth="repeat">
+      <a:schemeClr val="accent1"/>
+    </dgm:linClrLst>
+    <dgm:effectClrLst/>
+    <dgm:txLinClrLst/>
+    <dgm:txFillClrLst meth="repeat">
+      <a:schemeClr val="dk1"/>
+    </dgm:txFillClrLst>
+    <dgm:txEffectClrLst/>
+  </dgm:styleLbl>
+  <dgm:styleLbl name="dkBgShp">
+    <dgm:fillClrLst meth="repeat">
+      <a:schemeClr val="accent1">
+        <a:shade val="80000"/>
+      </a:schemeClr>
+    </dgm:fillClrLst>
+    <dgm:linClrLst meth="repeat">
+      <a:schemeClr val="accent1"/>
+    </dgm:linClrLst>
+    <dgm:effectClrLst/>
+    <dgm:txLinClrLst/>
+    <dgm:txFillClrLst meth="repeat">
+      <a:schemeClr val="lt1"/>
+    </dgm:txFillClrLst>
+    <dgm:txEffectClrLst/>
+  </dgm:styleLbl>
+  <dgm:styleLbl name="trBgShp">
+    <dgm:fillClrLst meth="repeat">
+      <a:schemeClr val="accent1">
+        <a:tint val="50000"/>
+        <a:alpha val="40000"/>
+      </a:schemeClr>
+    </dgm:fillClrLst>
+    <dgm:linClrLst meth="repeat">
+      <a:schemeClr val="accent1"/>
+    </dgm:linClrLst>
+    <dgm:effectClrLst/>
+    <dgm:txLinClrLst/>
+    <dgm:txFillClrLst meth="repeat">
+      <a:schemeClr val="lt1"/>
+    </dgm:txFillClrLst>
+    <dgm:txEffectClrLst/>
+  </dgm:styleLbl>
+  <dgm:styleLbl name="fgShp">
+    <dgm:fillClrLst meth="repeat">
+      <a:schemeClr val="accent1">
+        <a:tint val="60000"/>
       </a:schemeClr>
     </dgm:fillClrLst>
     <dgm:linClrLst meth="repeat">
@@ -3417,7 +4946,7 @@
         <a:lstStyle/>
         <a:p>
           <a:r>
-            <a:rPr lang="en-US"/>
+            <a:rPr lang="en-US" dirty="0"/>
             <a:t>OpenCV : OpenCV is a well-known open-source library that offers many tools and functions for processing images and videos. It provides a wide range of features for feature recognition, computer vision techniques, and picture editing. </a:t>
           </a:r>
         </a:p>
@@ -3823,6 +5352,723 @@
   <dgm:extLst>
     <a:ext uri="http://schemas.microsoft.com/office/drawing/2008/diagram">
       <dsp:dataModelExt xmlns:dsp="http://schemas.microsoft.com/office/drawing/2008/diagram" relId="rId7" minVer="http://schemas.openxmlformats.org/drawingml/2006/diagram"/>
+    </a:ext>
+  </dgm:extLst>
+</dgm:dataModel>
+</file>
+
+<file path=ppt/diagrams/data4.xml><?xml version="1.0" encoding="utf-8"?>
+<dgm:dataModel xmlns:dgm="http://schemas.openxmlformats.org/drawingml/2006/diagram" xmlns:a="http://schemas.openxmlformats.org/drawingml/2006/main">
+  <dgm:ptLst>
+    <dgm:pt modelId="{03E34830-5A54-4AD6-8556-AFAC20DFB7FB}" type="doc">
+      <dgm:prSet loTypeId="urn:microsoft.com/office/officeart/2016/7/layout/LinearBlockProcessNumbered" loCatId="process" qsTypeId="urn:microsoft.com/office/officeart/2005/8/quickstyle/simple4" qsCatId="simple" csTypeId="urn:microsoft.com/office/officeart/2005/8/colors/colorful2" csCatId="colorful" phldr="1"/>
+      <dgm:spPr/>
+      <dgm:t>
+        <a:bodyPr/>
+        <a:lstStyle/>
+        <a:p>
+          <a:endParaRPr lang="en-US"/>
+        </a:p>
+      </dgm:t>
+    </dgm:pt>
+    <dgm:pt modelId="{E89EA486-2EC3-4547-8FD5-E96D4A3C14AB}">
+      <dgm:prSet/>
+      <dgm:spPr/>
+      <dgm:t>
+        <a:bodyPr/>
+        <a:lstStyle/>
+        <a:p>
+          <a:pPr algn="just"/>
+          <a:r>
+            <a:rPr lang="en-US" b="1" dirty="0"/>
+            <a:t>Increased safety: </a:t>
+          </a:r>
+        </a:p>
+        <a:p>
+          <a:pPr algn="just"/>
+          <a:r>
+            <a:rPr lang="en-US" dirty="0"/>
+            <a:t>Drowsy driving can lead to accidents and mistakes. Early detection of drowsiness can help prevent accidents and ensure the safety of individuals.</a:t>
+          </a:r>
+        </a:p>
+      </dgm:t>
+    </dgm:pt>
+    <dgm:pt modelId="{ECE8E762-D432-45F9-A0A1-0AB88D2CE515}" type="parTrans" cxnId="{8E751B59-FE4D-43DE-A1EA-C868FA4F7F35}">
+      <dgm:prSet/>
+      <dgm:spPr/>
+      <dgm:t>
+        <a:bodyPr/>
+        <a:lstStyle/>
+        <a:p>
+          <a:endParaRPr lang="en-US"/>
+        </a:p>
+      </dgm:t>
+    </dgm:pt>
+    <dgm:pt modelId="{2465731D-4B22-4324-99A5-44588EA6BF63}" type="sibTrans" cxnId="{8E751B59-FE4D-43DE-A1EA-C868FA4F7F35}">
+      <dgm:prSet phldrT="01" phldr="0"/>
+      <dgm:spPr/>
+      <dgm:t>
+        <a:bodyPr/>
+        <a:lstStyle/>
+        <a:p>
+          <a:r>
+            <a:rPr lang="en-US"/>
+            <a:t>01</a:t>
+          </a:r>
+        </a:p>
+      </dgm:t>
+    </dgm:pt>
+    <dgm:pt modelId="{FDBC311A-C548-4D64-A3BD-F6B699828A61}">
+      <dgm:prSet/>
+      <dgm:spPr/>
+      <dgm:t>
+        <a:bodyPr/>
+        <a:lstStyle/>
+        <a:p>
+          <a:pPr algn="l"/>
+          <a:r>
+            <a:rPr lang="en-US" b="1" dirty="0"/>
+            <a:t>Improved productivity:</a:t>
+          </a:r>
+        </a:p>
+        <a:p>
+          <a:pPr algn="just"/>
+          <a:r>
+            <a:rPr lang="en-US" dirty="0"/>
+            <a:t>When individuals are alert and awake, they are more productive and efficient in their work. Drowsiness detection can help ensure that individuals are alert and performing at their best.</a:t>
+          </a:r>
+        </a:p>
+      </dgm:t>
+    </dgm:pt>
+    <dgm:pt modelId="{33EFBB62-6D8A-4A19-981D-034D368BA89A}" type="parTrans" cxnId="{49618626-42A3-4629-9AEC-E3FD63F36218}">
+      <dgm:prSet/>
+      <dgm:spPr/>
+      <dgm:t>
+        <a:bodyPr/>
+        <a:lstStyle/>
+        <a:p>
+          <a:endParaRPr lang="en-US"/>
+        </a:p>
+      </dgm:t>
+    </dgm:pt>
+    <dgm:pt modelId="{A3995A59-F072-4447-AE42-AA384A0C8FAB}" type="sibTrans" cxnId="{49618626-42A3-4629-9AEC-E3FD63F36218}">
+      <dgm:prSet phldrT="02" phldr="0"/>
+      <dgm:spPr/>
+      <dgm:t>
+        <a:bodyPr/>
+        <a:lstStyle/>
+        <a:p>
+          <a:r>
+            <a:rPr lang="en-US"/>
+            <a:t>02</a:t>
+          </a:r>
+        </a:p>
+      </dgm:t>
+    </dgm:pt>
+    <dgm:pt modelId="{16EC2FC6-7582-49D8-B07F-4EDB1C7962F8}">
+      <dgm:prSet/>
+      <dgm:spPr/>
+      <dgm:t>
+        <a:bodyPr/>
+        <a:lstStyle/>
+        <a:p>
+          <a:pPr algn="l"/>
+          <a:r>
+            <a:rPr lang="en-US" b="1" dirty="0"/>
+            <a:t>Early intervention: </a:t>
+          </a:r>
+        </a:p>
+        <a:p>
+          <a:pPr algn="just"/>
+          <a:r>
+            <a:rPr lang="en-US" dirty="0"/>
+            <a:t>Early detection of drowsiness can allow for early intervention, such as taking a break or resting, to prevent further fatigue and drowsiness.</a:t>
+          </a:r>
+        </a:p>
+      </dgm:t>
+    </dgm:pt>
+    <dgm:pt modelId="{2F148F55-7784-4990-B076-30201D54169C}" type="parTrans" cxnId="{2DB14CB8-69D6-423B-8590-D4605CC50FDB}">
+      <dgm:prSet/>
+      <dgm:spPr/>
+      <dgm:t>
+        <a:bodyPr/>
+        <a:lstStyle/>
+        <a:p>
+          <a:endParaRPr lang="en-US"/>
+        </a:p>
+      </dgm:t>
+    </dgm:pt>
+    <dgm:pt modelId="{C17C3379-EBCC-4703-B3A3-F8D1F7EF8173}" type="sibTrans" cxnId="{2DB14CB8-69D6-423B-8590-D4605CC50FDB}">
+      <dgm:prSet phldrT="03" phldr="0"/>
+      <dgm:spPr/>
+      <dgm:t>
+        <a:bodyPr/>
+        <a:lstStyle/>
+        <a:p>
+          <a:r>
+            <a:rPr lang="en-US"/>
+            <a:t>03</a:t>
+          </a:r>
+        </a:p>
+      </dgm:t>
+    </dgm:pt>
+    <dgm:pt modelId="{030D641E-2FC0-4F86-9B0E-893A81282FF1}">
+      <dgm:prSet/>
+      <dgm:spPr/>
+      <dgm:t>
+        <a:bodyPr/>
+        <a:lstStyle/>
+        <a:p>
+          <a:pPr algn="l"/>
+          <a:r>
+            <a:rPr lang="en-US" b="1" dirty="0"/>
+            <a:t>Cost-effective: </a:t>
+          </a:r>
+        </a:p>
+        <a:p>
+          <a:pPr algn="just"/>
+          <a:r>
+            <a:rPr lang="en-US" dirty="0"/>
+            <a:t>Drowsiness detection using deep learning can be cost-effective compared to traditional methods such as hiring a dedicated observer or using expensive equipment.</a:t>
+          </a:r>
+        </a:p>
+      </dgm:t>
+    </dgm:pt>
+    <dgm:pt modelId="{1F023747-2530-430E-B4FA-01E7C9691687}" type="parTrans" cxnId="{57750E97-8A85-450E-BF30-2D92E6CE307C}">
+      <dgm:prSet/>
+      <dgm:spPr/>
+      <dgm:t>
+        <a:bodyPr/>
+        <a:lstStyle/>
+        <a:p>
+          <a:endParaRPr lang="en-US"/>
+        </a:p>
+      </dgm:t>
+    </dgm:pt>
+    <dgm:pt modelId="{624758FD-9F76-4E7A-9B40-57A80692040A}" type="sibTrans" cxnId="{57750E97-8A85-450E-BF30-2D92E6CE307C}">
+      <dgm:prSet phldrT="04" phldr="0"/>
+      <dgm:spPr/>
+      <dgm:t>
+        <a:bodyPr/>
+        <a:lstStyle/>
+        <a:p>
+          <a:r>
+            <a:rPr lang="en-US"/>
+            <a:t>04</a:t>
+          </a:r>
+        </a:p>
+      </dgm:t>
+    </dgm:pt>
+    <dgm:pt modelId="{112E050B-9EA0-4ECD-9707-239C981D4554}" type="pres">
+      <dgm:prSet presAssocID="{03E34830-5A54-4AD6-8556-AFAC20DFB7FB}" presName="Name0" presStyleCnt="0">
+        <dgm:presLayoutVars>
+          <dgm:animLvl val="lvl"/>
+          <dgm:resizeHandles val="exact"/>
+        </dgm:presLayoutVars>
+      </dgm:prSet>
+      <dgm:spPr/>
+    </dgm:pt>
+    <dgm:pt modelId="{BE1921FD-B161-4C9C-A26B-82B13107B981}" type="pres">
+      <dgm:prSet presAssocID="{E89EA486-2EC3-4547-8FD5-E96D4A3C14AB}" presName="compositeNode" presStyleCnt="0">
+        <dgm:presLayoutVars>
+          <dgm:bulletEnabled val="1"/>
+        </dgm:presLayoutVars>
+      </dgm:prSet>
+      <dgm:spPr/>
+    </dgm:pt>
+    <dgm:pt modelId="{64C91CAE-C1A0-4253-ABEF-4877FF4D4155}" type="pres">
+      <dgm:prSet presAssocID="{E89EA486-2EC3-4547-8FD5-E96D4A3C14AB}" presName="bgRect" presStyleLbl="alignNode1" presStyleIdx="0" presStyleCnt="4"/>
+      <dgm:spPr/>
+    </dgm:pt>
+    <dgm:pt modelId="{BD043F86-0749-4C3A-8D42-690A5CEEEF0E}" type="pres">
+      <dgm:prSet presAssocID="{2465731D-4B22-4324-99A5-44588EA6BF63}" presName="sibTransNodeRect" presStyleLbl="alignNode1" presStyleIdx="0" presStyleCnt="4">
+        <dgm:presLayoutVars>
+          <dgm:chMax val="0"/>
+          <dgm:bulletEnabled val="1"/>
+        </dgm:presLayoutVars>
+      </dgm:prSet>
+      <dgm:spPr/>
+    </dgm:pt>
+    <dgm:pt modelId="{CC1CA7A6-B273-4636-9053-8798C03285A8}" type="pres">
+      <dgm:prSet presAssocID="{E89EA486-2EC3-4547-8FD5-E96D4A3C14AB}" presName="nodeRect" presStyleLbl="alignNode1" presStyleIdx="0" presStyleCnt="4">
+        <dgm:presLayoutVars>
+          <dgm:bulletEnabled val="1"/>
+        </dgm:presLayoutVars>
+      </dgm:prSet>
+      <dgm:spPr/>
+    </dgm:pt>
+    <dgm:pt modelId="{73E4DE82-1B67-404C-B6F8-F8CE128FEFAF}" type="pres">
+      <dgm:prSet presAssocID="{2465731D-4B22-4324-99A5-44588EA6BF63}" presName="sibTrans" presStyleCnt="0"/>
+      <dgm:spPr/>
+    </dgm:pt>
+    <dgm:pt modelId="{D694E8DD-52C7-4FD3-B9BF-18104E95EF08}" type="pres">
+      <dgm:prSet presAssocID="{FDBC311A-C548-4D64-A3BD-F6B699828A61}" presName="compositeNode" presStyleCnt="0">
+        <dgm:presLayoutVars>
+          <dgm:bulletEnabled val="1"/>
+        </dgm:presLayoutVars>
+      </dgm:prSet>
+      <dgm:spPr/>
+    </dgm:pt>
+    <dgm:pt modelId="{F090059F-EEFF-46CE-9E91-14903C4BB661}" type="pres">
+      <dgm:prSet presAssocID="{FDBC311A-C548-4D64-A3BD-F6B699828A61}" presName="bgRect" presStyleLbl="alignNode1" presStyleIdx="1" presStyleCnt="4"/>
+      <dgm:spPr/>
+    </dgm:pt>
+    <dgm:pt modelId="{F76448D6-48C2-4F3F-9676-2CA8ECC7CD67}" type="pres">
+      <dgm:prSet presAssocID="{A3995A59-F072-4447-AE42-AA384A0C8FAB}" presName="sibTransNodeRect" presStyleLbl="alignNode1" presStyleIdx="1" presStyleCnt="4">
+        <dgm:presLayoutVars>
+          <dgm:chMax val="0"/>
+          <dgm:bulletEnabled val="1"/>
+        </dgm:presLayoutVars>
+      </dgm:prSet>
+      <dgm:spPr/>
+    </dgm:pt>
+    <dgm:pt modelId="{7FABC82A-40E9-4D78-ADEA-38BF2FCD7956}" type="pres">
+      <dgm:prSet presAssocID="{FDBC311A-C548-4D64-A3BD-F6B699828A61}" presName="nodeRect" presStyleLbl="alignNode1" presStyleIdx="1" presStyleCnt="4">
+        <dgm:presLayoutVars>
+          <dgm:bulletEnabled val="1"/>
+        </dgm:presLayoutVars>
+      </dgm:prSet>
+      <dgm:spPr/>
+    </dgm:pt>
+    <dgm:pt modelId="{1CD50656-AE7F-4F1B-979D-0E866B34DEAF}" type="pres">
+      <dgm:prSet presAssocID="{A3995A59-F072-4447-AE42-AA384A0C8FAB}" presName="sibTrans" presStyleCnt="0"/>
+      <dgm:spPr/>
+    </dgm:pt>
+    <dgm:pt modelId="{9086058E-7467-409A-B76F-C0611016DC59}" type="pres">
+      <dgm:prSet presAssocID="{16EC2FC6-7582-49D8-B07F-4EDB1C7962F8}" presName="compositeNode" presStyleCnt="0">
+        <dgm:presLayoutVars>
+          <dgm:bulletEnabled val="1"/>
+        </dgm:presLayoutVars>
+      </dgm:prSet>
+      <dgm:spPr/>
+    </dgm:pt>
+    <dgm:pt modelId="{F9FA4C44-030B-448D-83AB-79582CD9A8ED}" type="pres">
+      <dgm:prSet presAssocID="{16EC2FC6-7582-49D8-B07F-4EDB1C7962F8}" presName="bgRect" presStyleLbl="alignNode1" presStyleIdx="2" presStyleCnt="4"/>
+      <dgm:spPr/>
+    </dgm:pt>
+    <dgm:pt modelId="{8EE169C0-ADEC-479D-BCEC-FEE52DC3E76C}" type="pres">
+      <dgm:prSet presAssocID="{C17C3379-EBCC-4703-B3A3-F8D1F7EF8173}" presName="sibTransNodeRect" presStyleLbl="alignNode1" presStyleIdx="2" presStyleCnt="4">
+        <dgm:presLayoutVars>
+          <dgm:chMax val="0"/>
+          <dgm:bulletEnabled val="1"/>
+        </dgm:presLayoutVars>
+      </dgm:prSet>
+      <dgm:spPr/>
+    </dgm:pt>
+    <dgm:pt modelId="{A310BFA8-C333-4C93-81B2-0F26F6D03102}" type="pres">
+      <dgm:prSet presAssocID="{16EC2FC6-7582-49D8-B07F-4EDB1C7962F8}" presName="nodeRect" presStyleLbl="alignNode1" presStyleIdx="2" presStyleCnt="4">
+        <dgm:presLayoutVars>
+          <dgm:bulletEnabled val="1"/>
+        </dgm:presLayoutVars>
+      </dgm:prSet>
+      <dgm:spPr/>
+    </dgm:pt>
+    <dgm:pt modelId="{43EFC1EB-7567-4FDC-8099-BCDC53AC3A47}" type="pres">
+      <dgm:prSet presAssocID="{C17C3379-EBCC-4703-B3A3-F8D1F7EF8173}" presName="sibTrans" presStyleCnt="0"/>
+      <dgm:spPr/>
+    </dgm:pt>
+    <dgm:pt modelId="{2C975017-F594-4EAF-B065-BFD22C59632D}" type="pres">
+      <dgm:prSet presAssocID="{030D641E-2FC0-4F86-9B0E-893A81282FF1}" presName="compositeNode" presStyleCnt="0">
+        <dgm:presLayoutVars>
+          <dgm:bulletEnabled val="1"/>
+        </dgm:presLayoutVars>
+      </dgm:prSet>
+      <dgm:spPr/>
+    </dgm:pt>
+    <dgm:pt modelId="{1D2C85BD-632F-4724-8513-3077D26814A9}" type="pres">
+      <dgm:prSet presAssocID="{030D641E-2FC0-4F86-9B0E-893A81282FF1}" presName="bgRect" presStyleLbl="alignNode1" presStyleIdx="3" presStyleCnt="4"/>
+      <dgm:spPr/>
+    </dgm:pt>
+    <dgm:pt modelId="{ECB47BEB-3768-47DD-999F-F47E63EEBD69}" type="pres">
+      <dgm:prSet presAssocID="{624758FD-9F76-4E7A-9B40-57A80692040A}" presName="sibTransNodeRect" presStyleLbl="alignNode1" presStyleIdx="3" presStyleCnt="4">
+        <dgm:presLayoutVars>
+          <dgm:chMax val="0"/>
+          <dgm:bulletEnabled val="1"/>
+        </dgm:presLayoutVars>
+      </dgm:prSet>
+      <dgm:spPr/>
+    </dgm:pt>
+    <dgm:pt modelId="{11AC4320-7153-4E24-B49D-B96EF4D837DD}" type="pres">
+      <dgm:prSet presAssocID="{030D641E-2FC0-4F86-9B0E-893A81282FF1}" presName="nodeRect" presStyleLbl="alignNode1" presStyleIdx="3" presStyleCnt="4">
+        <dgm:presLayoutVars>
+          <dgm:bulletEnabled val="1"/>
+        </dgm:presLayoutVars>
+      </dgm:prSet>
+      <dgm:spPr/>
+    </dgm:pt>
+  </dgm:ptLst>
+  <dgm:cxnLst>
+    <dgm:cxn modelId="{B52AB60A-AB7C-4F5F-84ED-CD7816936B05}" type="presOf" srcId="{030D641E-2FC0-4F86-9B0E-893A81282FF1}" destId="{11AC4320-7153-4E24-B49D-B96EF4D837DD}" srcOrd="1" destOrd="0" presId="urn:microsoft.com/office/officeart/2016/7/layout/LinearBlockProcessNumbered"/>
+    <dgm:cxn modelId="{BFA0F111-1771-449C-956C-737EC98C5E8E}" type="presOf" srcId="{E89EA486-2EC3-4547-8FD5-E96D4A3C14AB}" destId="{CC1CA7A6-B273-4636-9053-8798C03285A8}" srcOrd="1" destOrd="0" presId="urn:microsoft.com/office/officeart/2016/7/layout/LinearBlockProcessNumbered"/>
+    <dgm:cxn modelId="{49618626-42A3-4629-9AEC-E3FD63F36218}" srcId="{03E34830-5A54-4AD6-8556-AFAC20DFB7FB}" destId="{FDBC311A-C548-4D64-A3BD-F6B699828A61}" srcOrd="1" destOrd="0" parTransId="{33EFBB62-6D8A-4A19-981D-034D368BA89A}" sibTransId="{A3995A59-F072-4447-AE42-AA384A0C8FAB}"/>
+    <dgm:cxn modelId="{83EE142A-BACC-4645-A827-E1B525F08DF5}" type="presOf" srcId="{2465731D-4B22-4324-99A5-44588EA6BF63}" destId="{BD043F86-0749-4C3A-8D42-690A5CEEEF0E}" srcOrd="0" destOrd="0" presId="urn:microsoft.com/office/officeart/2016/7/layout/LinearBlockProcessNumbered"/>
+    <dgm:cxn modelId="{7C297338-EF3D-41B6-A662-FA49E3B214D8}" type="presOf" srcId="{FDBC311A-C548-4D64-A3BD-F6B699828A61}" destId="{7FABC82A-40E9-4D78-ADEA-38BF2FCD7956}" srcOrd="1" destOrd="0" presId="urn:microsoft.com/office/officeart/2016/7/layout/LinearBlockProcessNumbered"/>
+    <dgm:cxn modelId="{2CE3D864-D906-4241-AC7C-4FF2B39BABA8}" type="presOf" srcId="{FDBC311A-C548-4D64-A3BD-F6B699828A61}" destId="{F090059F-EEFF-46CE-9E91-14903C4BB661}" srcOrd="0" destOrd="0" presId="urn:microsoft.com/office/officeart/2016/7/layout/LinearBlockProcessNumbered"/>
+    <dgm:cxn modelId="{49B69277-1D1C-4597-A72F-A86BEE57632F}" type="presOf" srcId="{624758FD-9F76-4E7A-9B40-57A80692040A}" destId="{ECB47BEB-3768-47DD-999F-F47E63EEBD69}" srcOrd="0" destOrd="0" presId="urn:microsoft.com/office/officeart/2016/7/layout/LinearBlockProcessNumbered"/>
+    <dgm:cxn modelId="{8E751B59-FE4D-43DE-A1EA-C868FA4F7F35}" srcId="{03E34830-5A54-4AD6-8556-AFAC20DFB7FB}" destId="{E89EA486-2EC3-4547-8FD5-E96D4A3C14AB}" srcOrd="0" destOrd="0" parTransId="{ECE8E762-D432-45F9-A0A1-0AB88D2CE515}" sibTransId="{2465731D-4B22-4324-99A5-44588EA6BF63}"/>
+    <dgm:cxn modelId="{57750E97-8A85-450E-BF30-2D92E6CE307C}" srcId="{03E34830-5A54-4AD6-8556-AFAC20DFB7FB}" destId="{030D641E-2FC0-4F86-9B0E-893A81282FF1}" srcOrd="3" destOrd="0" parTransId="{1F023747-2530-430E-B4FA-01E7C9691687}" sibTransId="{624758FD-9F76-4E7A-9B40-57A80692040A}"/>
+    <dgm:cxn modelId="{0857BE99-4288-4FE3-A52C-A16BF09D669F}" type="presOf" srcId="{A3995A59-F072-4447-AE42-AA384A0C8FAB}" destId="{F76448D6-48C2-4F3F-9676-2CA8ECC7CD67}" srcOrd="0" destOrd="0" presId="urn:microsoft.com/office/officeart/2016/7/layout/LinearBlockProcessNumbered"/>
+    <dgm:cxn modelId="{B650E79E-6F86-4129-AD14-FE1F681636F6}" type="presOf" srcId="{16EC2FC6-7582-49D8-B07F-4EDB1C7962F8}" destId="{A310BFA8-C333-4C93-81B2-0F26F6D03102}" srcOrd="1" destOrd="0" presId="urn:microsoft.com/office/officeart/2016/7/layout/LinearBlockProcessNumbered"/>
+    <dgm:cxn modelId="{FE9D76A8-C5EF-4122-9D59-F430DE92886E}" type="presOf" srcId="{16EC2FC6-7582-49D8-B07F-4EDB1C7962F8}" destId="{F9FA4C44-030B-448D-83AB-79582CD9A8ED}" srcOrd="0" destOrd="0" presId="urn:microsoft.com/office/officeart/2016/7/layout/LinearBlockProcessNumbered"/>
+    <dgm:cxn modelId="{374737AF-8D5A-4F65-A7A4-C746CCAF26B8}" type="presOf" srcId="{03E34830-5A54-4AD6-8556-AFAC20DFB7FB}" destId="{112E050B-9EA0-4ECD-9707-239C981D4554}" srcOrd="0" destOrd="0" presId="urn:microsoft.com/office/officeart/2016/7/layout/LinearBlockProcessNumbered"/>
+    <dgm:cxn modelId="{DD8CFAB1-59DF-4F08-AB68-91753CC13D73}" type="presOf" srcId="{E89EA486-2EC3-4547-8FD5-E96D4A3C14AB}" destId="{64C91CAE-C1A0-4253-ABEF-4877FF4D4155}" srcOrd="0" destOrd="0" presId="urn:microsoft.com/office/officeart/2016/7/layout/LinearBlockProcessNumbered"/>
+    <dgm:cxn modelId="{2DB14CB8-69D6-423B-8590-D4605CC50FDB}" srcId="{03E34830-5A54-4AD6-8556-AFAC20DFB7FB}" destId="{16EC2FC6-7582-49D8-B07F-4EDB1C7962F8}" srcOrd="2" destOrd="0" parTransId="{2F148F55-7784-4990-B076-30201D54169C}" sibTransId="{C17C3379-EBCC-4703-B3A3-F8D1F7EF8173}"/>
+    <dgm:cxn modelId="{8BAB8FD1-59B7-489D-954F-CAC5E014F6E4}" type="presOf" srcId="{C17C3379-EBCC-4703-B3A3-F8D1F7EF8173}" destId="{8EE169C0-ADEC-479D-BCEC-FEE52DC3E76C}" srcOrd="0" destOrd="0" presId="urn:microsoft.com/office/officeart/2016/7/layout/LinearBlockProcessNumbered"/>
+    <dgm:cxn modelId="{1941D4D7-33FD-42B2-97B6-76442179EBC6}" type="presOf" srcId="{030D641E-2FC0-4F86-9B0E-893A81282FF1}" destId="{1D2C85BD-632F-4724-8513-3077D26814A9}" srcOrd="0" destOrd="0" presId="urn:microsoft.com/office/officeart/2016/7/layout/LinearBlockProcessNumbered"/>
+    <dgm:cxn modelId="{8847BA1C-F65A-4BFB-BEA8-C000D94B652C}" type="presParOf" srcId="{112E050B-9EA0-4ECD-9707-239C981D4554}" destId="{BE1921FD-B161-4C9C-A26B-82B13107B981}" srcOrd="0" destOrd="0" presId="urn:microsoft.com/office/officeart/2016/7/layout/LinearBlockProcessNumbered"/>
+    <dgm:cxn modelId="{275D1276-AF57-45C2-85D4-6D1B9D8DEDB7}" type="presParOf" srcId="{BE1921FD-B161-4C9C-A26B-82B13107B981}" destId="{64C91CAE-C1A0-4253-ABEF-4877FF4D4155}" srcOrd="0" destOrd="0" presId="urn:microsoft.com/office/officeart/2016/7/layout/LinearBlockProcessNumbered"/>
+    <dgm:cxn modelId="{1E9681CC-4179-4C6A-AABC-6D3F1060F424}" type="presParOf" srcId="{BE1921FD-B161-4C9C-A26B-82B13107B981}" destId="{BD043F86-0749-4C3A-8D42-690A5CEEEF0E}" srcOrd="1" destOrd="0" presId="urn:microsoft.com/office/officeart/2016/7/layout/LinearBlockProcessNumbered"/>
+    <dgm:cxn modelId="{9D6986DF-07AA-4573-AE46-BB2C23781007}" type="presParOf" srcId="{BE1921FD-B161-4C9C-A26B-82B13107B981}" destId="{CC1CA7A6-B273-4636-9053-8798C03285A8}" srcOrd="2" destOrd="0" presId="urn:microsoft.com/office/officeart/2016/7/layout/LinearBlockProcessNumbered"/>
+    <dgm:cxn modelId="{A4EB6479-8282-47C0-8A52-304F6E71C523}" type="presParOf" srcId="{112E050B-9EA0-4ECD-9707-239C981D4554}" destId="{73E4DE82-1B67-404C-B6F8-F8CE128FEFAF}" srcOrd="1" destOrd="0" presId="urn:microsoft.com/office/officeart/2016/7/layout/LinearBlockProcessNumbered"/>
+    <dgm:cxn modelId="{349EA633-43D2-42A1-8302-19C019350947}" type="presParOf" srcId="{112E050B-9EA0-4ECD-9707-239C981D4554}" destId="{D694E8DD-52C7-4FD3-B9BF-18104E95EF08}" srcOrd="2" destOrd="0" presId="urn:microsoft.com/office/officeart/2016/7/layout/LinearBlockProcessNumbered"/>
+    <dgm:cxn modelId="{A366BDC0-8C65-43B8-8E71-994919642E76}" type="presParOf" srcId="{D694E8DD-52C7-4FD3-B9BF-18104E95EF08}" destId="{F090059F-EEFF-46CE-9E91-14903C4BB661}" srcOrd="0" destOrd="0" presId="urn:microsoft.com/office/officeart/2016/7/layout/LinearBlockProcessNumbered"/>
+    <dgm:cxn modelId="{E800D814-F7E9-4FE1-AC7F-E89F857833F4}" type="presParOf" srcId="{D694E8DD-52C7-4FD3-B9BF-18104E95EF08}" destId="{F76448D6-48C2-4F3F-9676-2CA8ECC7CD67}" srcOrd="1" destOrd="0" presId="urn:microsoft.com/office/officeart/2016/7/layout/LinearBlockProcessNumbered"/>
+    <dgm:cxn modelId="{227FE444-11D5-4C47-AB63-C9BF79DF542C}" type="presParOf" srcId="{D694E8DD-52C7-4FD3-B9BF-18104E95EF08}" destId="{7FABC82A-40E9-4D78-ADEA-38BF2FCD7956}" srcOrd="2" destOrd="0" presId="urn:microsoft.com/office/officeart/2016/7/layout/LinearBlockProcessNumbered"/>
+    <dgm:cxn modelId="{C441BDAC-A064-4B33-958C-341FB8780860}" type="presParOf" srcId="{112E050B-9EA0-4ECD-9707-239C981D4554}" destId="{1CD50656-AE7F-4F1B-979D-0E866B34DEAF}" srcOrd="3" destOrd="0" presId="urn:microsoft.com/office/officeart/2016/7/layout/LinearBlockProcessNumbered"/>
+    <dgm:cxn modelId="{AB9F9C6A-633A-40F9-8E67-4973F6DC88BA}" type="presParOf" srcId="{112E050B-9EA0-4ECD-9707-239C981D4554}" destId="{9086058E-7467-409A-B76F-C0611016DC59}" srcOrd="4" destOrd="0" presId="urn:microsoft.com/office/officeart/2016/7/layout/LinearBlockProcessNumbered"/>
+    <dgm:cxn modelId="{C126D555-CEE2-438D-8F58-F6F5ED257B88}" type="presParOf" srcId="{9086058E-7467-409A-B76F-C0611016DC59}" destId="{F9FA4C44-030B-448D-83AB-79582CD9A8ED}" srcOrd="0" destOrd="0" presId="urn:microsoft.com/office/officeart/2016/7/layout/LinearBlockProcessNumbered"/>
+    <dgm:cxn modelId="{DE3A3927-8544-4DE4-B470-A8409A552060}" type="presParOf" srcId="{9086058E-7467-409A-B76F-C0611016DC59}" destId="{8EE169C0-ADEC-479D-BCEC-FEE52DC3E76C}" srcOrd="1" destOrd="0" presId="urn:microsoft.com/office/officeart/2016/7/layout/LinearBlockProcessNumbered"/>
+    <dgm:cxn modelId="{9BBC2839-C808-49DE-8C5C-7EE54AB43434}" type="presParOf" srcId="{9086058E-7467-409A-B76F-C0611016DC59}" destId="{A310BFA8-C333-4C93-81B2-0F26F6D03102}" srcOrd="2" destOrd="0" presId="urn:microsoft.com/office/officeart/2016/7/layout/LinearBlockProcessNumbered"/>
+    <dgm:cxn modelId="{76D06245-6443-4EC4-B113-7405C512A30C}" type="presParOf" srcId="{112E050B-9EA0-4ECD-9707-239C981D4554}" destId="{43EFC1EB-7567-4FDC-8099-BCDC53AC3A47}" srcOrd="5" destOrd="0" presId="urn:microsoft.com/office/officeart/2016/7/layout/LinearBlockProcessNumbered"/>
+    <dgm:cxn modelId="{812148F0-09BD-40BB-B08C-27800832C766}" type="presParOf" srcId="{112E050B-9EA0-4ECD-9707-239C981D4554}" destId="{2C975017-F594-4EAF-B065-BFD22C59632D}" srcOrd="6" destOrd="0" presId="urn:microsoft.com/office/officeart/2016/7/layout/LinearBlockProcessNumbered"/>
+    <dgm:cxn modelId="{F11695E0-19A7-4A0E-82A3-2B5DE444C803}" type="presParOf" srcId="{2C975017-F594-4EAF-B065-BFD22C59632D}" destId="{1D2C85BD-632F-4724-8513-3077D26814A9}" srcOrd="0" destOrd="0" presId="urn:microsoft.com/office/officeart/2016/7/layout/LinearBlockProcessNumbered"/>
+    <dgm:cxn modelId="{0B1D6B36-C925-45EE-B84F-066CDE836C27}" type="presParOf" srcId="{2C975017-F594-4EAF-B065-BFD22C59632D}" destId="{ECB47BEB-3768-47DD-999F-F47E63EEBD69}" srcOrd="1" destOrd="0" presId="urn:microsoft.com/office/officeart/2016/7/layout/LinearBlockProcessNumbered"/>
+    <dgm:cxn modelId="{154B8CA9-86A8-4C2D-AB1B-03CD2C1741C4}" type="presParOf" srcId="{2C975017-F594-4EAF-B065-BFD22C59632D}" destId="{11AC4320-7153-4E24-B49D-B96EF4D837DD}" srcOrd="2" destOrd="0" presId="urn:microsoft.com/office/officeart/2016/7/layout/LinearBlockProcessNumbered"/>
+  </dgm:cxnLst>
+  <dgm:bg/>
+  <dgm:whole/>
+  <dgm:extLst>
+    <a:ext uri="http://schemas.microsoft.com/office/drawing/2008/diagram">
+      <dsp:dataModelExt xmlns:dsp="http://schemas.microsoft.com/office/drawing/2008/diagram" relId="rId7" minVer="http://schemas.openxmlformats.org/drawingml/2006/diagram"/>
+    </a:ext>
+  </dgm:extLst>
+</dgm:dataModel>
+</file>
+
+<file path=ppt/diagrams/data5.xml><?xml version="1.0" encoding="utf-8"?>
+<dgm:dataModel xmlns:dgm="http://schemas.openxmlformats.org/drawingml/2006/diagram" xmlns:a="http://schemas.openxmlformats.org/drawingml/2006/main">
+  <dgm:ptLst>
+    <dgm:pt modelId="{08A15578-3F62-4C4F-A8A6-5A351AE4522C}" type="doc">
+      <dgm:prSet loTypeId="urn:microsoft.com/office/officeart/2018/2/layout/IconVerticalSolidList" loCatId="icon" qsTypeId="urn:microsoft.com/office/officeart/2005/8/quickstyle/simple1" qsCatId="simple" csTypeId="urn:microsoft.com/office/officeart/2005/8/colors/accent1_2" csCatId="accent1" phldr="1"/>
+      <dgm:spPr/>
+      <dgm:t>
+        <a:bodyPr/>
+        <a:lstStyle/>
+        <a:p>
+          <a:endParaRPr lang="en-US"/>
+        </a:p>
+      </dgm:t>
+    </dgm:pt>
+    <dgm:pt modelId="{9BC21732-84D0-4DFF-9E4C-448B76C2B603}">
+      <dgm:prSet/>
+      <dgm:spPr/>
+      <dgm:t>
+        <a:bodyPr/>
+        <a:lstStyle/>
+        <a:p>
+          <a:pPr>
+            <a:lnSpc>
+              <a:spcPct val="100000"/>
+            </a:lnSpc>
+          </a:pPr>
+          <a:r>
+            <a:rPr lang="en-US"/>
+            <a:t>A machine learning-based drowsiness detection system is a promising solution for reducing the risk of accidents caused by driver fatigue.</a:t>
+          </a:r>
+        </a:p>
+      </dgm:t>
+    </dgm:pt>
+    <dgm:pt modelId="{4BCD4F6B-D412-4BC6-9E7D-3247B94B1DB7}" type="parTrans" cxnId="{2AAD97E2-87CE-498C-8918-AF7BD0287794}">
+      <dgm:prSet/>
+      <dgm:spPr/>
+      <dgm:t>
+        <a:bodyPr/>
+        <a:lstStyle/>
+        <a:p>
+          <a:endParaRPr lang="en-US"/>
+        </a:p>
+      </dgm:t>
+    </dgm:pt>
+    <dgm:pt modelId="{A73CE7A4-25D5-4737-A350-C6F52E7B9F55}" type="sibTrans" cxnId="{2AAD97E2-87CE-498C-8918-AF7BD0287794}">
+      <dgm:prSet/>
+      <dgm:spPr/>
+      <dgm:t>
+        <a:bodyPr/>
+        <a:lstStyle/>
+        <a:p>
+          <a:endParaRPr lang="en-US"/>
+        </a:p>
+      </dgm:t>
+    </dgm:pt>
+    <dgm:pt modelId="{4D889CB8-735C-4792-802C-DEA78D018C2D}">
+      <dgm:prSet/>
+      <dgm:spPr/>
+      <dgm:t>
+        <a:bodyPr/>
+        <a:lstStyle/>
+        <a:p>
+          <a:pPr>
+            <a:lnSpc>
+              <a:spcPct val="100000"/>
+            </a:lnSpc>
+          </a:pPr>
+          <a:r>
+            <a:rPr lang="en-US"/>
+            <a:t>The ml-based drowsiness detection system has several advantages over traditional methods, including its high accuracy, non-invasiveness, and real-time detection. </a:t>
+          </a:r>
+        </a:p>
+      </dgm:t>
+    </dgm:pt>
+    <dgm:pt modelId="{044AFB96-11B6-4A92-9173-77C1B03DA9AA}" type="parTrans" cxnId="{51DB31D9-A8FB-44D4-AA97-2668217067DA}">
+      <dgm:prSet/>
+      <dgm:spPr/>
+      <dgm:t>
+        <a:bodyPr/>
+        <a:lstStyle/>
+        <a:p>
+          <a:endParaRPr lang="en-US"/>
+        </a:p>
+      </dgm:t>
+    </dgm:pt>
+    <dgm:pt modelId="{EEA09663-FB48-4653-8FAC-B24E269497FB}" type="sibTrans" cxnId="{51DB31D9-A8FB-44D4-AA97-2668217067DA}">
+      <dgm:prSet/>
+      <dgm:spPr/>
+      <dgm:t>
+        <a:bodyPr/>
+        <a:lstStyle/>
+        <a:p>
+          <a:endParaRPr lang="en-US"/>
+        </a:p>
+      </dgm:t>
+    </dgm:pt>
+    <dgm:pt modelId="{953DBE9C-52E2-4E72-8EA2-FC10C888F3A8}">
+      <dgm:prSet/>
+      <dgm:spPr/>
+      <dgm:t>
+        <a:bodyPr/>
+        <a:lstStyle/>
+        <a:p>
+          <a:pPr>
+            <a:lnSpc>
+              <a:spcPct val="100000"/>
+            </a:lnSpc>
+          </a:pPr>
+          <a:r>
+            <a:rPr lang="en-US"/>
+            <a:t>The system have potential to significantly improve road safety and reduce the number of accidents caused by fatigue driving</a:t>
+          </a:r>
+        </a:p>
+      </dgm:t>
+    </dgm:pt>
+    <dgm:pt modelId="{F7E23863-D7D8-4E25-BDF7-B6813DD9A514}" type="parTrans" cxnId="{C5ADEBFB-D604-491C-A089-3030FAEB710E}">
+      <dgm:prSet/>
+      <dgm:spPr/>
+      <dgm:t>
+        <a:bodyPr/>
+        <a:lstStyle/>
+        <a:p>
+          <a:endParaRPr lang="en-US"/>
+        </a:p>
+      </dgm:t>
+    </dgm:pt>
+    <dgm:pt modelId="{8CD496FF-F2D3-44E1-B4C2-455C124F399D}" type="sibTrans" cxnId="{C5ADEBFB-D604-491C-A089-3030FAEB710E}">
+      <dgm:prSet/>
+      <dgm:spPr/>
+      <dgm:t>
+        <a:bodyPr/>
+        <a:lstStyle/>
+        <a:p>
+          <a:endParaRPr lang="en-US"/>
+        </a:p>
+      </dgm:t>
+    </dgm:pt>
+    <dgm:pt modelId="{36060422-0A3F-448D-8DD0-8525D72F3F69}" type="pres">
+      <dgm:prSet presAssocID="{08A15578-3F62-4C4F-A8A6-5A351AE4522C}" presName="root" presStyleCnt="0">
+        <dgm:presLayoutVars>
+          <dgm:dir/>
+          <dgm:resizeHandles val="exact"/>
+        </dgm:presLayoutVars>
+      </dgm:prSet>
+      <dgm:spPr/>
+    </dgm:pt>
+    <dgm:pt modelId="{35EDFC76-8411-4C60-B3E4-1A3AA727C190}" type="pres">
+      <dgm:prSet presAssocID="{9BC21732-84D0-4DFF-9E4C-448B76C2B603}" presName="compNode" presStyleCnt="0"/>
+      <dgm:spPr/>
+    </dgm:pt>
+    <dgm:pt modelId="{EE48416D-CE0A-4784-A9C5-A69B34D5D5F2}" type="pres">
+      <dgm:prSet presAssocID="{9BC21732-84D0-4DFF-9E4C-448B76C2B603}" presName="bgRect" presStyleLbl="bgShp" presStyleIdx="0" presStyleCnt="3"/>
+      <dgm:spPr/>
+    </dgm:pt>
+    <dgm:pt modelId="{D31FFA65-FD36-4884-862E-637FEECA3744}" type="pres">
+      <dgm:prSet presAssocID="{9BC21732-84D0-4DFF-9E4C-448B76C2B603}" presName="iconRect" presStyleLbl="node1" presStyleIdx="0" presStyleCnt="3"/>
+      <dgm:spPr>
+        <a:blipFill>
+          <a:blip xmlns:r="http://schemas.openxmlformats.org/officeDocument/2006/relationships" r:embed="rId1">
+            <a:extLst>
+              <a:ext uri="{28A0092B-C50C-407E-A947-70E740481C1C}">
+                <a14:useLocalDpi xmlns:a14="http://schemas.microsoft.com/office/drawing/2010/main" val="0"/>
+              </a:ext>
+              <a:ext uri="{96DAC541-7B7A-43D3-8B79-37D633B846F1}">
+                <asvg:svgBlip xmlns:asvg="http://schemas.microsoft.com/office/drawing/2016/SVG/main" r:embed="rId2"/>
+              </a:ext>
+            </a:extLst>
+          </a:blip>
+          <a:stretch>
+            <a:fillRect/>
+          </a:stretch>
+        </a:blipFill>
+      </dgm:spPr>
+      <dgm:extLst>
+        <a:ext uri="{E40237B7-FDA0-4F09-8148-C483321AD2D9}">
+          <dgm14:cNvPr xmlns:dgm14="http://schemas.microsoft.com/office/drawing/2010/diagram" id="0" name="" descr="Ambulance"/>
+        </a:ext>
+      </dgm:extLst>
+    </dgm:pt>
+    <dgm:pt modelId="{C87379D3-4AE7-4CB5-936B-1E926804B892}" type="pres">
+      <dgm:prSet presAssocID="{9BC21732-84D0-4DFF-9E4C-448B76C2B603}" presName="spaceRect" presStyleCnt="0"/>
+      <dgm:spPr/>
+    </dgm:pt>
+    <dgm:pt modelId="{1DC891CD-F2F4-4670-A11A-52E199FE0B0F}" type="pres">
+      <dgm:prSet presAssocID="{9BC21732-84D0-4DFF-9E4C-448B76C2B603}" presName="parTx" presStyleLbl="revTx" presStyleIdx="0" presStyleCnt="3">
+        <dgm:presLayoutVars>
+          <dgm:chMax val="0"/>
+          <dgm:chPref val="0"/>
+        </dgm:presLayoutVars>
+      </dgm:prSet>
+      <dgm:spPr/>
+    </dgm:pt>
+    <dgm:pt modelId="{D4A4B768-4378-4FD1-9097-300B97B6E52F}" type="pres">
+      <dgm:prSet presAssocID="{A73CE7A4-25D5-4737-A350-C6F52E7B9F55}" presName="sibTrans" presStyleCnt="0"/>
+      <dgm:spPr/>
+    </dgm:pt>
+    <dgm:pt modelId="{F420259D-DDD9-466D-90DE-BB0BC7AAD565}" type="pres">
+      <dgm:prSet presAssocID="{4D889CB8-735C-4792-802C-DEA78D018C2D}" presName="compNode" presStyleCnt="0"/>
+      <dgm:spPr/>
+    </dgm:pt>
+    <dgm:pt modelId="{71339543-2CB5-4376-974F-891B127A827D}" type="pres">
+      <dgm:prSet presAssocID="{4D889CB8-735C-4792-802C-DEA78D018C2D}" presName="bgRect" presStyleLbl="bgShp" presStyleIdx="1" presStyleCnt="3"/>
+      <dgm:spPr/>
+    </dgm:pt>
+    <dgm:pt modelId="{5A2F0FEC-8317-4ECE-87B9-D3975AA2F0D0}" type="pres">
+      <dgm:prSet presAssocID="{4D889CB8-735C-4792-802C-DEA78D018C2D}" presName="iconRect" presStyleLbl="node1" presStyleIdx="1" presStyleCnt="3"/>
+      <dgm:spPr>
+        <a:blipFill>
+          <a:blip xmlns:r="http://schemas.openxmlformats.org/officeDocument/2006/relationships" r:embed="rId3">
+            <a:extLst>
+              <a:ext uri="{28A0092B-C50C-407E-A947-70E740481C1C}">
+                <a14:useLocalDpi xmlns:a14="http://schemas.microsoft.com/office/drawing/2010/main" val="0"/>
+              </a:ext>
+              <a:ext uri="{96DAC541-7B7A-43D3-8B79-37D633B846F1}">
+                <asvg:svgBlip xmlns:asvg="http://schemas.microsoft.com/office/drawing/2016/SVG/main" r:embed="rId4"/>
+              </a:ext>
+            </a:extLst>
+          </a:blip>
+          <a:stretch>
+            <a:fillRect/>
+          </a:stretch>
+        </a:blipFill>
+      </dgm:spPr>
+      <dgm:extLst>
+        <a:ext uri="{E40237B7-FDA0-4F09-8148-C483321AD2D9}">
+          <dgm14:cNvPr xmlns:dgm14="http://schemas.microsoft.com/office/drawing/2010/diagram" id="0" name="" descr="Hospital"/>
+        </a:ext>
+      </dgm:extLst>
+    </dgm:pt>
+    <dgm:pt modelId="{21D29AC4-CF4D-43D4-B2C9-A350B443F467}" type="pres">
+      <dgm:prSet presAssocID="{4D889CB8-735C-4792-802C-DEA78D018C2D}" presName="spaceRect" presStyleCnt="0"/>
+      <dgm:spPr/>
+    </dgm:pt>
+    <dgm:pt modelId="{50EB4F50-EB33-40BF-9284-11E32067849B}" type="pres">
+      <dgm:prSet presAssocID="{4D889CB8-735C-4792-802C-DEA78D018C2D}" presName="parTx" presStyleLbl="revTx" presStyleIdx="1" presStyleCnt="3">
+        <dgm:presLayoutVars>
+          <dgm:chMax val="0"/>
+          <dgm:chPref val="0"/>
+        </dgm:presLayoutVars>
+      </dgm:prSet>
+      <dgm:spPr/>
+    </dgm:pt>
+    <dgm:pt modelId="{97DAB1DE-5329-4BC5-ACDA-9402E24EFF2D}" type="pres">
+      <dgm:prSet presAssocID="{EEA09663-FB48-4653-8FAC-B24E269497FB}" presName="sibTrans" presStyleCnt="0"/>
+      <dgm:spPr/>
+    </dgm:pt>
+    <dgm:pt modelId="{C8F7D285-7843-4CB2-9B6B-A50A19210DE9}" type="pres">
+      <dgm:prSet presAssocID="{953DBE9C-52E2-4E72-8EA2-FC10C888F3A8}" presName="compNode" presStyleCnt="0"/>
+      <dgm:spPr/>
+    </dgm:pt>
+    <dgm:pt modelId="{B841FB3A-90A7-43FC-97AB-F42558987A43}" type="pres">
+      <dgm:prSet presAssocID="{953DBE9C-52E2-4E72-8EA2-FC10C888F3A8}" presName="bgRect" presStyleLbl="bgShp" presStyleIdx="2" presStyleCnt="3"/>
+      <dgm:spPr/>
+    </dgm:pt>
+    <dgm:pt modelId="{BD6D3F32-B136-44EB-B3C8-BF413036096B}" type="pres">
+      <dgm:prSet presAssocID="{953DBE9C-52E2-4E72-8EA2-FC10C888F3A8}" presName="iconRect" presStyleLbl="node1" presStyleIdx="2" presStyleCnt="3"/>
+      <dgm:spPr>
+        <a:blipFill>
+          <a:blip xmlns:r="http://schemas.openxmlformats.org/officeDocument/2006/relationships" r:embed="rId5">
+            <a:extLst>
+              <a:ext uri="{28A0092B-C50C-407E-A947-70E740481C1C}">
+                <a14:useLocalDpi xmlns:a14="http://schemas.microsoft.com/office/drawing/2010/main" val="0"/>
+              </a:ext>
+              <a:ext uri="{96DAC541-7B7A-43D3-8B79-37D633B846F1}">
+                <asvg:svgBlip xmlns:asvg="http://schemas.microsoft.com/office/drawing/2016/SVG/main" r:embed="rId6"/>
+              </a:ext>
+            </a:extLst>
+          </a:blip>
+          <a:stretch>
+            <a:fillRect/>
+          </a:stretch>
+        </a:blipFill>
+      </dgm:spPr>
+      <dgm:extLst>
+        <a:ext uri="{E40237B7-FDA0-4F09-8148-C483321AD2D9}">
+          <dgm14:cNvPr xmlns:dgm14="http://schemas.microsoft.com/office/drawing/2010/diagram" id="0" name="" descr="Scooter"/>
+        </a:ext>
+      </dgm:extLst>
+    </dgm:pt>
+    <dgm:pt modelId="{B9910F1E-97DD-4AD1-8F54-8E302D79E2A6}" type="pres">
+      <dgm:prSet presAssocID="{953DBE9C-52E2-4E72-8EA2-FC10C888F3A8}" presName="spaceRect" presStyleCnt="0"/>
+      <dgm:spPr/>
+    </dgm:pt>
+    <dgm:pt modelId="{4156A6D6-FCAF-4889-867B-0BAA25412A00}" type="pres">
+      <dgm:prSet presAssocID="{953DBE9C-52E2-4E72-8EA2-FC10C888F3A8}" presName="parTx" presStyleLbl="revTx" presStyleIdx="2" presStyleCnt="3">
+        <dgm:presLayoutVars>
+          <dgm:chMax val="0"/>
+          <dgm:chPref val="0"/>
+        </dgm:presLayoutVars>
+      </dgm:prSet>
+      <dgm:spPr/>
+    </dgm:pt>
+  </dgm:ptLst>
+  <dgm:cxnLst>
+    <dgm:cxn modelId="{9497E692-DF44-4ACA-A432-F0B23A21BE6E}" type="presOf" srcId="{4D889CB8-735C-4792-802C-DEA78D018C2D}" destId="{50EB4F50-EB33-40BF-9284-11E32067849B}" srcOrd="0" destOrd="0" presId="urn:microsoft.com/office/officeart/2018/2/layout/IconVerticalSolidList"/>
+    <dgm:cxn modelId="{BCA6D094-AC80-44D5-8F4D-423AE98FBE85}" type="presOf" srcId="{9BC21732-84D0-4DFF-9E4C-448B76C2B603}" destId="{1DC891CD-F2F4-4670-A11A-52E199FE0B0F}" srcOrd="0" destOrd="0" presId="urn:microsoft.com/office/officeart/2018/2/layout/IconVerticalSolidList"/>
+    <dgm:cxn modelId="{F780CCA2-3D62-4C65-8D6C-339B01338B48}" type="presOf" srcId="{08A15578-3F62-4C4F-A8A6-5A351AE4522C}" destId="{36060422-0A3F-448D-8DD0-8525D72F3F69}" srcOrd="0" destOrd="0" presId="urn:microsoft.com/office/officeart/2018/2/layout/IconVerticalSolidList"/>
+    <dgm:cxn modelId="{51DB31D9-A8FB-44D4-AA97-2668217067DA}" srcId="{08A15578-3F62-4C4F-A8A6-5A351AE4522C}" destId="{4D889CB8-735C-4792-802C-DEA78D018C2D}" srcOrd="1" destOrd="0" parTransId="{044AFB96-11B6-4A92-9173-77C1B03DA9AA}" sibTransId="{EEA09663-FB48-4653-8FAC-B24E269497FB}"/>
+    <dgm:cxn modelId="{2AAD97E2-87CE-498C-8918-AF7BD0287794}" srcId="{08A15578-3F62-4C4F-A8A6-5A351AE4522C}" destId="{9BC21732-84D0-4DFF-9E4C-448B76C2B603}" srcOrd="0" destOrd="0" parTransId="{4BCD4F6B-D412-4BC6-9E7D-3247B94B1DB7}" sibTransId="{A73CE7A4-25D5-4737-A350-C6F52E7B9F55}"/>
+    <dgm:cxn modelId="{2743E9F3-8F82-4E0A-8E91-B27B22320528}" type="presOf" srcId="{953DBE9C-52E2-4E72-8EA2-FC10C888F3A8}" destId="{4156A6D6-FCAF-4889-867B-0BAA25412A00}" srcOrd="0" destOrd="0" presId="urn:microsoft.com/office/officeart/2018/2/layout/IconVerticalSolidList"/>
+    <dgm:cxn modelId="{C5ADEBFB-D604-491C-A089-3030FAEB710E}" srcId="{08A15578-3F62-4C4F-A8A6-5A351AE4522C}" destId="{953DBE9C-52E2-4E72-8EA2-FC10C888F3A8}" srcOrd="2" destOrd="0" parTransId="{F7E23863-D7D8-4E25-BDF7-B6813DD9A514}" sibTransId="{8CD496FF-F2D3-44E1-B4C2-455C124F399D}"/>
+    <dgm:cxn modelId="{BE5FE9F0-67A2-48CC-B4A8-7376E6A61E98}" type="presParOf" srcId="{36060422-0A3F-448D-8DD0-8525D72F3F69}" destId="{35EDFC76-8411-4C60-B3E4-1A3AA727C190}" srcOrd="0" destOrd="0" presId="urn:microsoft.com/office/officeart/2018/2/layout/IconVerticalSolidList"/>
+    <dgm:cxn modelId="{3D589AC6-1BF1-445A-A014-3A91B3423745}" type="presParOf" srcId="{35EDFC76-8411-4C60-B3E4-1A3AA727C190}" destId="{EE48416D-CE0A-4784-A9C5-A69B34D5D5F2}" srcOrd="0" destOrd="0" presId="urn:microsoft.com/office/officeart/2018/2/layout/IconVerticalSolidList"/>
+    <dgm:cxn modelId="{35E13E92-04D0-4A0A-94D5-98D630325E8F}" type="presParOf" srcId="{35EDFC76-8411-4C60-B3E4-1A3AA727C190}" destId="{D31FFA65-FD36-4884-862E-637FEECA3744}" srcOrd="1" destOrd="0" presId="urn:microsoft.com/office/officeart/2018/2/layout/IconVerticalSolidList"/>
+    <dgm:cxn modelId="{712CCCB1-DFBA-44E7-866A-2F0E8CFBDF3A}" type="presParOf" srcId="{35EDFC76-8411-4C60-B3E4-1A3AA727C190}" destId="{C87379D3-4AE7-4CB5-936B-1E926804B892}" srcOrd="2" destOrd="0" presId="urn:microsoft.com/office/officeart/2018/2/layout/IconVerticalSolidList"/>
+    <dgm:cxn modelId="{7A6CCD56-CD6A-4952-A793-E6DB91037FCD}" type="presParOf" srcId="{35EDFC76-8411-4C60-B3E4-1A3AA727C190}" destId="{1DC891CD-F2F4-4670-A11A-52E199FE0B0F}" srcOrd="3" destOrd="0" presId="urn:microsoft.com/office/officeart/2018/2/layout/IconVerticalSolidList"/>
+    <dgm:cxn modelId="{F9D065CC-34EC-4C94-8293-8E4CCF5F678A}" type="presParOf" srcId="{36060422-0A3F-448D-8DD0-8525D72F3F69}" destId="{D4A4B768-4378-4FD1-9097-300B97B6E52F}" srcOrd="1" destOrd="0" presId="urn:microsoft.com/office/officeart/2018/2/layout/IconVerticalSolidList"/>
+    <dgm:cxn modelId="{AAD4AE07-2C92-4D95-92E8-0444EFE8B6A3}" type="presParOf" srcId="{36060422-0A3F-448D-8DD0-8525D72F3F69}" destId="{F420259D-DDD9-466D-90DE-BB0BC7AAD565}" srcOrd="2" destOrd="0" presId="urn:microsoft.com/office/officeart/2018/2/layout/IconVerticalSolidList"/>
+    <dgm:cxn modelId="{6FB4C828-E1C9-4711-B4C5-FBD850FC3BCE}" type="presParOf" srcId="{F420259D-DDD9-466D-90DE-BB0BC7AAD565}" destId="{71339543-2CB5-4376-974F-891B127A827D}" srcOrd="0" destOrd="0" presId="urn:microsoft.com/office/officeart/2018/2/layout/IconVerticalSolidList"/>
+    <dgm:cxn modelId="{B06D2FE3-383C-4B21-9C96-42A9F55DE4DB}" type="presParOf" srcId="{F420259D-DDD9-466D-90DE-BB0BC7AAD565}" destId="{5A2F0FEC-8317-4ECE-87B9-D3975AA2F0D0}" srcOrd="1" destOrd="0" presId="urn:microsoft.com/office/officeart/2018/2/layout/IconVerticalSolidList"/>
+    <dgm:cxn modelId="{AAF29820-419A-4D1E-BA67-2BB127F54FC1}" type="presParOf" srcId="{F420259D-DDD9-466D-90DE-BB0BC7AAD565}" destId="{21D29AC4-CF4D-43D4-B2C9-A350B443F467}" srcOrd="2" destOrd="0" presId="urn:microsoft.com/office/officeart/2018/2/layout/IconVerticalSolidList"/>
+    <dgm:cxn modelId="{9F806303-7E39-4A0A-B6AF-C69B6F9363D4}" type="presParOf" srcId="{F420259D-DDD9-466D-90DE-BB0BC7AAD565}" destId="{50EB4F50-EB33-40BF-9284-11E32067849B}" srcOrd="3" destOrd="0" presId="urn:microsoft.com/office/officeart/2018/2/layout/IconVerticalSolidList"/>
+    <dgm:cxn modelId="{06457F73-402D-4E25-B5DA-546D2FE0AEA7}" type="presParOf" srcId="{36060422-0A3F-448D-8DD0-8525D72F3F69}" destId="{97DAB1DE-5329-4BC5-ACDA-9402E24EFF2D}" srcOrd="3" destOrd="0" presId="urn:microsoft.com/office/officeart/2018/2/layout/IconVerticalSolidList"/>
+    <dgm:cxn modelId="{8AAF148A-0A5A-4EEC-B2F8-3CA2AFD3B768}" type="presParOf" srcId="{36060422-0A3F-448D-8DD0-8525D72F3F69}" destId="{C8F7D285-7843-4CB2-9B6B-A50A19210DE9}" srcOrd="4" destOrd="0" presId="urn:microsoft.com/office/officeart/2018/2/layout/IconVerticalSolidList"/>
+    <dgm:cxn modelId="{118AC300-042A-4834-9745-996B1CC50874}" type="presParOf" srcId="{C8F7D285-7843-4CB2-9B6B-A50A19210DE9}" destId="{B841FB3A-90A7-43FC-97AB-F42558987A43}" srcOrd="0" destOrd="0" presId="urn:microsoft.com/office/officeart/2018/2/layout/IconVerticalSolidList"/>
+    <dgm:cxn modelId="{399239BC-9A79-4C2D-BA9F-865B5A85A01B}" type="presParOf" srcId="{C8F7D285-7843-4CB2-9B6B-A50A19210DE9}" destId="{BD6D3F32-B136-44EB-B3C8-BF413036096B}" srcOrd="1" destOrd="0" presId="urn:microsoft.com/office/officeart/2018/2/layout/IconVerticalSolidList"/>
+    <dgm:cxn modelId="{C66AA057-6680-4D83-937F-B7DF7E990887}" type="presParOf" srcId="{C8F7D285-7843-4CB2-9B6B-A50A19210DE9}" destId="{B9910F1E-97DD-4AD1-8F54-8E302D79E2A6}" srcOrd="2" destOrd="0" presId="urn:microsoft.com/office/officeart/2018/2/layout/IconVerticalSolidList"/>
+    <dgm:cxn modelId="{8498CE7B-86B9-47FA-BD6F-05B5A4DD8E7C}" type="presParOf" srcId="{C8F7D285-7843-4CB2-9B6B-A50A19210DE9}" destId="{4156A6D6-FCAF-4889-867B-0BAA25412A00}" srcOrd="3" destOrd="0" presId="urn:microsoft.com/office/officeart/2018/2/layout/IconVerticalSolidList"/>
+  </dgm:cxnLst>
+  <dgm:bg/>
+  <dgm:whole/>
+  <dgm:extLst>
+    <a:ext uri="http://schemas.microsoft.com/office/drawing/2008/diagram">
+      <dsp:dataModelExt xmlns:dsp="http://schemas.microsoft.com/office/drawing/2008/diagram" relId="rId6" minVer="http://schemas.openxmlformats.org/drawingml/2006/diagram"/>
     </a:ext>
   </dgm:extLst>
 </dgm:dataModel>
@@ -5064,7 +7310,7 @@
             <a:buNone/>
           </a:pPr>
           <a:r>
-            <a:rPr lang="en-US" sz="1200" kern="1200"/>
+            <a:rPr lang="en-US" sz="1200" kern="1200" dirty="0"/>
             <a:t>OpenCV : OpenCV is a well-known open-source library that offers many tools and functions for processing images and videos. It provides a wide range of features for feature recognition, computer vision techniques, and picture editing. </a:t>
           </a:r>
         </a:p>
@@ -5516,6 +7762,1256 @@
       <dsp:txXfrm>
         <a:off x="6598632" y="2002269"/>
         <a:ext cx="2965335" cy="1258021"/>
+      </dsp:txXfrm>
+    </dsp:sp>
+  </dsp:spTree>
+</dsp:drawing>
+</file>
+
+<file path=ppt/diagrams/drawing4.xml><?xml version="1.0" encoding="utf-8"?>
+<dsp:drawing xmlns:dgm="http://schemas.openxmlformats.org/drawingml/2006/diagram" xmlns:dsp="http://schemas.microsoft.com/office/drawing/2008/diagram" xmlns:a="http://schemas.openxmlformats.org/drawingml/2006/main">
+  <dsp:spTree>
+    <dsp:nvGrpSpPr>
+      <dsp:cNvPr id="0" name=""/>
+      <dsp:cNvGrpSpPr/>
+    </dsp:nvGrpSpPr>
+    <dsp:grpSpPr/>
+    <dsp:sp modelId="{64C91CAE-C1A0-4253-ABEF-4877FF4D4155}">
+      <dsp:nvSpPr>
+        <dsp:cNvPr id="0" name=""/>
+        <dsp:cNvSpPr/>
+      </dsp:nvSpPr>
+      <dsp:spPr>
+        <a:xfrm>
+          <a:off x="187" y="349312"/>
+          <a:ext cx="2270048" cy="2724058"/>
+        </a:xfrm>
+        <a:prstGeom prst="rect">
+          <a:avLst/>
+        </a:prstGeom>
+        <a:gradFill rotWithShape="0">
+          <a:gsLst>
+            <a:gs pos="0">
+              <a:schemeClr val="accent2">
+                <a:hueOff val="0"/>
+                <a:satOff val="0"/>
+                <a:lumOff val="0"/>
+                <a:alphaOff val="0"/>
+                <a:tint val="98000"/>
+                <a:lumMod val="114000"/>
+              </a:schemeClr>
+            </a:gs>
+            <a:gs pos="100000">
+              <a:schemeClr val="accent2">
+                <a:hueOff val="0"/>
+                <a:satOff val="0"/>
+                <a:lumOff val="0"/>
+                <a:alphaOff val="0"/>
+                <a:shade val="90000"/>
+                <a:lumMod val="84000"/>
+              </a:schemeClr>
+            </a:gs>
+          </a:gsLst>
+          <a:lin ang="5400000" scaled="0"/>
+        </a:gradFill>
+        <a:ln w="9525" cap="rnd" cmpd="sng" algn="ctr">
+          <a:solidFill>
+            <a:schemeClr val="accent2">
+              <a:hueOff val="0"/>
+              <a:satOff val="0"/>
+              <a:lumOff val="0"/>
+              <a:alphaOff val="0"/>
+            </a:schemeClr>
+          </a:solidFill>
+          <a:prstDash val="solid"/>
+        </a:ln>
+        <a:effectLst>
+          <a:outerShdw blurRad="38100" dist="25400" dir="5400000" rotWithShape="0">
+            <a:srgbClr val="000000">
+              <a:alpha val="45000"/>
+            </a:srgbClr>
+          </a:outerShdw>
+        </a:effectLst>
+      </dsp:spPr>
+      <dsp:style>
+        <a:lnRef idx="1">
+          <a:scrgbClr r="0" g="0" b="0"/>
+        </a:lnRef>
+        <a:fillRef idx="3">
+          <a:scrgbClr r="0" g="0" b="0"/>
+        </a:fillRef>
+        <a:effectRef idx="2">
+          <a:scrgbClr r="0" g="0" b="0"/>
+        </a:effectRef>
+        <a:fontRef idx="minor">
+          <a:schemeClr val="lt1"/>
+        </a:fontRef>
+      </dsp:style>
+      <dsp:txBody>
+        <a:bodyPr spcFirstLastPara="0" vert="horz" wrap="square" lIns="224230" tIns="0" rIns="224230" bIns="330200" numCol="1" spcCol="1270" anchor="t" anchorCtr="0">
+          <a:noAutofit/>
+        </a:bodyPr>
+        <a:lstStyle/>
+        <a:p>
+          <a:pPr marL="0" lvl="0" indent="0" algn="just" defTabSz="488950">
+            <a:lnSpc>
+              <a:spcPct val="90000"/>
+            </a:lnSpc>
+            <a:spcBef>
+              <a:spcPct val="0"/>
+            </a:spcBef>
+            <a:spcAft>
+              <a:spcPct val="35000"/>
+            </a:spcAft>
+            <a:buNone/>
+          </a:pPr>
+          <a:r>
+            <a:rPr lang="en-US" sz="1100" b="1" kern="1200" dirty="0"/>
+            <a:t>Increased safety: </a:t>
+          </a:r>
+        </a:p>
+        <a:p>
+          <a:pPr marL="0" lvl="0" indent="0" algn="just" defTabSz="488950">
+            <a:lnSpc>
+              <a:spcPct val="90000"/>
+            </a:lnSpc>
+            <a:spcBef>
+              <a:spcPct val="0"/>
+            </a:spcBef>
+            <a:spcAft>
+              <a:spcPct val="35000"/>
+            </a:spcAft>
+            <a:buNone/>
+          </a:pPr>
+          <a:r>
+            <a:rPr lang="en-US" sz="1100" kern="1200" dirty="0"/>
+            <a:t>Drowsy driving can lead to accidents and mistakes. Early detection of drowsiness can help prevent accidents and ensure the safety of individuals.</a:t>
+          </a:r>
+        </a:p>
+      </dsp:txBody>
+      <dsp:txXfrm>
+        <a:off x="187" y="1438935"/>
+        <a:ext cx="2270048" cy="1634435"/>
+      </dsp:txXfrm>
+    </dsp:sp>
+    <dsp:sp modelId="{BD043F86-0749-4C3A-8D42-690A5CEEEF0E}">
+      <dsp:nvSpPr>
+        <dsp:cNvPr id="0" name=""/>
+        <dsp:cNvSpPr/>
+      </dsp:nvSpPr>
+      <dsp:spPr>
+        <a:xfrm>
+          <a:off x="187" y="349312"/>
+          <a:ext cx="2270048" cy="1089623"/>
+        </a:xfrm>
+        <a:prstGeom prst="rect">
+          <a:avLst/>
+        </a:prstGeom>
+        <a:noFill/>
+        <a:ln w="9525" cap="rnd" cmpd="sng" algn="ctr">
+          <a:noFill/>
+          <a:prstDash val="solid"/>
+        </a:ln>
+        <a:effectLst>
+          <a:outerShdw blurRad="38100" dist="25400" dir="5400000" rotWithShape="0">
+            <a:srgbClr val="000000">
+              <a:alpha val="45000"/>
+            </a:srgbClr>
+          </a:outerShdw>
+        </a:effectLst>
+        <a:sp3d/>
+      </dsp:spPr>
+      <dsp:style>
+        <a:lnRef idx="1">
+          <a:scrgbClr r="0" g="0" b="0"/>
+        </a:lnRef>
+        <a:fillRef idx="3">
+          <a:scrgbClr r="0" g="0" b="0"/>
+        </a:fillRef>
+        <a:effectRef idx="2">
+          <a:scrgbClr r="0" g="0" b="0"/>
+        </a:effectRef>
+        <a:fontRef idx="minor">
+          <a:schemeClr val="lt1"/>
+        </a:fontRef>
+      </dsp:style>
+      <dsp:txBody>
+        <a:bodyPr spcFirstLastPara="0" vert="horz" wrap="square" lIns="224230" tIns="165100" rIns="224230" bIns="165100" numCol="1" spcCol="1270" anchor="ctr" anchorCtr="0">
+          <a:noAutofit/>
+        </a:bodyPr>
+        <a:lstStyle/>
+        <a:p>
+          <a:pPr marL="0" lvl="0" indent="0" algn="l" defTabSz="2400300">
+            <a:lnSpc>
+              <a:spcPct val="90000"/>
+            </a:lnSpc>
+            <a:spcBef>
+              <a:spcPct val="0"/>
+            </a:spcBef>
+            <a:spcAft>
+              <a:spcPct val="35000"/>
+            </a:spcAft>
+            <a:buNone/>
+          </a:pPr>
+          <a:r>
+            <a:rPr lang="en-US" sz="5400" kern="1200"/>
+            <a:t>01</a:t>
+          </a:r>
+        </a:p>
+      </dsp:txBody>
+      <dsp:txXfrm>
+        <a:off x="187" y="349312"/>
+        <a:ext cx="2270048" cy="1089623"/>
+      </dsp:txXfrm>
+    </dsp:sp>
+    <dsp:sp modelId="{F090059F-EEFF-46CE-9E91-14903C4BB661}">
+      <dsp:nvSpPr>
+        <dsp:cNvPr id="0" name=""/>
+        <dsp:cNvSpPr/>
+      </dsp:nvSpPr>
+      <dsp:spPr>
+        <a:xfrm>
+          <a:off x="2451840" y="349312"/>
+          <a:ext cx="2270048" cy="2724058"/>
+        </a:xfrm>
+        <a:prstGeom prst="rect">
+          <a:avLst/>
+        </a:prstGeom>
+        <a:gradFill rotWithShape="0">
+          <a:gsLst>
+            <a:gs pos="0">
+              <a:schemeClr val="accent2">
+                <a:hueOff val="-6588574"/>
+                <a:satOff val="300"/>
+                <a:lumOff val="0"/>
+                <a:alphaOff val="0"/>
+                <a:tint val="98000"/>
+                <a:lumMod val="114000"/>
+              </a:schemeClr>
+            </a:gs>
+            <a:gs pos="100000">
+              <a:schemeClr val="accent2">
+                <a:hueOff val="-6588574"/>
+                <a:satOff val="300"/>
+                <a:lumOff val="0"/>
+                <a:alphaOff val="0"/>
+                <a:shade val="90000"/>
+                <a:lumMod val="84000"/>
+              </a:schemeClr>
+            </a:gs>
+          </a:gsLst>
+          <a:lin ang="5400000" scaled="0"/>
+        </a:gradFill>
+        <a:ln w="9525" cap="rnd" cmpd="sng" algn="ctr">
+          <a:solidFill>
+            <a:schemeClr val="accent2">
+              <a:hueOff val="-6588574"/>
+              <a:satOff val="300"/>
+              <a:lumOff val="0"/>
+              <a:alphaOff val="0"/>
+            </a:schemeClr>
+          </a:solidFill>
+          <a:prstDash val="solid"/>
+        </a:ln>
+        <a:effectLst>
+          <a:outerShdw blurRad="38100" dist="25400" dir="5400000" rotWithShape="0">
+            <a:srgbClr val="000000">
+              <a:alpha val="45000"/>
+            </a:srgbClr>
+          </a:outerShdw>
+        </a:effectLst>
+      </dsp:spPr>
+      <dsp:style>
+        <a:lnRef idx="1">
+          <a:scrgbClr r="0" g="0" b="0"/>
+        </a:lnRef>
+        <a:fillRef idx="3">
+          <a:scrgbClr r="0" g="0" b="0"/>
+        </a:fillRef>
+        <a:effectRef idx="2">
+          <a:scrgbClr r="0" g="0" b="0"/>
+        </a:effectRef>
+        <a:fontRef idx="minor">
+          <a:schemeClr val="lt1"/>
+        </a:fontRef>
+      </dsp:style>
+      <dsp:txBody>
+        <a:bodyPr spcFirstLastPara="0" vert="horz" wrap="square" lIns="224230" tIns="0" rIns="224230" bIns="330200" numCol="1" spcCol="1270" anchor="t" anchorCtr="0">
+          <a:noAutofit/>
+        </a:bodyPr>
+        <a:lstStyle/>
+        <a:p>
+          <a:pPr marL="0" lvl="0" indent="0" algn="l" defTabSz="488950">
+            <a:lnSpc>
+              <a:spcPct val="90000"/>
+            </a:lnSpc>
+            <a:spcBef>
+              <a:spcPct val="0"/>
+            </a:spcBef>
+            <a:spcAft>
+              <a:spcPct val="35000"/>
+            </a:spcAft>
+            <a:buNone/>
+          </a:pPr>
+          <a:r>
+            <a:rPr lang="en-US" sz="1100" b="1" kern="1200" dirty="0"/>
+            <a:t>Improved productivity:</a:t>
+          </a:r>
+        </a:p>
+        <a:p>
+          <a:pPr marL="0" lvl="0" indent="0" algn="just" defTabSz="488950">
+            <a:lnSpc>
+              <a:spcPct val="90000"/>
+            </a:lnSpc>
+            <a:spcBef>
+              <a:spcPct val="0"/>
+            </a:spcBef>
+            <a:spcAft>
+              <a:spcPct val="35000"/>
+            </a:spcAft>
+            <a:buNone/>
+          </a:pPr>
+          <a:r>
+            <a:rPr lang="en-US" sz="1100" kern="1200" dirty="0"/>
+            <a:t>When individuals are alert and awake, they are more productive and efficient in their work. Drowsiness detection can help ensure that individuals are alert and performing at their best.</a:t>
+          </a:r>
+        </a:p>
+      </dsp:txBody>
+      <dsp:txXfrm>
+        <a:off x="2451840" y="1438935"/>
+        <a:ext cx="2270048" cy="1634435"/>
+      </dsp:txXfrm>
+    </dsp:sp>
+    <dsp:sp modelId="{F76448D6-48C2-4F3F-9676-2CA8ECC7CD67}">
+      <dsp:nvSpPr>
+        <dsp:cNvPr id="0" name=""/>
+        <dsp:cNvSpPr/>
+      </dsp:nvSpPr>
+      <dsp:spPr>
+        <a:xfrm>
+          <a:off x="2451840" y="349312"/>
+          <a:ext cx="2270048" cy="1089623"/>
+        </a:xfrm>
+        <a:prstGeom prst="rect">
+          <a:avLst/>
+        </a:prstGeom>
+        <a:noFill/>
+        <a:ln w="9525" cap="rnd" cmpd="sng" algn="ctr">
+          <a:noFill/>
+          <a:prstDash val="solid"/>
+        </a:ln>
+        <a:effectLst>
+          <a:outerShdw blurRad="38100" dist="25400" dir="5400000" rotWithShape="0">
+            <a:srgbClr val="000000">
+              <a:alpha val="45000"/>
+            </a:srgbClr>
+          </a:outerShdw>
+        </a:effectLst>
+        <a:sp3d/>
+      </dsp:spPr>
+      <dsp:style>
+        <a:lnRef idx="1">
+          <a:scrgbClr r="0" g="0" b="0"/>
+        </a:lnRef>
+        <a:fillRef idx="3">
+          <a:scrgbClr r="0" g="0" b="0"/>
+        </a:fillRef>
+        <a:effectRef idx="2">
+          <a:scrgbClr r="0" g="0" b="0"/>
+        </a:effectRef>
+        <a:fontRef idx="minor">
+          <a:schemeClr val="lt1"/>
+        </a:fontRef>
+      </dsp:style>
+      <dsp:txBody>
+        <a:bodyPr spcFirstLastPara="0" vert="horz" wrap="square" lIns="224230" tIns="165100" rIns="224230" bIns="165100" numCol="1" spcCol="1270" anchor="ctr" anchorCtr="0">
+          <a:noAutofit/>
+        </a:bodyPr>
+        <a:lstStyle/>
+        <a:p>
+          <a:pPr marL="0" lvl="0" indent="0" algn="l" defTabSz="2400300">
+            <a:lnSpc>
+              <a:spcPct val="90000"/>
+            </a:lnSpc>
+            <a:spcBef>
+              <a:spcPct val="0"/>
+            </a:spcBef>
+            <a:spcAft>
+              <a:spcPct val="35000"/>
+            </a:spcAft>
+            <a:buNone/>
+          </a:pPr>
+          <a:r>
+            <a:rPr lang="en-US" sz="5400" kern="1200"/>
+            <a:t>02</a:t>
+          </a:r>
+        </a:p>
+      </dsp:txBody>
+      <dsp:txXfrm>
+        <a:off x="2451840" y="349312"/>
+        <a:ext cx="2270048" cy="1089623"/>
+      </dsp:txXfrm>
+    </dsp:sp>
+    <dsp:sp modelId="{F9FA4C44-030B-448D-83AB-79582CD9A8ED}">
+      <dsp:nvSpPr>
+        <dsp:cNvPr id="0" name=""/>
+        <dsp:cNvSpPr/>
+      </dsp:nvSpPr>
+      <dsp:spPr>
+        <a:xfrm>
+          <a:off x="4903493" y="349312"/>
+          <a:ext cx="2270048" cy="2724058"/>
+        </a:xfrm>
+        <a:prstGeom prst="rect">
+          <a:avLst/>
+        </a:prstGeom>
+        <a:gradFill rotWithShape="0">
+          <a:gsLst>
+            <a:gs pos="0">
+              <a:schemeClr val="accent2">
+                <a:hueOff val="-13177148"/>
+                <a:satOff val="601"/>
+                <a:lumOff val="0"/>
+                <a:alphaOff val="0"/>
+                <a:tint val="98000"/>
+                <a:lumMod val="114000"/>
+              </a:schemeClr>
+            </a:gs>
+            <a:gs pos="100000">
+              <a:schemeClr val="accent2">
+                <a:hueOff val="-13177148"/>
+                <a:satOff val="601"/>
+                <a:lumOff val="0"/>
+                <a:alphaOff val="0"/>
+                <a:shade val="90000"/>
+                <a:lumMod val="84000"/>
+              </a:schemeClr>
+            </a:gs>
+          </a:gsLst>
+          <a:lin ang="5400000" scaled="0"/>
+        </a:gradFill>
+        <a:ln w="9525" cap="rnd" cmpd="sng" algn="ctr">
+          <a:solidFill>
+            <a:schemeClr val="accent2">
+              <a:hueOff val="-13177148"/>
+              <a:satOff val="601"/>
+              <a:lumOff val="0"/>
+              <a:alphaOff val="0"/>
+            </a:schemeClr>
+          </a:solidFill>
+          <a:prstDash val="solid"/>
+        </a:ln>
+        <a:effectLst>
+          <a:outerShdw blurRad="38100" dist="25400" dir="5400000" rotWithShape="0">
+            <a:srgbClr val="000000">
+              <a:alpha val="45000"/>
+            </a:srgbClr>
+          </a:outerShdw>
+        </a:effectLst>
+      </dsp:spPr>
+      <dsp:style>
+        <a:lnRef idx="1">
+          <a:scrgbClr r="0" g="0" b="0"/>
+        </a:lnRef>
+        <a:fillRef idx="3">
+          <a:scrgbClr r="0" g="0" b="0"/>
+        </a:fillRef>
+        <a:effectRef idx="2">
+          <a:scrgbClr r="0" g="0" b="0"/>
+        </a:effectRef>
+        <a:fontRef idx="minor">
+          <a:schemeClr val="lt1"/>
+        </a:fontRef>
+      </dsp:style>
+      <dsp:txBody>
+        <a:bodyPr spcFirstLastPara="0" vert="horz" wrap="square" lIns="224230" tIns="0" rIns="224230" bIns="330200" numCol="1" spcCol="1270" anchor="t" anchorCtr="0">
+          <a:noAutofit/>
+        </a:bodyPr>
+        <a:lstStyle/>
+        <a:p>
+          <a:pPr marL="0" lvl="0" indent="0" algn="l" defTabSz="488950">
+            <a:lnSpc>
+              <a:spcPct val="90000"/>
+            </a:lnSpc>
+            <a:spcBef>
+              <a:spcPct val="0"/>
+            </a:spcBef>
+            <a:spcAft>
+              <a:spcPct val="35000"/>
+            </a:spcAft>
+            <a:buNone/>
+          </a:pPr>
+          <a:r>
+            <a:rPr lang="en-US" sz="1100" b="1" kern="1200" dirty="0"/>
+            <a:t>Early intervention: </a:t>
+          </a:r>
+        </a:p>
+        <a:p>
+          <a:pPr marL="0" lvl="0" indent="0" algn="just" defTabSz="488950">
+            <a:lnSpc>
+              <a:spcPct val="90000"/>
+            </a:lnSpc>
+            <a:spcBef>
+              <a:spcPct val="0"/>
+            </a:spcBef>
+            <a:spcAft>
+              <a:spcPct val="35000"/>
+            </a:spcAft>
+            <a:buNone/>
+          </a:pPr>
+          <a:r>
+            <a:rPr lang="en-US" sz="1100" kern="1200" dirty="0"/>
+            <a:t>Early detection of drowsiness can allow for early intervention, such as taking a break or resting, to prevent further fatigue and drowsiness.</a:t>
+          </a:r>
+        </a:p>
+      </dsp:txBody>
+      <dsp:txXfrm>
+        <a:off x="4903493" y="1438935"/>
+        <a:ext cx="2270048" cy="1634435"/>
+      </dsp:txXfrm>
+    </dsp:sp>
+    <dsp:sp modelId="{8EE169C0-ADEC-479D-BCEC-FEE52DC3E76C}">
+      <dsp:nvSpPr>
+        <dsp:cNvPr id="0" name=""/>
+        <dsp:cNvSpPr/>
+      </dsp:nvSpPr>
+      <dsp:spPr>
+        <a:xfrm>
+          <a:off x="4903493" y="349312"/>
+          <a:ext cx="2270048" cy="1089623"/>
+        </a:xfrm>
+        <a:prstGeom prst="rect">
+          <a:avLst/>
+        </a:prstGeom>
+        <a:noFill/>
+        <a:ln w="9525" cap="rnd" cmpd="sng" algn="ctr">
+          <a:noFill/>
+          <a:prstDash val="solid"/>
+        </a:ln>
+        <a:effectLst>
+          <a:outerShdw blurRad="38100" dist="25400" dir="5400000" rotWithShape="0">
+            <a:srgbClr val="000000">
+              <a:alpha val="45000"/>
+            </a:srgbClr>
+          </a:outerShdw>
+        </a:effectLst>
+        <a:sp3d/>
+      </dsp:spPr>
+      <dsp:style>
+        <a:lnRef idx="1">
+          <a:scrgbClr r="0" g="0" b="0"/>
+        </a:lnRef>
+        <a:fillRef idx="3">
+          <a:scrgbClr r="0" g="0" b="0"/>
+        </a:fillRef>
+        <a:effectRef idx="2">
+          <a:scrgbClr r="0" g="0" b="0"/>
+        </a:effectRef>
+        <a:fontRef idx="minor">
+          <a:schemeClr val="lt1"/>
+        </a:fontRef>
+      </dsp:style>
+      <dsp:txBody>
+        <a:bodyPr spcFirstLastPara="0" vert="horz" wrap="square" lIns="224230" tIns="165100" rIns="224230" bIns="165100" numCol="1" spcCol="1270" anchor="ctr" anchorCtr="0">
+          <a:noAutofit/>
+        </a:bodyPr>
+        <a:lstStyle/>
+        <a:p>
+          <a:pPr marL="0" lvl="0" indent="0" algn="l" defTabSz="2400300">
+            <a:lnSpc>
+              <a:spcPct val="90000"/>
+            </a:lnSpc>
+            <a:spcBef>
+              <a:spcPct val="0"/>
+            </a:spcBef>
+            <a:spcAft>
+              <a:spcPct val="35000"/>
+            </a:spcAft>
+            <a:buNone/>
+          </a:pPr>
+          <a:r>
+            <a:rPr lang="en-US" sz="5400" kern="1200"/>
+            <a:t>03</a:t>
+          </a:r>
+        </a:p>
+      </dsp:txBody>
+      <dsp:txXfrm>
+        <a:off x="4903493" y="349312"/>
+        <a:ext cx="2270048" cy="1089623"/>
+      </dsp:txXfrm>
+    </dsp:sp>
+    <dsp:sp modelId="{1D2C85BD-632F-4724-8513-3077D26814A9}">
+      <dsp:nvSpPr>
+        <dsp:cNvPr id="0" name=""/>
+        <dsp:cNvSpPr/>
+      </dsp:nvSpPr>
+      <dsp:spPr>
+        <a:xfrm>
+          <a:off x="7355146" y="349312"/>
+          <a:ext cx="2270048" cy="2724058"/>
+        </a:xfrm>
+        <a:prstGeom prst="rect">
+          <a:avLst/>
+        </a:prstGeom>
+        <a:gradFill rotWithShape="0">
+          <a:gsLst>
+            <a:gs pos="0">
+              <a:schemeClr val="accent2">
+                <a:hueOff val="-19765721"/>
+                <a:satOff val="901"/>
+                <a:lumOff val="0"/>
+                <a:alphaOff val="0"/>
+                <a:tint val="98000"/>
+                <a:lumMod val="114000"/>
+              </a:schemeClr>
+            </a:gs>
+            <a:gs pos="100000">
+              <a:schemeClr val="accent2">
+                <a:hueOff val="-19765721"/>
+                <a:satOff val="901"/>
+                <a:lumOff val="0"/>
+                <a:alphaOff val="0"/>
+                <a:shade val="90000"/>
+                <a:lumMod val="84000"/>
+              </a:schemeClr>
+            </a:gs>
+          </a:gsLst>
+          <a:lin ang="5400000" scaled="0"/>
+        </a:gradFill>
+        <a:ln w="9525" cap="rnd" cmpd="sng" algn="ctr">
+          <a:solidFill>
+            <a:schemeClr val="accent2">
+              <a:hueOff val="-19765721"/>
+              <a:satOff val="901"/>
+              <a:lumOff val="0"/>
+              <a:alphaOff val="0"/>
+            </a:schemeClr>
+          </a:solidFill>
+          <a:prstDash val="solid"/>
+        </a:ln>
+        <a:effectLst>
+          <a:outerShdw blurRad="38100" dist="25400" dir="5400000" rotWithShape="0">
+            <a:srgbClr val="000000">
+              <a:alpha val="45000"/>
+            </a:srgbClr>
+          </a:outerShdw>
+        </a:effectLst>
+      </dsp:spPr>
+      <dsp:style>
+        <a:lnRef idx="1">
+          <a:scrgbClr r="0" g="0" b="0"/>
+        </a:lnRef>
+        <a:fillRef idx="3">
+          <a:scrgbClr r="0" g="0" b="0"/>
+        </a:fillRef>
+        <a:effectRef idx="2">
+          <a:scrgbClr r="0" g="0" b="0"/>
+        </a:effectRef>
+        <a:fontRef idx="minor">
+          <a:schemeClr val="lt1"/>
+        </a:fontRef>
+      </dsp:style>
+      <dsp:txBody>
+        <a:bodyPr spcFirstLastPara="0" vert="horz" wrap="square" lIns="224230" tIns="0" rIns="224230" bIns="330200" numCol="1" spcCol="1270" anchor="t" anchorCtr="0">
+          <a:noAutofit/>
+        </a:bodyPr>
+        <a:lstStyle/>
+        <a:p>
+          <a:pPr marL="0" lvl="0" indent="0" algn="l" defTabSz="488950">
+            <a:lnSpc>
+              <a:spcPct val="90000"/>
+            </a:lnSpc>
+            <a:spcBef>
+              <a:spcPct val="0"/>
+            </a:spcBef>
+            <a:spcAft>
+              <a:spcPct val="35000"/>
+            </a:spcAft>
+            <a:buNone/>
+          </a:pPr>
+          <a:r>
+            <a:rPr lang="en-US" sz="1100" b="1" kern="1200" dirty="0"/>
+            <a:t>Cost-effective: </a:t>
+          </a:r>
+        </a:p>
+        <a:p>
+          <a:pPr marL="0" lvl="0" indent="0" algn="just" defTabSz="488950">
+            <a:lnSpc>
+              <a:spcPct val="90000"/>
+            </a:lnSpc>
+            <a:spcBef>
+              <a:spcPct val="0"/>
+            </a:spcBef>
+            <a:spcAft>
+              <a:spcPct val="35000"/>
+            </a:spcAft>
+            <a:buNone/>
+          </a:pPr>
+          <a:r>
+            <a:rPr lang="en-US" sz="1100" kern="1200" dirty="0"/>
+            <a:t>Drowsiness detection using deep learning can be cost-effective compared to traditional methods such as hiring a dedicated observer or using expensive equipment.</a:t>
+          </a:r>
+        </a:p>
+      </dsp:txBody>
+      <dsp:txXfrm>
+        <a:off x="7355146" y="1438935"/>
+        <a:ext cx="2270048" cy="1634435"/>
+      </dsp:txXfrm>
+    </dsp:sp>
+    <dsp:sp modelId="{ECB47BEB-3768-47DD-999F-F47E63EEBD69}">
+      <dsp:nvSpPr>
+        <dsp:cNvPr id="0" name=""/>
+        <dsp:cNvSpPr/>
+      </dsp:nvSpPr>
+      <dsp:spPr>
+        <a:xfrm>
+          <a:off x="7355146" y="349312"/>
+          <a:ext cx="2270048" cy="1089623"/>
+        </a:xfrm>
+        <a:prstGeom prst="rect">
+          <a:avLst/>
+        </a:prstGeom>
+        <a:noFill/>
+        <a:ln w="9525" cap="rnd" cmpd="sng" algn="ctr">
+          <a:noFill/>
+          <a:prstDash val="solid"/>
+        </a:ln>
+        <a:effectLst>
+          <a:outerShdw blurRad="38100" dist="25400" dir="5400000" rotWithShape="0">
+            <a:srgbClr val="000000">
+              <a:alpha val="45000"/>
+            </a:srgbClr>
+          </a:outerShdw>
+        </a:effectLst>
+        <a:sp3d/>
+      </dsp:spPr>
+      <dsp:style>
+        <a:lnRef idx="1">
+          <a:scrgbClr r="0" g="0" b="0"/>
+        </a:lnRef>
+        <a:fillRef idx="3">
+          <a:scrgbClr r="0" g="0" b="0"/>
+        </a:fillRef>
+        <a:effectRef idx="2">
+          <a:scrgbClr r="0" g="0" b="0"/>
+        </a:effectRef>
+        <a:fontRef idx="minor">
+          <a:schemeClr val="lt1"/>
+        </a:fontRef>
+      </dsp:style>
+      <dsp:txBody>
+        <a:bodyPr spcFirstLastPara="0" vert="horz" wrap="square" lIns="224230" tIns="165100" rIns="224230" bIns="165100" numCol="1" spcCol="1270" anchor="ctr" anchorCtr="0">
+          <a:noAutofit/>
+        </a:bodyPr>
+        <a:lstStyle/>
+        <a:p>
+          <a:pPr marL="0" lvl="0" indent="0" algn="l" defTabSz="2400300">
+            <a:lnSpc>
+              <a:spcPct val="90000"/>
+            </a:lnSpc>
+            <a:spcBef>
+              <a:spcPct val="0"/>
+            </a:spcBef>
+            <a:spcAft>
+              <a:spcPct val="35000"/>
+            </a:spcAft>
+            <a:buNone/>
+          </a:pPr>
+          <a:r>
+            <a:rPr lang="en-US" sz="5400" kern="1200"/>
+            <a:t>04</a:t>
+          </a:r>
+        </a:p>
+      </dsp:txBody>
+      <dsp:txXfrm>
+        <a:off x="7355146" y="349312"/>
+        <a:ext cx="2270048" cy="1089623"/>
+      </dsp:txXfrm>
+    </dsp:sp>
+  </dsp:spTree>
+</dsp:drawing>
+</file>
+
+<file path=ppt/diagrams/drawing5.xml><?xml version="1.0" encoding="utf-8"?>
+<dsp:drawing xmlns:dgm="http://schemas.openxmlformats.org/drawingml/2006/diagram" xmlns:dsp="http://schemas.microsoft.com/office/drawing/2008/diagram" xmlns:a="http://schemas.openxmlformats.org/drawingml/2006/main">
+  <dsp:spTree>
+    <dsp:nvGrpSpPr>
+      <dsp:cNvPr id="0" name=""/>
+      <dsp:cNvGrpSpPr/>
+    </dsp:nvGrpSpPr>
+    <dsp:grpSpPr/>
+    <dsp:sp modelId="{EE48416D-CE0A-4784-A9C5-A69B34D5D5F2}">
+      <dsp:nvSpPr>
+        <dsp:cNvPr id="0" name=""/>
+        <dsp:cNvSpPr/>
+      </dsp:nvSpPr>
+      <dsp:spPr>
+        <a:xfrm>
+          <a:off x="0" y="713"/>
+          <a:ext cx="5354740" cy="1670549"/>
+        </a:xfrm>
+        <a:prstGeom prst="roundRect">
+          <a:avLst>
+            <a:gd name="adj" fmla="val 10000"/>
+          </a:avLst>
+        </a:prstGeom>
+        <a:solidFill>
+          <a:schemeClr val="accent1">
+            <a:tint val="40000"/>
+            <a:hueOff val="0"/>
+            <a:satOff val="0"/>
+            <a:lumOff val="0"/>
+            <a:alphaOff val="0"/>
+          </a:schemeClr>
+        </a:solidFill>
+        <a:ln>
+          <a:noFill/>
+        </a:ln>
+        <a:effectLst/>
+      </dsp:spPr>
+      <dsp:style>
+        <a:lnRef idx="0">
+          <a:scrgbClr r="0" g="0" b="0"/>
+        </a:lnRef>
+        <a:fillRef idx="1">
+          <a:scrgbClr r="0" g="0" b="0"/>
+        </a:fillRef>
+        <a:effectRef idx="0">
+          <a:scrgbClr r="0" g="0" b="0"/>
+        </a:effectRef>
+        <a:fontRef idx="minor"/>
+      </dsp:style>
+    </dsp:sp>
+    <dsp:sp modelId="{D31FFA65-FD36-4884-862E-637FEECA3744}">
+      <dsp:nvSpPr>
+        <dsp:cNvPr id="0" name=""/>
+        <dsp:cNvSpPr/>
+      </dsp:nvSpPr>
+      <dsp:spPr>
+        <a:xfrm>
+          <a:off x="505341" y="376587"/>
+          <a:ext cx="918802" cy="918802"/>
+        </a:xfrm>
+        <a:prstGeom prst="rect">
+          <a:avLst/>
+        </a:prstGeom>
+        <a:blipFill>
+          <a:blip xmlns:r="http://schemas.openxmlformats.org/officeDocument/2006/relationships" r:embed="rId1">
+            <a:extLst>
+              <a:ext uri="{28A0092B-C50C-407E-A947-70E740481C1C}">
+                <a14:useLocalDpi xmlns:a14="http://schemas.microsoft.com/office/drawing/2010/main" val="0"/>
+              </a:ext>
+              <a:ext uri="{96DAC541-7B7A-43D3-8B79-37D633B846F1}">
+                <asvg:svgBlip xmlns:asvg="http://schemas.microsoft.com/office/drawing/2016/SVG/main" r:embed="rId2"/>
+              </a:ext>
+            </a:extLst>
+          </a:blip>
+          <a:stretch>
+            <a:fillRect/>
+          </a:stretch>
+        </a:blipFill>
+        <a:ln w="19050" cap="rnd" cmpd="sng" algn="ctr">
+          <a:solidFill>
+            <a:schemeClr val="lt1">
+              <a:hueOff val="0"/>
+              <a:satOff val="0"/>
+              <a:lumOff val="0"/>
+              <a:alphaOff val="0"/>
+            </a:schemeClr>
+          </a:solidFill>
+          <a:prstDash val="solid"/>
+        </a:ln>
+        <a:effectLst/>
+      </dsp:spPr>
+      <dsp:style>
+        <a:lnRef idx="2">
+          <a:scrgbClr r="0" g="0" b="0"/>
+        </a:lnRef>
+        <a:fillRef idx="1">
+          <a:scrgbClr r="0" g="0" b="0"/>
+        </a:fillRef>
+        <a:effectRef idx="0">
+          <a:scrgbClr r="0" g="0" b="0"/>
+        </a:effectRef>
+        <a:fontRef idx="minor">
+          <a:schemeClr val="lt1"/>
+        </a:fontRef>
+      </dsp:style>
+    </dsp:sp>
+    <dsp:sp modelId="{1DC891CD-F2F4-4670-A11A-52E199FE0B0F}">
+      <dsp:nvSpPr>
+        <dsp:cNvPr id="0" name=""/>
+        <dsp:cNvSpPr/>
+      </dsp:nvSpPr>
+      <dsp:spPr>
+        <a:xfrm>
+          <a:off x="1929484" y="713"/>
+          <a:ext cx="3425255" cy="1670549"/>
+        </a:xfrm>
+        <a:prstGeom prst="rect">
+          <a:avLst/>
+        </a:prstGeom>
+        <a:noFill/>
+        <a:ln>
+          <a:noFill/>
+        </a:ln>
+        <a:effectLst/>
+      </dsp:spPr>
+      <dsp:style>
+        <a:lnRef idx="0">
+          <a:scrgbClr r="0" g="0" b="0"/>
+        </a:lnRef>
+        <a:fillRef idx="0">
+          <a:scrgbClr r="0" g="0" b="0"/>
+        </a:fillRef>
+        <a:effectRef idx="0">
+          <a:scrgbClr r="0" g="0" b="0"/>
+        </a:effectRef>
+        <a:fontRef idx="minor"/>
+      </dsp:style>
+      <dsp:txBody>
+        <a:bodyPr spcFirstLastPara="0" vert="horz" wrap="square" lIns="176800" tIns="176800" rIns="176800" bIns="176800" numCol="1" spcCol="1270" anchor="ctr" anchorCtr="0">
+          <a:noAutofit/>
+        </a:bodyPr>
+        <a:lstStyle/>
+        <a:p>
+          <a:pPr marL="0" lvl="0" indent="0" algn="l" defTabSz="622300">
+            <a:lnSpc>
+              <a:spcPct val="100000"/>
+            </a:lnSpc>
+            <a:spcBef>
+              <a:spcPct val="0"/>
+            </a:spcBef>
+            <a:spcAft>
+              <a:spcPct val="35000"/>
+            </a:spcAft>
+            <a:buNone/>
+          </a:pPr>
+          <a:r>
+            <a:rPr lang="en-US" sz="1400" kern="1200"/>
+            <a:t>A machine learning-based drowsiness detection system is a promising solution for reducing the risk of accidents caused by driver fatigue.</a:t>
+          </a:r>
+        </a:p>
+      </dsp:txBody>
+      <dsp:txXfrm>
+        <a:off x="1929484" y="713"/>
+        <a:ext cx="3425255" cy="1670549"/>
+      </dsp:txXfrm>
+    </dsp:sp>
+    <dsp:sp modelId="{71339543-2CB5-4376-974F-891B127A827D}">
+      <dsp:nvSpPr>
+        <dsp:cNvPr id="0" name=""/>
+        <dsp:cNvSpPr/>
+      </dsp:nvSpPr>
+      <dsp:spPr>
+        <a:xfrm>
+          <a:off x="0" y="2088900"/>
+          <a:ext cx="5354740" cy="1670549"/>
+        </a:xfrm>
+        <a:prstGeom prst="roundRect">
+          <a:avLst>
+            <a:gd name="adj" fmla="val 10000"/>
+          </a:avLst>
+        </a:prstGeom>
+        <a:solidFill>
+          <a:schemeClr val="accent1">
+            <a:tint val="40000"/>
+            <a:hueOff val="0"/>
+            <a:satOff val="0"/>
+            <a:lumOff val="0"/>
+            <a:alphaOff val="0"/>
+          </a:schemeClr>
+        </a:solidFill>
+        <a:ln>
+          <a:noFill/>
+        </a:ln>
+        <a:effectLst/>
+      </dsp:spPr>
+      <dsp:style>
+        <a:lnRef idx="0">
+          <a:scrgbClr r="0" g="0" b="0"/>
+        </a:lnRef>
+        <a:fillRef idx="1">
+          <a:scrgbClr r="0" g="0" b="0"/>
+        </a:fillRef>
+        <a:effectRef idx="0">
+          <a:scrgbClr r="0" g="0" b="0"/>
+        </a:effectRef>
+        <a:fontRef idx="minor"/>
+      </dsp:style>
+    </dsp:sp>
+    <dsp:sp modelId="{5A2F0FEC-8317-4ECE-87B9-D3975AA2F0D0}">
+      <dsp:nvSpPr>
+        <dsp:cNvPr id="0" name=""/>
+        <dsp:cNvSpPr/>
+      </dsp:nvSpPr>
+      <dsp:spPr>
+        <a:xfrm>
+          <a:off x="505341" y="2464773"/>
+          <a:ext cx="918802" cy="918802"/>
+        </a:xfrm>
+        <a:prstGeom prst="rect">
+          <a:avLst/>
+        </a:prstGeom>
+        <a:blipFill>
+          <a:blip xmlns:r="http://schemas.openxmlformats.org/officeDocument/2006/relationships" r:embed="rId3">
+            <a:extLst>
+              <a:ext uri="{28A0092B-C50C-407E-A947-70E740481C1C}">
+                <a14:useLocalDpi xmlns:a14="http://schemas.microsoft.com/office/drawing/2010/main" val="0"/>
+              </a:ext>
+              <a:ext uri="{96DAC541-7B7A-43D3-8B79-37D633B846F1}">
+                <asvg:svgBlip xmlns:asvg="http://schemas.microsoft.com/office/drawing/2016/SVG/main" r:embed="rId4"/>
+              </a:ext>
+            </a:extLst>
+          </a:blip>
+          <a:stretch>
+            <a:fillRect/>
+          </a:stretch>
+        </a:blipFill>
+        <a:ln w="19050" cap="rnd" cmpd="sng" algn="ctr">
+          <a:solidFill>
+            <a:schemeClr val="lt1">
+              <a:hueOff val="0"/>
+              <a:satOff val="0"/>
+              <a:lumOff val="0"/>
+              <a:alphaOff val="0"/>
+            </a:schemeClr>
+          </a:solidFill>
+          <a:prstDash val="solid"/>
+        </a:ln>
+        <a:effectLst/>
+      </dsp:spPr>
+      <dsp:style>
+        <a:lnRef idx="2">
+          <a:scrgbClr r="0" g="0" b="0"/>
+        </a:lnRef>
+        <a:fillRef idx="1">
+          <a:scrgbClr r="0" g="0" b="0"/>
+        </a:fillRef>
+        <a:effectRef idx="0">
+          <a:scrgbClr r="0" g="0" b="0"/>
+        </a:effectRef>
+        <a:fontRef idx="minor">
+          <a:schemeClr val="lt1"/>
+        </a:fontRef>
+      </dsp:style>
+    </dsp:sp>
+    <dsp:sp modelId="{50EB4F50-EB33-40BF-9284-11E32067849B}">
+      <dsp:nvSpPr>
+        <dsp:cNvPr id="0" name=""/>
+        <dsp:cNvSpPr/>
+      </dsp:nvSpPr>
+      <dsp:spPr>
+        <a:xfrm>
+          <a:off x="1929484" y="2088900"/>
+          <a:ext cx="3425255" cy="1670549"/>
+        </a:xfrm>
+        <a:prstGeom prst="rect">
+          <a:avLst/>
+        </a:prstGeom>
+        <a:noFill/>
+        <a:ln>
+          <a:noFill/>
+        </a:ln>
+        <a:effectLst/>
+      </dsp:spPr>
+      <dsp:style>
+        <a:lnRef idx="0">
+          <a:scrgbClr r="0" g="0" b="0"/>
+        </a:lnRef>
+        <a:fillRef idx="0">
+          <a:scrgbClr r="0" g="0" b="0"/>
+        </a:fillRef>
+        <a:effectRef idx="0">
+          <a:scrgbClr r="0" g="0" b="0"/>
+        </a:effectRef>
+        <a:fontRef idx="minor"/>
+      </dsp:style>
+      <dsp:txBody>
+        <a:bodyPr spcFirstLastPara="0" vert="horz" wrap="square" lIns="176800" tIns="176800" rIns="176800" bIns="176800" numCol="1" spcCol="1270" anchor="ctr" anchorCtr="0">
+          <a:noAutofit/>
+        </a:bodyPr>
+        <a:lstStyle/>
+        <a:p>
+          <a:pPr marL="0" lvl="0" indent="0" algn="l" defTabSz="622300">
+            <a:lnSpc>
+              <a:spcPct val="100000"/>
+            </a:lnSpc>
+            <a:spcBef>
+              <a:spcPct val="0"/>
+            </a:spcBef>
+            <a:spcAft>
+              <a:spcPct val="35000"/>
+            </a:spcAft>
+            <a:buNone/>
+          </a:pPr>
+          <a:r>
+            <a:rPr lang="en-US" sz="1400" kern="1200"/>
+            <a:t>The ml-based drowsiness detection system has several advantages over traditional methods, including its high accuracy, non-invasiveness, and real-time detection. </a:t>
+          </a:r>
+        </a:p>
+      </dsp:txBody>
+      <dsp:txXfrm>
+        <a:off x="1929484" y="2088900"/>
+        <a:ext cx="3425255" cy="1670549"/>
+      </dsp:txXfrm>
+    </dsp:sp>
+    <dsp:sp modelId="{B841FB3A-90A7-43FC-97AB-F42558987A43}">
+      <dsp:nvSpPr>
+        <dsp:cNvPr id="0" name=""/>
+        <dsp:cNvSpPr/>
+      </dsp:nvSpPr>
+      <dsp:spPr>
+        <a:xfrm>
+          <a:off x="0" y="4177086"/>
+          <a:ext cx="5354740" cy="1670549"/>
+        </a:xfrm>
+        <a:prstGeom prst="roundRect">
+          <a:avLst>
+            <a:gd name="adj" fmla="val 10000"/>
+          </a:avLst>
+        </a:prstGeom>
+        <a:solidFill>
+          <a:schemeClr val="accent1">
+            <a:tint val="40000"/>
+            <a:hueOff val="0"/>
+            <a:satOff val="0"/>
+            <a:lumOff val="0"/>
+            <a:alphaOff val="0"/>
+          </a:schemeClr>
+        </a:solidFill>
+        <a:ln>
+          <a:noFill/>
+        </a:ln>
+        <a:effectLst/>
+      </dsp:spPr>
+      <dsp:style>
+        <a:lnRef idx="0">
+          <a:scrgbClr r="0" g="0" b="0"/>
+        </a:lnRef>
+        <a:fillRef idx="1">
+          <a:scrgbClr r="0" g="0" b="0"/>
+        </a:fillRef>
+        <a:effectRef idx="0">
+          <a:scrgbClr r="0" g="0" b="0"/>
+        </a:effectRef>
+        <a:fontRef idx="minor"/>
+      </dsp:style>
+    </dsp:sp>
+    <dsp:sp modelId="{BD6D3F32-B136-44EB-B3C8-BF413036096B}">
+      <dsp:nvSpPr>
+        <dsp:cNvPr id="0" name=""/>
+        <dsp:cNvSpPr/>
+      </dsp:nvSpPr>
+      <dsp:spPr>
+        <a:xfrm>
+          <a:off x="505341" y="4552960"/>
+          <a:ext cx="918802" cy="918802"/>
+        </a:xfrm>
+        <a:prstGeom prst="rect">
+          <a:avLst/>
+        </a:prstGeom>
+        <a:blipFill>
+          <a:blip xmlns:r="http://schemas.openxmlformats.org/officeDocument/2006/relationships" r:embed="rId5">
+            <a:extLst>
+              <a:ext uri="{28A0092B-C50C-407E-A947-70E740481C1C}">
+                <a14:useLocalDpi xmlns:a14="http://schemas.microsoft.com/office/drawing/2010/main" val="0"/>
+              </a:ext>
+              <a:ext uri="{96DAC541-7B7A-43D3-8B79-37D633B846F1}">
+                <asvg:svgBlip xmlns:asvg="http://schemas.microsoft.com/office/drawing/2016/SVG/main" r:embed="rId6"/>
+              </a:ext>
+            </a:extLst>
+          </a:blip>
+          <a:stretch>
+            <a:fillRect/>
+          </a:stretch>
+        </a:blipFill>
+        <a:ln w="19050" cap="rnd" cmpd="sng" algn="ctr">
+          <a:solidFill>
+            <a:schemeClr val="lt1">
+              <a:hueOff val="0"/>
+              <a:satOff val="0"/>
+              <a:lumOff val="0"/>
+              <a:alphaOff val="0"/>
+            </a:schemeClr>
+          </a:solidFill>
+          <a:prstDash val="solid"/>
+        </a:ln>
+        <a:effectLst/>
+      </dsp:spPr>
+      <dsp:style>
+        <a:lnRef idx="2">
+          <a:scrgbClr r="0" g="0" b="0"/>
+        </a:lnRef>
+        <a:fillRef idx="1">
+          <a:scrgbClr r="0" g="0" b="0"/>
+        </a:fillRef>
+        <a:effectRef idx="0">
+          <a:scrgbClr r="0" g="0" b="0"/>
+        </a:effectRef>
+        <a:fontRef idx="minor">
+          <a:schemeClr val="lt1"/>
+        </a:fontRef>
+      </dsp:style>
+    </dsp:sp>
+    <dsp:sp modelId="{4156A6D6-FCAF-4889-867B-0BAA25412A00}">
+      <dsp:nvSpPr>
+        <dsp:cNvPr id="0" name=""/>
+        <dsp:cNvSpPr/>
+      </dsp:nvSpPr>
+      <dsp:spPr>
+        <a:xfrm>
+          <a:off x="1929484" y="4177086"/>
+          <a:ext cx="3425255" cy="1670549"/>
+        </a:xfrm>
+        <a:prstGeom prst="rect">
+          <a:avLst/>
+        </a:prstGeom>
+        <a:noFill/>
+        <a:ln>
+          <a:noFill/>
+        </a:ln>
+        <a:effectLst/>
+      </dsp:spPr>
+      <dsp:style>
+        <a:lnRef idx="0">
+          <a:scrgbClr r="0" g="0" b="0"/>
+        </a:lnRef>
+        <a:fillRef idx="0">
+          <a:scrgbClr r="0" g="0" b="0"/>
+        </a:fillRef>
+        <a:effectRef idx="0">
+          <a:scrgbClr r="0" g="0" b="0"/>
+        </a:effectRef>
+        <a:fontRef idx="minor"/>
+      </dsp:style>
+      <dsp:txBody>
+        <a:bodyPr spcFirstLastPara="0" vert="horz" wrap="square" lIns="176800" tIns="176800" rIns="176800" bIns="176800" numCol="1" spcCol="1270" anchor="ctr" anchorCtr="0">
+          <a:noAutofit/>
+        </a:bodyPr>
+        <a:lstStyle/>
+        <a:p>
+          <a:pPr marL="0" lvl="0" indent="0" algn="l" defTabSz="622300">
+            <a:lnSpc>
+              <a:spcPct val="100000"/>
+            </a:lnSpc>
+            <a:spcBef>
+              <a:spcPct val="0"/>
+            </a:spcBef>
+            <a:spcAft>
+              <a:spcPct val="35000"/>
+            </a:spcAft>
+            <a:buNone/>
+          </a:pPr>
+          <a:r>
+            <a:rPr lang="en-US" sz="1400" kern="1200"/>
+            <a:t>The system have potential to significantly improve road safety and reduce the number of accidents caused by fatigue driving</a:t>
+          </a:r>
+        </a:p>
+      </dsp:txBody>
+      <dsp:txXfrm>
+        <a:off x="1929484" y="4177086"/>
+        <a:ext cx="3425255" cy="1670549"/>
       </dsp:txXfrm>
     </dsp:sp>
   </dsp:spTree>
@@ -6240,6 +9736,566 @@
 </dgm:layoutDef>
 </file>
 
+<file path=ppt/diagrams/layout4.xml><?xml version="1.0" encoding="utf-8"?>
+<dgm:layoutDef xmlns:dgm="http://schemas.openxmlformats.org/drawingml/2006/diagram" xmlns:a="http://schemas.openxmlformats.org/drawingml/2006/main" uniqueId="urn:microsoft.com/office/officeart/2016/7/layout/LinearBlockProcessNumbered">
+  <dgm:title val="Linear Block Process Numbered"/>
+  <dgm:desc val="Used to show a progression; a timeline; sequential steps in a task, process, or workflow; or to emphasize movement or direction. Automatic numbers have been introduced to show the steps of the process. Level 1 text and Level 2 text both appears in a rectangle."/>
+  <dgm:catLst>
+    <dgm:cat type="process" pri="500"/>
+  </dgm:catLst>
+  <dgm:sampData>
+    <dgm:dataModel>
+      <dgm:ptLst>
+        <dgm:pt modelId="0" type="doc"/>
+        <dgm:pt modelId="1">
+          <dgm:prSet phldr="1"/>
+        </dgm:pt>
+        <dgm:pt modelId="11">
+          <dgm:prSet phldr="1"/>
+        </dgm:pt>
+        <dgm:pt modelId="2">
+          <dgm:prSet phldr="1"/>
+        </dgm:pt>
+        <dgm:pt modelId="21">
+          <dgm:prSet phldr="1"/>
+        </dgm:pt>
+        <dgm:pt modelId="3">
+          <dgm:prSet phldr="1"/>
+        </dgm:pt>
+        <dgm:pt modelId="31">
+          <dgm:prSet phldr="1"/>
+        </dgm:pt>
+        <dgm:pt modelId="101" type="sibTrans" cxnId="4">
+          <dgm:prSet phldrT="1"/>
+          <dgm:t>
+            <a:bodyPr/>
+            <a:lstStyle/>
+            <a:p>
+              <a:r>
+                <a:t>01</a:t>
+              </a:r>
+            </a:p>
+          </dgm:t>
+        </dgm:pt>
+        <dgm:pt modelId="201" type="sibTrans" cxnId="5">
+          <dgm:prSet phldrT="2"/>
+          <dgm:t>
+            <a:bodyPr/>
+            <a:lstStyle/>
+            <a:p>
+              <a:r>
+                <a:t>02</a:t>
+              </a:r>
+            </a:p>
+          </dgm:t>
+        </dgm:pt>
+        <dgm:pt modelId="301" type="sibTrans" cxnId="6">
+          <dgm:prSet phldrT="3"/>
+          <dgm:t>
+            <a:bodyPr/>
+            <a:lstStyle/>
+            <a:p>
+              <a:r>
+                <a:t>03</a:t>
+              </a:r>
+            </a:p>
+          </dgm:t>
+        </dgm:pt>
+      </dgm:ptLst>
+      <dgm:cxnLst>
+        <dgm:cxn modelId="4" srcId="0" destId="1" srcOrd="0" destOrd="0" sibTransId="101"/>
+        <dgm:cxn modelId="5" srcId="0" destId="2" srcOrd="1" destOrd="0" sibTransId="201"/>
+        <dgm:cxn modelId="6" srcId="0" destId="3" srcOrd="2" destOrd="0" sibTransId="301"/>
+        <dgm:cxn modelId="13" srcId="1" destId="11" srcOrd="0" destOrd="0"/>
+        <dgm:cxn modelId="23" srcId="2" destId="21" srcOrd="0" destOrd="0"/>
+        <dgm:cxn modelId="33" srcId="3" destId="31" srcOrd="0" destOrd="0"/>
+      </dgm:cxnLst>
+      <dgm:bg/>
+      <dgm:whole/>
+    </dgm:dataModel>
+  </dgm:sampData>
+  <dgm:styleData>
+    <dgm:dataModel>
+      <dgm:ptLst>
+        <dgm:pt modelId="0" type="doc"/>
+        <dgm:pt modelId="1"/>
+        <dgm:pt modelId="11"/>
+        <dgm:pt modelId="2"/>
+        <dgm:pt modelId="21"/>
+      </dgm:ptLst>
+      <dgm:cxnLst>
+        <dgm:cxn modelId="4" srcId="0" destId="1" srcOrd="0" destOrd="0"/>
+        <dgm:cxn modelId="5" srcId="0" destId="2" srcOrd="1" destOrd="0"/>
+        <dgm:cxn modelId="13" srcId="1" destId="11" srcOrd="0" destOrd="0"/>
+        <dgm:cxn modelId="23" srcId="2" destId="21" srcOrd="0" destOrd="0"/>
+      </dgm:cxnLst>
+      <dgm:bg/>
+      <dgm:whole/>
+    </dgm:dataModel>
+  </dgm:styleData>
+  <dgm:clrData>
+    <dgm:dataModel>
+      <dgm:ptLst>
+        <dgm:pt modelId="0" type="doc"/>
+        <dgm:pt modelId="1"/>
+        <dgm:pt modelId="11"/>
+        <dgm:pt modelId="2"/>
+        <dgm:pt modelId="21"/>
+        <dgm:pt modelId="3"/>
+        <dgm:pt modelId="31"/>
+        <dgm:pt modelId="4"/>
+        <dgm:pt modelId="41"/>
+      </dgm:ptLst>
+      <dgm:cxnLst>
+        <dgm:cxn modelId="5" srcId="0" destId="1" srcOrd="0" destOrd="0"/>
+        <dgm:cxn modelId="6" srcId="0" destId="2" srcOrd="1" destOrd="0"/>
+        <dgm:cxn modelId="7" srcId="0" destId="3" srcOrd="2" destOrd="0"/>
+        <dgm:cxn modelId="8" srcId="0" destId="4" srcOrd="3" destOrd="0"/>
+        <dgm:cxn modelId="13" srcId="1" destId="11" srcOrd="0" destOrd="0"/>
+        <dgm:cxn modelId="23" srcId="2" destId="21" srcOrd="0" destOrd="0"/>
+        <dgm:cxn modelId="33" srcId="3" destId="31" srcOrd="0" destOrd="0"/>
+        <dgm:cxn modelId="43" srcId="4" destId="41" srcOrd="0" destOrd="0"/>
+      </dgm:cxnLst>
+      <dgm:bg/>
+      <dgm:whole/>
+    </dgm:dataModel>
+  </dgm:clrData>
+  <dgm:layoutNode name="Name0">
+    <dgm:varLst>
+      <dgm:animLvl val="lvl"/>
+      <dgm:resizeHandles val="exact"/>
+    </dgm:varLst>
+    <dgm:alg type="lin">
+      <dgm:param type="linDir" val="fromL"/>
+      <dgm:param type="nodeVertAlign" val="t"/>
+    </dgm:alg>
+    <dgm:shape xmlns:r="http://schemas.openxmlformats.org/officeDocument/2006/relationships" r:blip="">
+      <dgm:adjLst/>
+    </dgm:shape>
+    <dgm:presOf/>
+    <dgm:constrLst>
+      <dgm:constr type="h" for="ch" forName="compositeNode" refType="h"/>
+      <dgm:constr type="w" for="ch" forName="compositeNode" refType="w"/>
+      <dgm:constr type="w" for="des" forName="simulatedConn" refType="w" refFor="ch" refForName="compositeNode" fact="0.15"/>
+      <dgm:constr type="h" for="des" forName="simulatedConn" refType="w" refFor="des" refForName="simulatedConn"/>
+      <dgm:constr type="h" for="des" forName="vSp1" refType="w" refFor="ch" refForName="compositeNode" fact="0.8"/>
+      <dgm:constr type="h" for="des" forName="vSp2" refType="w" refFor="ch" refForName="compositeNode" fact="0.07"/>
+      <dgm:constr type="w" for="ch" forName="vProcSp" refType="w" refFor="des" refForName="simulatedConn" op="equ"/>
+      <dgm:constr type="h" for="ch" forName="vProcSp" refType="h" refFor="ch" refForName="compositeNode" op="equ"/>
+      <dgm:constr type="w" for="ch" forName="sibTrans" refType="w" refFor="ch" refForName="compositeNode" fact="0.08"/>
+      <dgm:constr type="primFontSz" for="des" forName="sibTransNodeRect" op="equ"/>
+      <dgm:constr type="primFontSz" for="des" forName="nodeRect" op="equ"/>
+    </dgm:constrLst>
+    <dgm:ruleLst/>
+    <dgm:forEach name="Name4" axis="ch" ptType="node">
+      <dgm:layoutNode name="compositeNode">
+        <dgm:varLst>
+          <dgm:bulletEnabled val="1"/>
+        </dgm:varLst>
+        <dgm:alg type="composite"/>
+        <dgm:constrLst>
+          <dgm:constr type="h" refType="w" op="lte" fact="1.2"/>
+          <dgm:constr type="w" for="ch" forName="bgRect" refType="w"/>
+          <dgm:constr type="h" for="ch" forName="bgRect" refType="h"/>
+          <dgm:constr type="t" for="ch" forName="bgRect"/>
+          <dgm:constr type="l" for="ch" forName="bgRect"/>
+          <dgm:constr type="w" for="ch" forName="sibTransNodeRect" refType="w" refFor="ch" refForName="bgRect"/>
+          <dgm:constr type="h" for="ch" forName="sibTransNodeRect" refType="h" refFor="ch" refForName="bgRect" fact="0.4"/>
+          <dgm:constr type="t" for="ch" forName="sibTransNodeRect"/>
+          <dgm:constr type="l" for="ch" forName="sibTransNodeRect"/>
+          <dgm:constr type="r" for="ch" forName="nodeRect" refType="r" refFor="ch" refForName="bgRect"/>
+          <dgm:constr type="h" for="ch" forName="nodeRect" refType="h" refFor="ch" refForName="bgRect" fact="0.6"/>
+          <dgm:constr type="t" for="ch" forName="nodeRect" refType="b" refFor="ch" refForName="sibTransNodeRect"/>
+          <dgm:constr type="l" for="ch" forName="nodeRect" refType="l" refFor="ch" refForName="bgRect"/>
+        </dgm:constrLst>
+        <dgm:ruleLst>
+          <dgm:rule type="w" for="ch" forName="nodeRect" val="NaN" fact="NaN" max="30"/>
+        </dgm:ruleLst>
+        <dgm:layoutNode name="bgRect" styleLbl="alignNode1">
+          <dgm:alg type="sp"/>
+          <dgm:shape xmlns:r="http://schemas.openxmlformats.org/officeDocument/2006/relationships" type="rect" r:blip="">
+            <dgm:adjLst>
+              <dgm:adj idx="1" val="0.05"/>
+            </dgm:adjLst>
+          </dgm:shape>
+          <dgm:presOf axis="self"/>
+          <dgm:constrLst/>
+          <dgm:ruleLst/>
+        </dgm:layoutNode>
+        <dgm:forEach name="Name19" axis="followSib" ptType="sibTrans" hideLastTrans="0" cnt="1">
+          <dgm:layoutNode name="sibTransNodeRect" styleLbl="alignNode1">
+            <dgm:varLst>
+              <dgm:chMax val="0"/>
+              <dgm:bulletEnabled val="1"/>
+            </dgm:varLst>
+            <dgm:presOf axis="self"/>
+            <dgm:alg type="tx">
+              <dgm:param type="parTxLTRAlign" val="l"/>
+              <dgm:param type="parTxRTLAlign" val="l"/>
+            </dgm:alg>
+            <dgm:shape xmlns:r="http://schemas.openxmlformats.org/officeDocument/2006/relationships" type="rect" r:blip="" hideGeom="1">
+              <dgm:adjLst/>
+            </dgm:shape>
+            <dgm:constrLst>
+              <dgm:constr type="primFontSz" val="66"/>
+              <dgm:constr type="tMarg" val="13"/>
+              <dgm:constr type="lMarg" refType="w" fact="0.28"/>
+              <dgm:constr type="rMarg" refType="w" fact="0.28"/>
+              <dgm:constr type="bMarg" val="13"/>
+            </dgm:constrLst>
+            <dgm:ruleLst>
+              <dgm:rule type="primFontSz" val="14" fact="NaN" max="NaN"/>
+              <dgm:rule type="tMarg" val="13" fact="NaN" max="NaN"/>
+            </dgm:ruleLst>
+          </dgm:layoutNode>
+        </dgm:forEach>
+        <dgm:layoutNode name="nodeRect" styleLbl="alignNode1" moveWith="bgRect">
+          <dgm:varLst>
+            <dgm:bulletEnabled val="1"/>
+          </dgm:varLst>
+          <dgm:alg type="tx">
+            <dgm:param type="parTxLTRAlign" val="l"/>
+            <dgm:param type="parTxRTLAlign" val="r"/>
+            <dgm:param type="txAnchorVert" val="t"/>
+            <dgm:param type="stBulletLvl" val="2"/>
+          </dgm:alg>
+          <dgm:shape xmlns:r="http://schemas.openxmlformats.org/officeDocument/2006/relationships" type="rect" r:blip="" hideGeom="1">
+            <dgm:adjLst/>
+          </dgm:shape>
+          <dgm:presOf axis="desOrSelf" ptType="node"/>
+          <dgm:constrLst>
+            <dgm:constr type="primFontSz" val="26"/>
+            <dgm:constr type="tMarg"/>
+            <dgm:constr type="lMarg" refType="w" fact="0.28"/>
+            <dgm:constr type="rMarg" refType="w" fact="0.28"/>
+            <dgm:constr type="bMarg" val="26"/>
+          </dgm:constrLst>
+          <dgm:ruleLst>
+            <dgm:rule type="primFontSz" val="11" fact="NaN" max="NaN"/>
+          </dgm:ruleLst>
+        </dgm:layoutNode>
+      </dgm:layoutNode>
+      <dgm:forEach name="Name14" axis="followSib" ptType="sibTrans" cnt="1">
+        <dgm:layoutNode name="sibTrans">
+          <dgm:alg type="sp"/>
+          <dgm:shape xmlns:r="http://schemas.openxmlformats.org/officeDocument/2006/relationships" r:blip="">
+            <dgm:adjLst/>
+          </dgm:shape>
+          <dgm:presOf/>
+          <dgm:constrLst/>
+          <dgm:ruleLst/>
+        </dgm:layoutNode>
+      </dgm:forEach>
+    </dgm:forEach>
+  </dgm:layoutNode>
+  <dgm:extLst>
+    <a:ext uri="{4F341089-5ED1-44EC-B178-C955D00A3D55}">
+      <dgm1611:autoBuNodeInfoLst xmlns:dgm1611="http://schemas.microsoft.com/office/drawing/2016/11/diagram">
+        <dgm1611:autoBuNodeInfo lvl="1" ptType="sibTrans">
+          <dgm1611:buPr prefix="" leadZeros="1">
+            <a:buAutoNum type="arabicParenBoth"/>
+          </dgm1611:buPr>
+        </dgm1611:autoBuNodeInfo>
+      </dgm1611:autoBuNodeInfoLst>
+    </a:ext>
+  </dgm:extLst>
+</dgm:layoutDef>
+</file>
+
+<file path=ppt/diagrams/layout5.xml><?xml version="1.0" encoding="utf-8"?>
+<dgm:layoutDef xmlns:dgm="http://schemas.openxmlformats.org/drawingml/2006/diagram" xmlns:a="http://schemas.openxmlformats.org/drawingml/2006/main" uniqueId="urn:microsoft.com/office/officeart/2018/2/layout/IconVerticalSolidList">
+  <dgm:title val="Icon Vertical Solid List"/>
+  <dgm:desc val="Use to show a series of visuals from top to bottom with Level 1 or Level 1 and Level 2 text grouped in a shape. Works best with icons or small pictures with lengthier descriptions."/>
+  <dgm:catLst>
+    <dgm:cat type="icon" pri="500"/>
+  </dgm:catLst>
+  <dgm:sampData useDef="1">
+    <dgm:dataModel>
+      <dgm:ptLst/>
+      <dgm:bg/>
+      <dgm:whole/>
+    </dgm:dataModel>
+  </dgm:sampData>
+  <dgm:styleData useDef="1">
+    <dgm:dataModel>
+      <dgm:ptLst/>
+      <dgm:bg/>
+      <dgm:whole/>
+    </dgm:dataModel>
+  </dgm:styleData>
+  <dgm:clrData useDef="1">
+    <dgm:dataModel>
+      <dgm:ptLst/>
+      <dgm:bg/>
+      <dgm:whole/>
+    </dgm:dataModel>
+  </dgm:clrData>
+  <dgm:layoutNode name="root">
+    <dgm:varLst>
+      <dgm:dir/>
+      <dgm:resizeHandles val="exact"/>
+    </dgm:varLst>
+    <dgm:choose name="Name0">
+      <dgm:if name="Name1" axis="self" func="var" arg="dir" op="equ" val="norm">
+        <dgm:alg type="lin">
+          <dgm:param type="linDir" val="fromT"/>
+          <dgm:param type="nodeHorzAlign" val="l"/>
+        </dgm:alg>
+      </dgm:if>
+      <dgm:else name="Name2">
+        <dgm:alg type="lin">
+          <dgm:param type="linDir" val="fromT"/>
+          <dgm:param type="nodeHorzAlign" val="r"/>
+        </dgm:alg>
+      </dgm:else>
+    </dgm:choose>
+    <dgm:shape xmlns:r="http://schemas.openxmlformats.org/officeDocument/2006/relationships" r:blip="">
+      <dgm:adjLst/>
+    </dgm:shape>
+    <dgm:presOf/>
+    <dgm:choose name="Name3">
+      <dgm:if name="Name4" axis="ch" ptType="node" func="cnt" op="lte" val="3">
+        <dgm:constrLst>
+          <dgm:constr type="h" for="ch" forName="compNode" refType="h" fact="0.3"/>
+          <dgm:constr type="w" for="ch" forName="compNode" refType="w"/>
+          <dgm:constr type="h" for="ch" forName="sibTrans" refType="h" refFor="ch" refForName="compNode" fact="0.25"/>
+          <dgm:constr type="primFontSz" for="des" forName="parTx" val="25"/>
+          <dgm:constr type="primFontSz" for="des" forName="desTx" refType="primFontSz" refFor="des" refForName="parTx" op="lte" fact="0.75"/>
+          <dgm:constr type="h" for="des" forName="compNode" op="equ"/>
+          <dgm:constr type="h" for="des" forName="bgRect" op="equ"/>
+          <dgm:constr type="h" for="des" forName="iconRect" op="equ"/>
+          <dgm:constr type="w" for="des" forName="iconRect" op="equ"/>
+          <dgm:constr type="h" for="des" forName="spaceRect" op="equ"/>
+          <dgm:constr type="h" for="des" forName="parTx" op="equ"/>
+          <dgm:constr type="h" for="des" forName="desTx" op="equ"/>
+        </dgm:constrLst>
+      </dgm:if>
+      <dgm:if name="Name5" axis="ch" ptType="node" func="cnt" op="lte" val="4">
+        <dgm:constrLst>
+          <dgm:constr type="h" for="ch" forName="compNode" refType="h" fact="0.3"/>
+          <dgm:constr type="w" for="ch" forName="compNode" refType="w"/>
+          <dgm:constr type="h" for="ch" forName="sibTrans" refType="h" refFor="ch" refForName="compNode" fact="0.25"/>
+          <dgm:constr type="primFontSz" for="des" forName="parTx" val="22"/>
+          <dgm:constr type="primFontSz" for="des" forName="desTx" refType="primFontSz" refFor="des" refForName="parTx" op="lte" fact="0.75"/>
+          <dgm:constr type="h" for="des" forName="compNode" op="equ"/>
+          <dgm:constr type="h" for="des" forName="bgRect" op="equ"/>
+          <dgm:constr type="h" for="des" forName="iconRect" op="equ"/>
+          <dgm:constr type="w" for="des" forName="iconRect" op="equ"/>
+          <dgm:constr type="h" for="des" forName="spaceRect" op="equ"/>
+          <dgm:constr type="h" for="des" forName="parTx" op="equ"/>
+          <dgm:constr type="h" for="des" forName="desTx" op="equ"/>
+        </dgm:constrLst>
+      </dgm:if>
+      <dgm:if name="Name6" axis="ch" ptType="node" func="cnt" op="lte" val="6">
+        <dgm:constrLst>
+          <dgm:constr type="h" for="ch" forName="compNode" refType="h" fact="0.3"/>
+          <dgm:constr type="w" for="ch" forName="compNode" refType="w"/>
+          <dgm:constr type="h" for="ch" forName="sibTrans" refType="h" refFor="ch" refForName="compNode" fact="0.25"/>
+          <dgm:constr type="primFontSz" for="des" forName="parTx" val="19"/>
+          <dgm:constr type="primFontSz" for="des" forName="desTx" refType="primFontSz" refFor="des" refForName="parTx" op="lte" fact="0.75"/>
+          <dgm:constr type="h" for="des" forName="compNode" op="equ"/>
+          <dgm:constr type="h" for="des" forName="bgRect" op="equ"/>
+          <dgm:constr type="h" for="des" forName="iconRect" op="equ"/>
+          <dgm:constr type="w" for="des" forName="iconRect" op="equ"/>
+          <dgm:constr type="h" for="des" forName="spaceRect" op="equ"/>
+          <dgm:constr type="h" for="des" forName="parTx" op="equ"/>
+          <dgm:constr type="h" for="des" forName="desTx" op="equ"/>
+        </dgm:constrLst>
+      </dgm:if>
+      <dgm:else name="Name7">
+        <dgm:constrLst>
+          <dgm:constr type="h" for="ch" forName="compNode" refType="h" fact="0.3"/>
+          <dgm:constr type="w" for="ch" forName="compNode" refType="w"/>
+          <dgm:constr type="h" for="ch" forName="sibTrans" refType="h" refFor="ch" refForName="compNode" fact="0.25"/>
+          <dgm:constr type="primFontSz" for="des" forName="parTx" val="16"/>
+          <dgm:constr type="primFontSz" for="des" forName="desTx" refType="primFontSz" refFor="des" refForName="parTx" op="lte" fact="0.75"/>
+          <dgm:constr type="h" for="des" forName="compNode" op="equ"/>
+          <dgm:constr type="h" for="des" forName="bgRect" op="equ"/>
+          <dgm:constr type="h" for="des" forName="iconRect" op="equ"/>
+          <dgm:constr type="w" for="des" forName="iconRect" op="equ"/>
+          <dgm:constr type="h" for="des" forName="spaceRect" op="equ"/>
+          <dgm:constr type="h" for="des" forName="parTx" op="equ"/>
+          <dgm:constr type="h" for="des" forName="desTx" op="equ"/>
+        </dgm:constrLst>
+      </dgm:else>
+    </dgm:choose>
+    <dgm:ruleLst>
+      <dgm:rule type="h" for="ch" forName="compNode" val="0" fact="NaN" max="NaN"/>
+    </dgm:ruleLst>
+    <dgm:forEach name="Name8" axis="ch" ptType="node">
+      <dgm:layoutNode name="compNode">
+        <dgm:alg type="composite"/>
+        <dgm:shape xmlns:r="http://schemas.openxmlformats.org/officeDocument/2006/relationships" r:blip="">
+          <dgm:adjLst/>
+        </dgm:shape>
+        <dgm:presOf axis="self"/>
+        <dgm:choose name="Name9">
+          <dgm:if name="Name10" axis="ch" ptType="node" func="cnt" op="gte" val="1">
+            <dgm:constrLst>
+              <dgm:constr type="w" for="ch" forName="bgRect" refType="w"/>
+              <dgm:constr type="h" for="ch" forName="bgRect" refType="h"/>
+              <dgm:constr type="l" for="ch" forName="bgRect"/>
+              <dgm:constr type="t" for="ch" forName="bgRect"/>
+              <dgm:constr type="h" for="ch" forName="iconRect" refType="h" fact="0.55"/>
+              <dgm:constr type="w" for="ch" forName="iconRect" refType="h" refFor="ch" refForName="iconRect"/>
+              <dgm:constr type="l" for="ch" forName="iconRect" refType="h" refFor="ch" refForName="iconRect" fact="0.55"/>
+              <dgm:constr type="ctrY" for="ch" forName="iconRect" refType="ctrY" refFor="ch" refForName="bgRect"/>
+              <dgm:constr type="w" for="ch" forName="spaceRect" refType="l" refFor="ch" refForName="iconRect"/>
+              <dgm:constr type="h" for="ch" forName="spaceRect" refType="h"/>
+              <dgm:constr type="l" for="ch" forName="spaceRect" refType="r" refFor="ch" refForName="iconRect"/>
+              <dgm:constr type="t" for="ch" forName="spaceRect"/>
+              <dgm:constr type="w" for="ch" forName="parTx" refType="w" fact="0.45"/>
+              <dgm:constr type="h" for="ch" forName="parTx" refType="h"/>
+              <dgm:constr type="l" for="ch" forName="parTx" refType="r" refFor="ch" refForName="spaceRect"/>
+              <dgm:constr type="t" for="ch" forName="parTx"/>
+              <dgm:constr type="h" for="ch" forName="desTx" refType="h"/>
+              <dgm:constr type="l" for="ch" forName="desTx" refType="r" refFor="ch" refForName="parTx"/>
+              <dgm:constr type="t" for="ch" forName="desTx"/>
+            </dgm:constrLst>
+          </dgm:if>
+          <dgm:else name="Name11">
+            <dgm:constrLst>
+              <dgm:constr type="w" for="ch" forName="bgRect" refType="w"/>
+              <dgm:constr type="h" for="ch" forName="bgRect" refType="h"/>
+              <dgm:constr type="l" for="ch" forName="bgRect"/>
+              <dgm:constr type="t" for="ch" forName="bgRect"/>
+              <dgm:constr type="h" for="ch" forName="iconRect" refType="h" fact="0.55"/>
+              <dgm:constr type="w" for="ch" forName="iconRect" refType="h" refFor="ch" refForName="iconRect"/>
+              <dgm:constr type="l" for="ch" forName="iconRect" refType="h" refFor="ch" refForName="iconRect" fact="0.55"/>
+              <dgm:constr type="ctrY" for="ch" forName="iconRect" refType="ctrY" refFor="ch" refForName="bgRect"/>
+              <dgm:constr type="w" for="ch" forName="spaceRect" refType="l" refFor="ch" refForName="iconRect"/>
+              <dgm:constr type="h" for="ch" forName="spaceRect" refType="h"/>
+              <dgm:constr type="l" for="ch" forName="spaceRect" refType="r" refFor="ch" refForName="iconRect"/>
+              <dgm:constr type="t" for="ch" forName="spaceRect"/>
+              <dgm:constr type="h" for="ch" forName="parTx" refType="h"/>
+              <dgm:constr type="l" for="ch" forName="parTx" refType="r" refFor="ch" refForName="spaceRect"/>
+              <dgm:constr type="t" for="ch" forName="parTx"/>
+            </dgm:constrLst>
+          </dgm:else>
+        </dgm:choose>
+        <dgm:ruleLst>
+          <dgm:rule type="h" val="INF" fact="NaN" max="NaN"/>
+        </dgm:ruleLst>
+        <dgm:layoutNode name="bgRect" styleLbl="bgShp">
+          <dgm:alg type="sp"/>
+          <dgm:shape xmlns:r="http://schemas.openxmlformats.org/officeDocument/2006/relationships" type="roundRect" r:blip="">
+            <dgm:adjLst>
+              <dgm:adj idx="1" val="0.1"/>
+            </dgm:adjLst>
+          </dgm:shape>
+          <dgm:presOf/>
+          <dgm:constrLst/>
+          <dgm:ruleLst/>
+        </dgm:layoutNode>
+        <dgm:layoutNode name="iconRect" styleLbl="node1">
+          <dgm:alg type="sp"/>
+          <dgm:shape xmlns:r="http://schemas.openxmlformats.org/officeDocument/2006/relationships" type="rect" r:blip="" blipPhldr="1">
+            <dgm:adjLst/>
+          </dgm:shape>
+          <dgm:presOf/>
+          <dgm:constrLst/>
+          <dgm:ruleLst/>
+        </dgm:layoutNode>
+        <dgm:layoutNode name="spaceRect">
+          <dgm:alg type="sp"/>
+          <dgm:shape xmlns:r="http://schemas.openxmlformats.org/officeDocument/2006/relationships" r:blip="">
+            <dgm:adjLst/>
+          </dgm:shape>
+          <dgm:presOf/>
+          <dgm:constrLst/>
+          <dgm:ruleLst/>
+        </dgm:layoutNode>
+        <dgm:layoutNode name="parTx" styleLbl="revTx">
+          <dgm:varLst>
+            <dgm:chMax val="0"/>
+            <dgm:chPref val="0"/>
+          </dgm:varLst>
+          <dgm:alg type="tx">
+            <dgm:param type="txAnchorVert" val="mid"/>
+            <dgm:param type="parTxLTRAlign" val="l"/>
+            <dgm:param type="shpTxLTRAlignCh" val="l"/>
+            <dgm:param type="parTxRTLAlign" val="r"/>
+            <dgm:param type="shpTxRTLAlignCh" val="r"/>
+          </dgm:alg>
+          <dgm:shape xmlns:r="http://schemas.openxmlformats.org/officeDocument/2006/relationships" type="rect" r:blip="">
+            <dgm:adjLst/>
+          </dgm:shape>
+          <dgm:presOf axis="self" ptType="node"/>
+          <dgm:constrLst>
+            <dgm:constr type="lMarg" refType="h" fact="0.3"/>
+            <dgm:constr type="rMarg" refType="h" fact="0.3"/>
+            <dgm:constr type="tMarg" refType="h" fact="0.3"/>
+            <dgm:constr type="bMarg" refType="h" fact="0.3"/>
+          </dgm:constrLst>
+          <dgm:ruleLst>
+            <dgm:rule type="primFontSz" val="14" fact="NaN" max="NaN"/>
+            <dgm:rule type="h" val="INF" fact="NaN" max="NaN"/>
+          </dgm:ruleLst>
+        </dgm:layoutNode>
+        <dgm:choose name="Name12">
+          <dgm:if name="Name13" axis="ch" ptType="node" func="cnt" op="gte" val="1">
+            <dgm:layoutNode name="desTx" styleLbl="revTx">
+              <dgm:varLst/>
+              <dgm:alg type="tx">
+                <dgm:param type="txAnchorVertCh" val="mid"/>
+                <dgm:param type="parTxLTRAlign" val="l"/>
+                <dgm:param type="shpTxLTRAlignCh" val="l"/>
+                <dgm:param type="parTxRTLAlign" val="r"/>
+                <dgm:param type="shpTxRTLAlignCh" val="r"/>
+                <dgm:param type="stBulletLvl" val="0"/>
+              </dgm:alg>
+              <dgm:shape xmlns:r="http://schemas.openxmlformats.org/officeDocument/2006/relationships" type="rect" r:blip="">
+                <dgm:adjLst/>
+              </dgm:shape>
+              <dgm:presOf axis="des" ptType="node"/>
+              <dgm:constrLst>
+                <dgm:constr type="primFontSz" val="18"/>
+                <dgm:constr type="secFontSz" refType="primFontSz"/>
+                <dgm:constr type="lMarg" refType="h" fact="0.3"/>
+                <dgm:constr type="rMarg" refType="h" fact="0.3"/>
+                <dgm:constr type="tMarg" refType="h" fact="0.3"/>
+                <dgm:constr type="bMarg" refType="h" fact="0.3"/>
+              </dgm:constrLst>
+              <dgm:ruleLst>
+                <dgm:rule type="primFontSz" val="11" fact="NaN" max="NaN"/>
+              </dgm:ruleLst>
+            </dgm:layoutNode>
+          </dgm:if>
+          <dgm:else name="Name14"/>
+        </dgm:choose>
+      </dgm:layoutNode>
+      <dgm:forEach name="Name15" axis="followSib" ptType="sibTrans" cnt="1">
+        <dgm:layoutNode name="sibTrans">
+          <dgm:alg type="sp"/>
+          <dgm:shape xmlns:r="http://schemas.openxmlformats.org/officeDocument/2006/relationships" r:blip="">
+            <dgm:adjLst/>
+          </dgm:shape>
+          <dgm:presOf axis="self"/>
+          <dgm:constrLst/>
+          <dgm:ruleLst/>
+        </dgm:layoutNode>
+      </dgm:forEach>
+    </dgm:forEach>
+  </dgm:layoutNode>
+  <dgm:extLst>
+    <a:ext uri="{68A01E43-0DF5-4B5B-8FA6-DAF915123BFB}">
+      <dgm1612:lstStyle xmlns:dgm1612="http://schemas.microsoft.com/office/drawing/2016/12/diagram">
+        <a:lvl1pPr>
+          <a:lnSpc>
+            <a:spcPct val="100000"/>
+          </a:lnSpc>
+        </a:lvl1pPr>
+        <a:lvl2pPr>
+          <a:lnSpc>
+            <a:spcPct val="100000"/>
+          </a:lnSpc>
+        </a:lvl2pPr>
+      </dgm1612:lstStyle>
+    </a:ext>
+  </dgm:extLst>
+</dgm:layoutDef>
+</file>
+
 <file path=ppt/diagrams/quickStyle1.xml><?xml version="1.0" encoding="utf-8"?>
 <dgm:styleDef xmlns:dgm="http://schemas.openxmlformats.org/drawingml/2006/diagram" xmlns:a="http://schemas.openxmlformats.org/drawingml/2006/main" uniqueId="urn:microsoft.com/office/officeart/2005/8/quickstyle/simple1">
   <dgm:title val=""/>
@@ -8309,6 +12365,2074 @@
 </file>
 
 <file path=ppt/diagrams/quickStyle3.xml><?xml version="1.0" encoding="utf-8"?>
+<dgm:styleDef xmlns:dgm="http://schemas.openxmlformats.org/drawingml/2006/diagram" xmlns:a="http://schemas.openxmlformats.org/drawingml/2006/main" uniqueId="urn:microsoft.com/office/officeart/2005/8/quickstyle/simple1">
+  <dgm:title val=""/>
+  <dgm:desc val=""/>
+  <dgm:catLst>
+    <dgm:cat type="simple" pri="10100"/>
+  </dgm:catLst>
+  <dgm:scene3d>
+    <a:camera prst="orthographicFront"/>
+    <a:lightRig rig="threePt" dir="t"/>
+  </dgm:scene3d>
+  <dgm:styleLbl name="node0">
+    <dgm:scene3d>
+      <a:camera prst="orthographicFront"/>
+      <a:lightRig rig="threePt" dir="t"/>
+    </dgm:scene3d>
+    <dgm:sp3d/>
+    <dgm:txPr/>
+    <dgm:style>
+      <a:lnRef idx="2">
+        <a:scrgbClr r="0" g="0" b="0"/>
+      </a:lnRef>
+      <a:fillRef idx="1">
+        <a:scrgbClr r="0" g="0" b="0"/>
+      </a:fillRef>
+      <a:effectRef idx="0">
+        <a:scrgbClr r="0" g="0" b="0"/>
+      </a:effectRef>
+      <a:fontRef idx="minor">
+        <a:schemeClr val="lt1"/>
+      </a:fontRef>
+    </dgm:style>
+  </dgm:styleLbl>
+  <dgm:styleLbl name="lnNode1">
+    <dgm:scene3d>
+      <a:camera prst="orthographicFront"/>
+      <a:lightRig rig="threePt" dir="t"/>
+    </dgm:scene3d>
+    <dgm:sp3d/>
+    <dgm:txPr/>
+    <dgm:style>
+      <a:lnRef idx="2">
+        <a:scrgbClr r="0" g="0" b="0"/>
+      </a:lnRef>
+      <a:fillRef idx="1">
+        <a:scrgbClr r="0" g="0" b="0"/>
+      </a:fillRef>
+      <a:effectRef idx="0">
+        <a:scrgbClr r="0" g="0" b="0"/>
+      </a:effectRef>
+      <a:fontRef idx="minor">
+        <a:schemeClr val="lt1"/>
+      </a:fontRef>
+    </dgm:style>
+  </dgm:styleLbl>
+  <dgm:styleLbl name="vennNode1">
+    <dgm:scene3d>
+      <a:camera prst="orthographicFront"/>
+      <a:lightRig rig="threePt" dir="t"/>
+    </dgm:scene3d>
+    <dgm:sp3d/>
+    <dgm:txPr/>
+    <dgm:style>
+      <a:lnRef idx="2">
+        <a:scrgbClr r="0" g="0" b="0"/>
+      </a:lnRef>
+      <a:fillRef idx="1">
+        <a:scrgbClr r="0" g="0" b="0"/>
+      </a:fillRef>
+      <a:effectRef idx="0">
+        <a:scrgbClr r="0" g="0" b="0"/>
+      </a:effectRef>
+      <a:fontRef idx="minor">
+        <a:schemeClr val="tx1"/>
+      </a:fontRef>
+    </dgm:style>
+  </dgm:styleLbl>
+  <dgm:styleLbl name="alignNode1">
+    <dgm:scene3d>
+      <a:camera prst="orthographicFront"/>
+      <a:lightRig rig="threePt" dir="t"/>
+    </dgm:scene3d>
+    <dgm:sp3d/>
+    <dgm:txPr/>
+    <dgm:style>
+      <a:lnRef idx="2">
+        <a:scrgbClr r="0" g="0" b="0"/>
+      </a:lnRef>
+      <a:fillRef idx="1">
+        <a:scrgbClr r="0" g="0" b="0"/>
+      </a:fillRef>
+      <a:effectRef idx="0">
+        <a:scrgbClr r="0" g="0" b="0"/>
+      </a:effectRef>
+      <a:fontRef idx="minor">
+        <a:schemeClr val="lt1"/>
+      </a:fontRef>
+    </dgm:style>
+  </dgm:styleLbl>
+  <dgm:styleLbl name="node1">
+    <dgm:scene3d>
+      <a:camera prst="orthographicFront"/>
+      <a:lightRig rig="threePt" dir="t"/>
+    </dgm:scene3d>
+    <dgm:sp3d/>
+    <dgm:txPr/>
+    <dgm:style>
+      <a:lnRef idx="2">
+        <a:scrgbClr r="0" g="0" b="0"/>
+      </a:lnRef>
+      <a:fillRef idx="1">
+        <a:scrgbClr r="0" g="0" b="0"/>
+      </a:fillRef>
+      <a:effectRef idx="0">
+        <a:scrgbClr r="0" g="0" b="0"/>
+      </a:effectRef>
+      <a:fontRef idx="minor">
+        <a:schemeClr val="lt1"/>
+      </a:fontRef>
+    </dgm:style>
+  </dgm:styleLbl>
+  <dgm:styleLbl name="node2">
+    <dgm:scene3d>
+      <a:camera prst="orthographicFront"/>
+      <a:lightRig rig="threePt" dir="t"/>
+    </dgm:scene3d>
+    <dgm:sp3d/>
+    <dgm:txPr/>
+    <dgm:style>
+      <a:lnRef idx="2">
+        <a:scrgbClr r="0" g="0" b="0"/>
+      </a:lnRef>
+      <a:fillRef idx="1">
+        <a:scrgbClr r="0" g="0" b="0"/>
+      </a:fillRef>
+      <a:effectRef idx="0">
+        <a:scrgbClr r="0" g="0" b="0"/>
+      </a:effectRef>
+      <a:fontRef idx="minor">
+        <a:schemeClr val="lt1"/>
+      </a:fontRef>
+    </dgm:style>
+  </dgm:styleLbl>
+  <dgm:styleLbl name="node3">
+    <dgm:scene3d>
+      <a:camera prst="orthographicFront"/>
+      <a:lightRig rig="threePt" dir="t"/>
+    </dgm:scene3d>
+    <dgm:sp3d/>
+    <dgm:txPr/>
+    <dgm:style>
+      <a:lnRef idx="2">
+        <a:scrgbClr r="0" g="0" b="0"/>
+      </a:lnRef>
+      <a:fillRef idx="1">
+        <a:scrgbClr r="0" g="0" b="0"/>
+      </a:fillRef>
+      <a:effectRef idx="0">
+        <a:scrgbClr r="0" g="0" b="0"/>
+      </a:effectRef>
+      <a:fontRef idx="minor">
+        <a:schemeClr val="lt1"/>
+      </a:fontRef>
+    </dgm:style>
+  </dgm:styleLbl>
+  <dgm:styleLbl name="node4">
+    <dgm:scene3d>
+      <a:camera prst="orthographicFront"/>
+      <a:lightRig rig="threePt" dir="t"/>
+    </dgm:scene3d>
+    <dgm:sp3d/>
+    <dgm:txPr/>
+    <dgm:style>
+      <a:lnRef idx="2">
+        <a:scrgbClr r="0" g="0" b="0"/>
+      </a:lnRef>
+      <a:fillRef idx="1">
+        <a:scrgbClr r="0" g="0" b="0"/>
+      </a:fillRef>
+      <a:effectRef idx="0">
+        <a:scrgbClr r="0" g="0" b="0"/>
+      </a:effectRef>
+      <a:fontRef idx="minor">
+        <a:schemeClr val="lt1"/>
+      </a:fontRef>
+    </dgm:style>
+  </dgm:styleLbl>
+  <dgm:styleLbl name="fgImgPlace1">
+    <dgm:scene3d>
+      <a:camera prst="orthographicFront"/>
+      <a:lightRig rig="threePt" dir="t"/>
+    </dgm:scene3d>
+    <dgm:sp3d/>
+    <dgm:txPr/>
+    <dgm:style>
+      <a:lnRef idx="2">
+        <a:scrgbClr r="0" g="0" b="0"/>
+      </a:lnRef>
+      <a:fillRef idx="1">
+        <a:scrgbClr r="0" g="0" b="0"/>
+      </a:fillRef>
+      <a:effectRef idx="0">
+        <a:scrgbClr r="0" g="0" b="0"/>
+      </a:effectRef>
+      <a:fontRef idx="minor"/>
+    </dgm:style>
+  </dgm:styleLbl>
+  <dgm:styleLbl name="alignImgPlace1">
+    <dgm:scene3d>
+      <a:camera prst="orthographicFront"/>
+      <a:lightRig rig="threePt" dir="t"/>
+    </dgm:scene3d>
+    <dgm:sp3d/>
+    <dgm:txPr/>
+    <dgm:style>
+      <a:lnRef idx="2">
+        <a:scrgbClr r="0" g="0" b="0"/>
+      </a:lnRef>
+      <a:fillRef idx="1">
+        <a:scrgbClr r="0" g="0" b="0"/>
+      </a:fillRef>
+      <a:effectRef idx="0">
+        <a:scrgbClr r="0" g="0" b="0"/>
+      </a:effectRef>
+      <a:fontRef idx="minor"/>
+    </dgm:style>
+  </dgm:styleLbl>
+  <dgm:styleLbl name="bgImgPlace1">
+    <dgm:scene3d>
+      <a:camera prst="orthographicFront"/>
+      <a:lightRig rig="threePt" dir="t"/>
+    </dgm:scene3d>
+    <dgm:sp3d/>
+    <dgm:txPr/>
+    <dgm:style>
+      <a:lnRef idx="2">
+        <a:scrgbClr r="0" g="0" b="0"/>
+      </a:lnRef>
+      <a:fillRef idx="1">
+        <a:scrgbClr r="0" g="0" b="0"/>
+      </a:fillRef>
+      <a:effectRef idx="0">
+        <a:scrgbClr r="0" g="0" b="0"/>
+      </a:effectRef>
+      <a:fontRef idx="minor"/>
+    </dgm:style>
+  </dgm:styleLbl>
+  <dgm:styleLbl name="sibTrans2D1">
+    <dgm:scene3d>
+      <a:camera prst="orthographicFront"/>
+      <a:lightRig rig="threePt" dir="t"/>
+    </dgm:scene3d>
+    <dgm:sp3d/>
+    <dgm:txPr/>
+    <dgm:style>
+      <a:lnRef idx="0">
+        <a:scrgbClr r="0" g="0" b="0"/>
+      </a:lnRef>
+      <a:fillRef idx="1">
+        <a:scrgbClr r="0" g="0" b="0"/>
+      </a:fillRef>
+      <a:effectRef idx="0">
+        <a:scrgbClr r="0" g="0" b="0"/>
+      </a:effectRef>
+      <a:fontRef idx="minor">
+        <a:schemeClr val="lt1"/>
+      </a:fontRef>
+    </dgm:style>
+  </dgm:styleLbl>
+  <dgm:styleLbl name="fgSibTrans2D1">
+    <dgm:scene3d>
+      <a:camera prst="orthographicFront"/>
+      <a:lightRig rig="threePt" dir="t"/>
+    </dgm:scene3d>
+    <dgm:sp3d/>
+    <dgm:txPr/>
+    <dgm:style>
+      <a:lnRef idx="0">
+        <a:scrgbClr r="0" g="0" b="0"/>
+      </a:lnRef>
+      <a:fillRef idx="1">
+        <a:scrgbClr r="0" g="0" b="0"/>
+      </a:fillRef>
+      <a:effectRef idx="0">
+        <a:scrgbClr r="0" g="0" b="0"/>
+      </a:effectRef>
+      <a:fontRef idx="minor">
+        <a:schemeClr val="lt1"/>
+      </a:fontRef>
+    </dgm:style>
+  </dgm:styleLbl>
+  <dgm:styleLbl name="bgSibTrans2D1">
+    <dgm:scene3d>
+      <a:camera prst="orthographicFront"/>
+      <a:lightRig rig="threePt" dir="t"/>
+    </dgm:scene3d>
+    <dgm:sp3d/>
+    <dgm:txPr/>
+    <dgm:style>
+      <a:lnRef idx="0">
+        <a:scrgbClr r="0" g="0" b="0"/>
+      </a:lnRef>
+      <a:fillRef idx="1">
+        <a:scrgbClr r="0" g="0" b="0"/>
+      </a:fillRef>
+      <a:effectRef idx="0">
+        <a:scrgbClr r="0" g="0" b="0"/>
+      </a:effectRef>
+      <a:fontRef idx="minor">
+        <a:schemeClr val="lt1"/>
+      </a:fontRef>
+    </dgm:style>
+  </dgm:styleLbl>
+  <dgm:styleLbl name="sibTrans1D1">
+    <dgm:scene3d>
+      <a:camera prst="orthographicFront"/>
+      <a:lightRig rig="threePt" dir="t"/>
+    </dgm:scene3d>
+    <dgm:sp3d/>
+    <dgm:txPr/>
+    <dgm:style>
+      <a:lnRef idx="1">
+        <a:scrgbClr r="0" g="0" b="0"/>
+      </a:lnRef>
+      <a:fillRef idx="0">
+        <a:scrgbClr r="0" g="0" b="0"/>
+      </a:fillRef>
+      <a:effectRef idx="0">
+        <a:scrgbClr r="0" g="0" b="0"/>
+      </a:effectRef>
+      <a:fontRef idx="minor"/>
+    </dgm:style>
+  </dgm:styleLbl>
+  <dgm:styleLbl name="callout">
+    <dgm:scene3d>
+      <a:camera prst="orthographicFront"/>
+      <a:lightRig rig="threePt" dir="t"/>
+    </dgm:scene3d>
+    <dgm:sp3d/>
+    <dgm:txPr/>
+    <dgm:style>
+      <a:lnRef idx="2">
+        <a:scrgbClr r="0" g="0" b="0"/>
+      </a:lnRef>
+      <a:fillRef idx="1">
+        <a:scrgbClr r="0" g="0" b="0"/>
+      </a:fillRef>
+      <a:effectRef idx="0">
+        <a:scrgbClr r="0" g="0" b="0"/>
+      </a:effectRef>
+      <a:fontRef idx="minor"/>
+    </dgm:style>
+  </dgm:styleLbl>
+  <dgm:styleLbl name="asst0">
+    <dgm:scene3d>
+      <a:camera prst="orthographicFront"/>
+      <a:lightRig rig="threePt" dir="t"/>
+    </dgm:scene3d>
+    <dgm:sp3d/>
+    <dgm:txPr/>
+    <dgm:style>
+      <a:lnRef idx="2">
+        <a:scrgbClr r="0" g="0" b="0"/>
+      </a:lnRef>
+      <a:fillRef idx="1">
+        <a:scrgbClr r="0" g="0" b="0"/>
+      </a:fillRef>
+      <a:effectRef idx="0">
+        <a:scrgbClr r="0" g="0" b="0"/>
+      </a:effectRef>
+      <a:fontRef idx="minor">
+        <a:schemeClr val="lt1"/>
+      </a:fontRef>
+    </dgm:style>
+  </dgm:styleLbl>
+  <dgm:styleLbl name="asst1">
+    <dgm:scene3d>
+      <a:camera prst="orthographicFront"/>
+      <a:lightRig rig="threePt" dir="t"/>
+    </dgm:scene3d>
+    <dgm:sp3d/>
+    <dgm:txPr/>
+    <dgm:style>
+      <a:lnRef idx="2">
+        <a:scrgbClr r="0" g="0" b="0"/>
+      </a:lnRef>
+      <a:fillRef idx="1">
+        <a:scrgbClr r="0" g="0" b="0"/>
+      </a:fillRef>
+      <a:effectRef idx="0">
+        <a:scrgbClr r="0" g="0" b="0"/>
+      </a:effectRef>
+      <a:fontRef idx="minor">
+        <a:schemeClr val="lt1"/>
+      </a:fontRef>
+    </dgm:style>
+  </dgm:styleLbl>
+  <dgm:styleLbl name="asst2">
+    <dgm:scene3d>
+      <a:camera prst="orthographicFront"/>
+      <a:lightRig rig="threePt" dir="t"/>
+    </dgm:scene3d>
+    <dgm:sp3d/>
+    <dgm:txPr/>
+    <dgm:style>
+      <a:lnRef idx="2">
+        <a:scrgbClr r="0" g="0" b="0"/>
+      </a:lnRef>
+      <a:fillRef idx="1">
+        <a:scrgbClr r="0" g="0" b="0"/>
+      </a:fillRef>
+      <a:effectRef idx="0">
+        <a:scrgbClr r="0" g="0" b="0"/>
+      </a:effectRef>
+      <a:fontRef idx="minor">
+        <a:schemeClr val="lt1"/>
+      </a:fontRef>
+    </dgm:style>
+  </dgm:styleLbl>
+  <dgm:styleLbl name="asst3">
+    <dgm:scene3d>
+      <a:camera prst="orthographicFront"/>
+      <a:lightRig rig="threePt" dir="t"/>
+    </dgm:scene3d>
+    <dgm:sp3d/>
+    <dgm:txPr/>
+    <dgm:style>
+      <a:lnRef idx="2">
+        <a:scrgbClr r="0" g="0" b="0"/>
+      </a:lnRef>
+      <a:fillRef idx="1">
+        <a:scrgbClr r="0" g="0" b="0"/>
+      </a:fillRef>
+      <a:effectRef idx="0">
+        <a:scrgbClr r="0" g="0" b="0"/>
+      </a:effectRef>
+      <a:fontRef idx="minor">
+        <a:schemeClr val="lt1"/>
+      </a:fontRef>
+    </dgm:style>
+  </dgm:styleLbl>
+  <dgm:styleLbl name="asst4">
+    <dgm:scene3d>
+      <a:camera prst="orthographicFront"/>
+      <a:lightRig rig="threePt" dir="t"/>
+    </dgm:scene3d>
+    <dgm:sp3d/>
+    <dgm:txPr/>
+    <dgm:style>
+      <a:lnRef idx="2">
+        <a:scrgbClr r="0" g="0" b="0"/>
+      </a:lnRef>
+      <a:fillRef idx="1">
+        <a:scrgbClr r="0" g="0" b="0"/>
+      </a:fillRef>
+      <a:effectRef idx="0">
+        <a:scrgbClr r="0" g="0" b="0"/>
+      </a:effectRef>
+      <a:fontRef idx="minor">
+        <a:schemeClr val="lt1"/>
+      </a:fontRef>
+    </dgm:style>
+  </dgm:styleLbl>
+  <dgm:styleLbl name="parChTrans2D1">
+    <dgm:scene3d>
+      <a:camera prst="orthographicFront"/>
+      <a:lightRig rig="threePt" dir="t"/>
+    </dgm:scene3d>
+    <dgm:sp3d/>
+    <dgm:txPr/>
+    <dgm:style>
+      <a:lnRef idx="2">
+        <a:scrgbClr r="0" g="0" b="0"/>
+      </a:lnRef>
+      <a:fillRef idx="1">
+        <a:scrgbClr r="0" g="0" b="0"/>
+      </a:fillRef>
+      <a:effectRef idx="0">
+        <a:scrgbClr r="0" g="0" b="0"/>
+      </a:effectRef>
+      <a:fontRef idx="minor">
+        <a:schemeClr val="lt1"/>
+      </a:fontRef>
+    </dgm:style>
+  </dgm:styleLbl>
+  <dgm:styleLbl name="parChTrans2D2">
+    <dgm:scene3d>
+      <a:camera prst="orthographicFront"/>
+      <a:lightRig rig="threePt" dir="t"/>
+    </dgm:scene3d>
+    <dgm:sp3d/>
+    <dgm:txPr/>
+    <dgm:style>
+      <a:lnRef idx="2">
+        <a:scrgbClr r="0" g="0" b="0"/>
+      </a:lnRef>
+      <a:fillRef idx="1">
+        <a:scrgbClr r="0" g="0" b="0"/>
+      </a:fillRef>
+      <a:effectRef idx="0">
+        <a:scrgbClr r="0" g="0" b="0"/>
+      </a:effectRef>
+      <a:fontRef idx="minor">
+        <a:schemeClr val="lt1"/>
+      </a:fontRef>
+    </dgm:style>
+  </dgm:styleLbl>
+  <dgm:styleLbl name="parChTrans2D3">
+    <dgm:scene3d>
+      <a:camera prst="orthographicFront"/>
+      <a:lightRig rig="threePt" dir="t"/>
+    </dgm:scene3d>
+    <dgm:sp3d/>
+    <dgm:txPr/>
+    <dgm:style>
+      <a:lnRef idx="2">
+        <a:scrgbClr r="0" g="0" b="0"/>
+      </a:lnRef>
+      <a:fillRef idx="1">
+        <a:scrgbClr r="0" g="0" b="0"/>
+      </a:fillRef>
+      <a:effectRef idx="0">
+        <a:scrgbClr r="0" g="0" b="0"/>
+      </a:effectRef>
+      <a:fontRef idx="minor">
+        <a:schemeClr val="lt1"/>
+      </a:fontRef>
+    </dgm:style>
+  </dgm:styleLbl>
+  <dgm:styleLbl name="parChTrans2D4">
+    <dgm:scene3d>
+      <a:camera prst="orthographicFront"/>
+      <a:lightRig rig="threePt" dir="t"/>
+    </dgm:scene3d>
+    <dgm:sp3d/>
+    <dgm:txPr/>
+    <dgm:style>
+      <a:lnRef idx="2">
+        <a:scrgbClr r="0" g="0" b="0"/>
+      </a:lnRef>
+      <a:fillRef idx="1">
+        <a:scrgbClr r="0" g="0" b="0"/>
+      </a:fillRef>
+      <a:effectRef idx="0">
+        <a:scrgbClr r="0" g="0" b="0"/>
+      </a:effectRef>
+      <a:fontRef idx="minor">
+        <a:schemeClr val="lt1"/>
+      </a:fontRef>
+    </dgm:style>
+  </dgm:styleLbl>
+  <dgm:styleLbl name="parChTrans1D1">
+    <dgm:scene3d>
+      <a:camera prst="orthographicFront"/>
+      <a:lightRig rig="threePt" dir="t"/>
+    </dgm:scene3d>
+    <dgm:sp3d/>
+    <dgm:txPr/>
+    <dgm:style>
+      <a:lnRef idx="2">
+        <a:scrgbClr r="0" g="0" b="0"/>
+      </a:lnRef>
+      <a:fillRef idx="0">
+        <a:scrgbClr r="0" g="0" b="0"/>
+      </a:fillRef>
+      <a:effectRef idx="0">
+        <a:scrgbClr r="0" g="0" b="0"/>
+      </a:effectRef>
+      <a:fontRef idx="minor"/>
+    </dgm:style>
+  </dgm:styleLbl>
+  <dgm:styleLbl name="parChTrans1D2">
+    <dgm:scene3d>
+      <a:camera prst="orthographicFront"/>
+      <a:lightRig rig="threePt" dir="t"/>
+    </dgm:scene3d>
+    <dgm:sp3d/>
+    <dgm:txPr/>
+    <dgm:style>
+      <a:lnRef idx="2">
+        <a:scrgbClr r="0" g="0" b="0"/>
+      </a:lnRef>
+      <a:fillRef idx="0">
+        <a:scrgbClr r="0" g="0" b="0"/>
+      </a:fillRef>
+      <a:effectRef idx="0">
+        <a:scrgbClr r="0" g="0" b="0"/>
+      </a:effectRef>
+      <a:fontRef idx="minor"/>
+    </dgm:style>
+  </dgm:styleLbl>
+  <dgm:styleLbl name="parChTrans1D3">
+    <dgm:scene3d>
+      <a:camera prst="orthographicFront"/>
+      <a:lightRig rig="threePt" dir="t"/>
+    </dgm:scene3d>
+    <dgm:sp3d/>
+    <dgm:txPr/>
+    <dgm:style>
+      <a:lnRef idx="2">
+        <a:scrgbClr r="0" g="0" b="0"/>
+      </a:lnRef>
+      <a:fillRef idx="0">
+        <a:scrgbClr r="0" g="0" b="0"/>
+      </a:fillRef>
+      <a:effectRef idx="0">
+        <a:scrgbClr r="0" g="0" b="0"/>
+      </a:effectRef>
+      <a:fontRef idx="minor"/>
+    </dgm:style>
+  </dgm:styleLbl>
+  <dgm:styleLbl name="parChTrans1D4">
+    <dgm:scene3d>
+      <a:camera prst="orthographicFront"/>
+      <a:lightRig rig="threePt" dir="t"/>
+    </dgm:scene3d>
+    <dgm:sp3d/>
+    <dgm:txPr/>
+    <dgm:style>
+      <a:lnRef idx="2">
+        <a:scrgbClr r="0" g="0" b="0"/>
+      </a:lnRef>
+      <a:fillRef idx="0">
+        <a:scrgbClr r="0" g="0" b="0"/>
+      </a:fillRef>
+      <a:effectRef idx="0">
+        <a:scrgbClr r="0" g="0" b="0"/>
+      </a:effectRef>
+      <a:fontRef idx="minor"/>
+    </dgm:style>
+  </dgm:styleLbl>
+  <dgm:styleLbl name="fgAcc1">
+    <dgm:scene3d>
+      <a:camera prst="orthographicFront"/>
+      <a:lightRig rig="threePt" dir="t"/>
+    </dgm:scene3d>
+    <dgm:sp3d/>
+    <dgm:txPr/>
+    <dgm:style>
+      <a:lnRef idx="2">
+        <a:scrgbClr r="0" g="0" b="0"/>
+      </a:lnRef>
+      <a:fillRef idx="1">
+        <a:scrgbClr r="0" g="0" b="0"/>
+      </a:fillRef>
+      <a:effectRef idx="0">
+        <a:scrgbClr r="0" g="0" b="0"/>
+      </a:effectRef>
+      <a:fontRef idx="minor"/>
+    </dgm:style>
+  </dgm:styleLbl>
+  <dgm:styleLbl name="conFgAcc1">
+    <dgm:scene3d>
+      <a:camera prst="orthographicFront"/>
+      <a:lightRig rig="threePt" dir="t"/>
+    </dgm:scene3d>
+    <dgm:sp3d/>
+    <dgm:txPr/>
+    <dgm:style>
+      <a:lnRef idx="2">
+        <a:scrgbClr r="0" g="0" b="0"/>
+      </a:lnRef>
+      <a:fillRef idx="1">
+        <a:scrgbClr r="0" g="0" b="0"/>
+      </a:fillRef>
+      <a:effectRef idx="0">
+        <a:scrgbClr r="0" g="0" b="0"/>
+      </a:effectRef>
+      <a:fontRef idx="minor"/>
+    </dgm:style>
+  </dgm:styleLbl>
+  <dgm:styleLbl name="alignAcc1">
+    <dgm:scene3d>
+      <a:camera prst="orthographicFront"/>
+      <a:lightRig rig="threePt" dir="t"/>
+    </dgm:scene3d>
+    <dgm:sp3d/>
+    <dgm:txPr/>
+    <dgm:style>
+      <a:lnRef idx="2">
+        <a:scrgbClr r="0" g="0" b="0"/>
+      </a:lnRef>
+      <a:fillRef idx="1">
+        <a:scrgbClr r="0" g="0" b="0"/>
+      </a:fillRef>
+      <a:effectRef idx="0">
+        <a:scrgbClr r="0" g="0" b="0"/>
+      </a:effectRef>
+      <a:fontRef idx="minor"/>
+    </dgm:style>
+  </dgm:styleLbl>
+  <dgm:styleLbl name="trAlignAcc1">
+    <dgm:scene3d>
+      <a:camera prst="orthographicFront"/>
+      <a:lightRig rig="threePt" dir="t"/>
+    </dgm:scene3d>
+    <dgm:sp3d/>
+    <dgm:txPr/>
+    <dgm:style>
+      <a:lnRef idx="1">
+        <a:scrgbClr r="0" g="0" b="0"/>
+      </a:lnRef>
+      <a:fillRef idx="1">
+        <a:scrgbClr r="0" g="0" b="0"/>
+      </a:fillRef>
+      <a:effectRef idx="0">
+        <a:scrgbClr r="0" g="0" b="0"/>
+      </a:effectRef>
+      <a:fontRef idx="minor"/>
+    </dgm:style>
+  </dgm:styleLbl>
+  <dgm:styleLbl name="bgAcc1">
+    <dgm:scene3d>
+      <a:camera prst="orthographicFront"/>
+      <a:lightRig rig="threePt" dir="t"/>
+    </dgm:scene3d>
+    <dgm:sp3d/>
+    <dgm:txPr/>
+    <dgm:style>
+      <a:lnRef idx="2">
+        <a:scrgbClr r="0" g="0" b="0"/>
+      </a:lnRef>
+      <a:fillRef idx="1">
+        <a:scrgbClr r="0" g="0" b="0"/>
+      </a:fillRef>
+      <a:effectRef idx="0">
+        <a:scrgbClr r="0" g="0" b="0"/>
+      </a:effectRef>
+      <a:fontRef idx="minor"/>
+    </dgm:style>
+  </dgm:styleLbl>
+  <dgm:styleLbl name="solidFgAcc1">
+    <dgm:scene3d>
+      <a:camera prst="orthographicFront"/>
+      <a:lightRig rig="threePt" dir="t"/>
+    </dgm:scene3d>
+    <dgm:sp3d/>
+    <dgm:txPr/>
+    <dgm:style>
+      <a:lnRef idx="2">
+        <a:scrgbClr r="0" g="0" b="0"/>
+      </a:lnRef>
+      <a:fillRef idx="1">
+        <a:scrgbClr r="0" g="0" b="0"/>
+      </a:fillRef>
+      <a:effectRef idx="0">
+        <a:scrgbClr r="0" g="0" b="0"/>
+      </a:effectRef>
+      <a:fontRef idx="minor"/>
+    </dgm:style>
+  </dgm:styleLbl>
+  <dgm:styleLbl name="solidAlignAcc1">
+    <dgm:scene3d>
+      <a:camera prst="orthographicFront"/>
+      <a:lightRig rig="threePt" dir="t"/>
+    </dgm:scene3d>
+    <dgm:sp3d/>
+    <dgm:txPr/>
+    <dgm:style>
+      <a:lnRef idx="2">
+        <a:scrgbClr r="0" g="0" b="0"/>
+      </a:lnRef>
+      <a:fillRef idx="1">
+        <a:scrgbClr r="0" g="0" b="0"/>
+      </a:fillRef>
+      <a:effectRef idx="0">
+        <a:scrgbClr r="0" g="0" b="0"/>
+      </a:effectRef>
+      <a:fontRef idx="minor"/>
+    </dgm:style>
+  </dgm:styleLbl>
+  <dgm:styleLbl name="solidBgAcc1">
+    <dgm:scene3d>
+      <a:camera prst="orthographicFront"/>
+      <a:lightRig rig="threePt" dir="t"/>
+    </dgm:scene3d>
+    <dgm:sp3d/>
+    <dgm:txPr/>
+    <dgm:style>
+      <a:lnRef idx="2">
+        <a:scrgbClr r="0" g="0" b="0"/>
+      </a:lnRef>
+      <a:fillRef idx="1">
+        <a:scrgbClr r="0" g="0" b="0"/>
+      </a:fillRef>
+      <a:effectRef idx="0">
+        <a:scrgbClr r="0" g="0" b="0"/>
+      </a:effectRef>
+      <a:fontRef idx="minor"/>
+    </dgm:style>
+  </dgm:styleLbl>
+  <dgm:styleLbl name="fgAccFollowNode1">
+    <dgm:scene3d>
+      <a:camera prst="orthographicFront"/>
+      <a:lightRig rig="threePt" dir="t"/>
+    </dgm:scene3d>
+    <dgm:sp3d/>
+    <dgm:txPr/>
+    <dgm:style>
+      <a:lnRef idx="2">
+        <a:scrgbClr r="0" g="0" b="0"/>
+      </a:lnRef>
+      <a:fillRef idx="1">
+        <a:scrgbClr r="0" g="0" b="0"/>
+      </a:fillRef>
+      <a:effectRef idx="0">
+        <a:scrgbClr r="0" g="0" b="0"/>
+      </a:effectRef>
+      <a:fontRef idx="minor"/>
+    </dgm:style>
+  </dgm:styleLbl>
+  <dgm:styleLbl name="alignAccFollowNode1">
+    <dgm:scene3d>
+      <a:camera prst="orthographicFront"/>
+      <a:lightRig rig="threePt" dir="t"/>
+    </dgm:scene3d>
+    <dgm:sp3d/>
+    <dgm:txPr/>
+    <dgm:style>
+      <a:lnRef idx="2">
+        <a:scrgbClr r="0" g="0" b="0"/>
+      </a:lnRef>
+      <a:fillRef idx="1">
+        <a:scrgbClr r="0" g="0" b="0"/>
+      </a:fillRef>
+      <a:effectRef idx="0">
+        <a:scrgbClr r="0" g="0" b="0"/>
+      </a:effectRef>
+      <a:fontRef idx="minor"/>
+    </dgm:style>
+  </dgm:styleLbl>
+  <dgm:styleLbl name="bgAccFollowNode1">
+    <dgm:scene3d>
+      <a:camera prst="orthographicFront"/>
+      <a:lightRig rig="threePt" dir="t"/>
+    </dgm:scene3d>
+    <dgm:sp3d/>
+    <dgm:txPr/>
+    <dgm:style>
+      <a:lnRef idx="2">
+        <a:scrgbClr r="0" g="0" b="0"/>
+      </a:lnRef>
+      <a:fillRef idx="1">
+        <a:scrgbClr r="0" g="0" b="0"/>
+      </a:fillRef>
+      <a:effectRef idx="0">
+        <a:scrgbClr r="0" g="0" b="0"/>
+      </a:effectRef>
+      <a:fontRef idx="minor"/>
+    </dgm:style>
+  </dgm:styleLbl>
+  <dgm:styleLbl name="fgAcc0">
+    <dgm:scene3d>
+      <a:camera prst="orthographicFront"/>
+      <a:lightRig rig="threePt" dir="t"/>
+    </dgm:scene3d>
+    <dgm:sp3d/>
+    <dgm:txPr/>
+    <dgm:style>
+      <a:lnRef idx="2">
+        <a:scrgbClr r="0" g="0" b="0"/>
+      </a:lnRef>
+      <a:fillRef idx="1">
+        <a:scrgbClr r="0" g="0" b="0"/>
+      </a:fillRef>
+      <a:effectRef idx="0">
+        <a:scrgbClr r="0" g="0" b="0"/>
+      </a:effectRef>
+      <a:fontRef idx="minor"/>
+    </dgm:style>
+  </dgm:styleLbl>
+  <dgm:styleLbl name="fgAcc2">
+    <dgm:scene3d>
+      <a:camera prst="orthographicFront"/>
+      <a:lightRig rig="threePt" dir="t"/>
+    </dgm:scene3d>
+    <dgm:sp3d/>
+    <dgm:txPr/>
+    <dgm:style>
+      <a:lnRef idx="2">
+        <a:scrgbClr r="0" g="0" b="0"/>
+      </a:lnRef>
+      <a:fillRef idx="1">
+        <a:scrgbClr r="0" g="0" b="0"/>
+      </a:fillRef>
+      <a:effectRef idx="0">
+        <a:scrgbClr r="0" g="0" b="0"/>
+      </a:effectRef>
+      <a:fontRef idx="minor"/>
+    </dgm:style>
+  </dgm:styleLbl>
+  <dgm:styleLbl name="fgAcc3">
+    <dgm:scene3d>
+      <a:camera prst="orthographicFront"/>
+      <a:lightRig rig="threePt" dir="t"/>
+    </dgm:scene3d>
+    <dgm:sp3d/>
+    <dgm:txPr/>
+    <dgm:style>
+      <a:lnRef idx="2">
+        <a:scrgbClr r="0" g="0" b="0"/>
+      </a:lnRef>
+      <a:fillRef idx="1">
+        <a:scrgbClr r="0" g="0" b="0"/>
+      </a:fillRef>
+      <a:effectRef idx="0">
+        <a:scrgbClr r="0" g="0" b="0"/>
+      </a:effectRef>
+      <a:fontRef idx="minor"/>
+    </dgm:style>
+  </dgm:styleLbl>
+  <dgm:styleLbl name="fgAcc4">
+    <dgm:scene3d>
+      <a:camera prst="orthographicFront"/>
+      <a:lightRig rig="threePt" dir="t"/>
+    </dgm:scene3d>
+    <dgm:sp3d/>
+    <dgm:txPr/>
+    <dgm:style>
+      <a:lnRef idx="2">
+        <a:scrgbClr r="0" g="0" b="0"/>
+      </a:lnRef>
+      <a:fillRef idx="1">
+        <a:scrgbClr r="0" g="0" b="0"/>
+      </a:fillRef>
+      <a:effectRef idx="0">
+        <a:scrgbClr r="0" g="0" b="0"/>
+      </a:effectRef>
+      <a:fontRef idx="minor"/>
+    </dgm:style>
+  </dgm:styleLbl>
+  <dgm:styleLbl name="bgShp">
+    <dgm:scene3d>
+      <a:camera prst="orthographicFront"/>
+      <a:lightRig rig="threePt" dir="t"/>
+    </dgm:scene3d>
+    <dgm:sp3d/>
+    <dgm:txPr/>
+    <dgm:style>
+      <a:lnRef idx="0">
+        <a:scrgbClr r="0" g="0" b="0"/>
+      </a:lnRef>
+      <a:fillRef idx="1">
+        <a:scrgbClr r="0" g="0" b="0"/>
+      </a:fillRef>
+      <a:effectRef idx="0">
+        <a:scrgbClr r="0" g="0" b="0"/>
+      </a:effectRef>
+      <a:fontRef idx="minor"/>
+    </dgm:style>
+  </dgm:styleLbl>
+  <dgm:styleLbl name="dkBgShp">
+    <dgm:scene3d>
+      <a:camera prst="orthographicFront"/>
+      <a:lightRig rig="threePt" dir="t"/>
+    </dgm:scene3d>
+    <dgm:sp3d/>
+    <dgm:txPr/>
+    <dgm:style>
+      <a:lnRef idx="0">
+        <a:scrgbClr r="0" g="0" b="0"/>
+      </a:lnRef>
+      <a:fillRef idx="1">
+        <a:scrgbClr r="0" g="0" b="0"/>
+      </a:fillRef>
+      <a:effectRef idx="0">
+        <a:scrgbClr r="0" g="0" b="0"/>
+      </a:effectRef>
+      <a:fontRef idx="minor"/>
+    </dgm:style>
+  </dgm:styleLbl>
+  <dgm:styleLbl name="trBgShp">
+    <dgm:scene3d>
+      <a:camera prst="orthographicFront"/>
+      <a:lightRig rig="threePt" dir="t"/>
+    </dgm:scene3d>
+    <dgm:sp3d/>
+    <dgm:txPr/>
+    <dgm:style>
+      <a:lnRef idx="0">
+        <a:scrgbClr r="0" g="0" b="0"/>
+      </a:lnRef>
+      <a:fillRef idx="1">
+        <a:scrgbClr r="0" g="0" b="0"/>
+      </a:fillRef>
+      <a:effectRef idx="0">
+        <a:scrgbClr r="0" g="0" b="0"/>
+      </a:effectRef>
+      <a:fontRef idx="minor"/>
+    </dgm:style>
+  </dgm:styleLbl>
+  <dgm:styleLbl name="fgShp">
+    <dgm:scene3d>
+      <a:camera prst="orthographicFront"/>
+      <a:lightRig rig="threePt" dir="t"/>
+    </dgm:scene3d>
+    <dgm:sp3d/>
+    <dgm:txPr/>
+    <dgm:style>
+      <a:lnRef idx="2">
+        <a:scrgbClr r="0" g="0" b="0"/>
+      </a:lnRef>
+      <a:fillRef idx="1">
+        <a:scrgbClr r="0" g="0" b="0"/>
+      </a:fillRef>
+      <a:effectRef idx="0">
+        <a:scrgbClr r="0" g="0" b="0"/>
+      </a:effectRef>
+      <a:fontRef idx="minor"/>
+    </dgm:style>
+  </dgm:styleLbl>
+  <dgm:styleLbl name="revTx">
+    <dgm:scene3d>
+      <a:camera prst="orthographicFront"/>
+      <a:lightRig rig="threePt" dir="t"/>
+    </dgm:scene3d>
+    <dgm:sp3d/>
+    <dgm:txPr/>
+    <dgm:style>
+      <a:lnRef idx="0">
+        <a:scrgbClr r="0" g="0" b="0"/>
+      </a:lnRef>
+      <a:fillRef idx="0">
+        <a:scrgbClr r="0" g="0" b="0"/>
+      </a:fillRef>
+      <a:effectRef idx="0">
+        <a:scrgbClr r="0" g="0" b="0"/>
+      </a:effectRef>
+      <a:fontRef idx="minor"/>
+    </dgm:style>
+  </dgm:styleLbl>
+</dgm:styleDef>
+</file>
+
+<file path=ppt/diagrams/quickStyle4.xml><?xml version="1.0" encoding="utf-8"?>
+<dgm:styleDef xmlns:dgm="http://schemas.openxmlformats.org/drawingml/2006/diagram" xmlns:a="http://schemas.openxmlformats.org/drawingml/2006/main" uniqueId="urn:microsoft.com/office/officeart/2005/8/quickstyle/simple4">
+  <dgm:title val=""/>
+  <dgm:desc val=""/>
+  <dgm:catLst>
+    <dgm:cat type="simple" pri="10400"/>
+  </dgm:catLst>
+  <dgm:scene3d>
+    <a:camera prst="orthographicFront"/>
+    <a:lightRig rig="threePt" dir="t"/>
+  </dgm:scene3d>
+  <dgm:styleLbl name="node0">
+    <dgm:scene3d>
+      <a:camera prst="orthographicFront"/>
+      <a:lightRig rig="threePt" dir="t"/>
+    </dgm:scene3d>
+    <dgm:sp3d/>
+    <dgm:txPr/>
+    <dgm:style>
+      <a:lnRef idx="0">
+        <a:scrgbClr r="0" g="0" b="0"/>
+      </a:lnRef>
+      <a:fillRef idx="3">
+        <a:scrgbClr r="0" g="0" b="0"/>
+      </a:fillRef>
+      <a:effectRef idx="2">
+        <a:scrgbClr r="0" g="0" b="0"/>
+      </a:effectRef>
+      <a:fontRef idx="minor">
+        <a:schemeClr val="lt1"/>
+      </a:fontRef>
+    </dgm:style>
+  </dgm:styleLbl>
+  <dgm:styleLbl name="lnNode1">
+    <dgm:scene3d>
+      <a:camera prst="orthographicFront"/>
+      <a:lightRig rig="threePt" dir="t"/>
+    </dgm:scene3d>
+    <dgm:sp3d/>
+    <dgm:txPr/>
+    <dgm:style>
+      <a:lnRef idx="1">
+        <a:scrgbClr r="0" g="0" b="0"/>
+      </a:lnRef>
+      <a:fillRef idx="3">
+        <a:scrgbClr r="0" g="0" b="0"/>
+      </a:fillRef>
+      <a:effectRef idx="2">
+        <a:scrgbClr r="0" g="0" b="0"/>
+      </a:effectRef>
+      <a:fontRef idx="minor">
+        <a:schemeClr val="lt1"/>
+      </a:fontRef>
+    </dgm:style>
+  </dgm:styleLbl>
+  <dgm:styleLbl name="vennNode1">
+    <dgm:scene3d>
+      <a:camera prst="orthographicFront"/>
+      <a:lightRig rig="threePt" dir="t"/>
+    </dgm:scene3d>
+    <dgm:sp3d/>
+    <dgm:txPr/>
+    <dgm:style>
+      <a:lnRef idx="0">
+        <a:scrgbClr r="0" g="0" b="0"/>
+      </a:lnRef>
+      <a:fillRef idx="3">
+        <a:scrgbClr r="0" g="0" b="0"/>
+      </a:fillRef>
+      <a:effectRef idx="0">
+        <a:scrgbClr r="0" g="0" b="0"/>
+      </a:effectRef>
+      <a:fontRef idx="minor">
+        <a:schemeClr val="tx1"/>
+      </a:fontRef>
+    </dgm:style>
+  </dgm:styleLbl>
+  <dgm:styleLbl name="alignNode1">
+    <dgm:scene3d>
+      <a:camera prst="orthographicFront"/>
+      <a:lightRig rig="threePt" dir="t"/>
+    </dgm:scene3d>
+    <dgm:sp3d/>
+    <dgm:txPr/>
+    <dgm:style>
+      <a:lnRef idx="1">
+        <a:scrgbClr r="0" g="0" b="0"/>
+      </a:lnRef>
+      <a:fillRef idx="3">
+        <a:scrgbClr r="0" g="0" b="0"/>
+      </a:fillRef>
+      <a:effectRef idx="2">
+        <a:scrgbClr r="0" g="0" b="0"/>
+      </a:effectRef>
+      <a:fontRef idx="minor">
+        <a:schemeClr val="lt1"/>
+      </a:fontRef>
+    </dgm:style>
+  </dgm:styleLbl>
+  <dgm:styleLbl name="node1">
+    <dgm:scene3d>
+      <a:camera prst="orthographicFront"/>
+      <a:lightRig rig="threePt" dir="t"/>
+    </dgm:scene3d>
+    <dgm:sp3d/>
+    <dgm:txPr/>
+    <dgm:style>
+      <a:lnRef idx="0">
+        <a:scrgbClr r="0" g="0" b="0"/>
+      </a:lnRef>
+      <a:fillRef idx="3">
+        <a:scrgbClr r="0" g="0" b="0"/>
+      </a:fillRef>
+      <a:effectRef idx="2">
+        <a:scrgbClr r="0" g="0" b="0"/>
+      </a:effectRef>
+      <a:fontRef idx="minor">
+        <a:schemeClr val="lt1"/>
+      </a:fontRef>
+    </dgm:style>
+  </dgm:styleLbl>
+  <dgm:styleLbl name="node2">
+    <dgm:scene3d>
+      <a:camera prst="orthographicFront"/>
+      <a:lightRig rig="threePt" dir="t"/>
+    </dgm:scene3d>
+    <dgm:sp3d/>
+    <dgm:txPr/>
+    <dgm:style>
+      <a:lnRef idx="0">
+        <a:scrgbClr r="0" g="0" b="0"/>
+      </a:lnRef>
+      <a:fillRef idx="3">
+        <a:scrgbClr r="0" g="0" b="0"/>
+      </a:fillRef>
+      <a:effectRef idx="2">
+        <a:scrgbClr r="0" g="0" b="0"/>
+      </a:effectRef>
+      <a:fontRef idx="minor">
+        <a:schemeClr val="lt1"/>
+      </a:fontRef>
+    </dgm:style>
+  </dgm:styleLbl>
+  <dgm:styleLbl name="node3">
+    <dgm:scene3d>
+      <a:camera prst="orthographicFront"/>
+      <a:lightRig rig="threePt" dir="t"/>
+    </dgm:scene3d>
+    <dgm:sp3d/>
+    <dgm:txPr/>
+    <dgm:style>
+      <a:lnRef idx="0">
+        <a:scrgbClr r="0" g="0" b="0"/>
+      </a:lnRef>
+      <a:fillRef idx="3">
+        <a:scrgbClr r="0" g="0" b="0"/>
+      </a:fillRef>
+      <a:effectRef idx="2">
+        <a:scrgbClr r="0" g="0" b="0"/>
+      </a:effectRef>
+      <a:fontRef idx="minor">
+        <a:schemeClr val="lt1"/>
+      </a:fontRef>
+    </dgm:style>
+  </dgm:styleLbl>
+  <dgm:styleLbl name="node4">
+    <dgm:scene3d>
+      <a:camera prst="orthographicFront"/>
+      <a:lightRig rig="threePt" dir="t"/>
+    </dgm:scene3d>
+    <dgm:sp3d/>
+    <dgm:txPr/>
+    <dgm:style>
+      <a:lnRef idx="0">
+        <a:scrgbClr r="0" g="0" b="0"/>
+      </a:lnRef>
+      <a:fillRef idx="3">
+        <a:scrgbClr r="0" g="0" b="0"/>
+      </a:fillRef>
+      <a:effectRef idx="2">
+        <a:scrgbClr r="0" g="0" b="0"/>
+      </a:effectRef>
+      <a:fontRef idx="minor">
+        <a:schemeClr val="lt1"/>
+      </a:fontRef>
+    </dgm:style>
+  </dgm:styleLbl>
+  <dgm:styleLbl name="fgImgPlace1">
+    <dgm:scene3d>
+      <a:camera prst="orthographicFront"/>
+      <a:lightRig rig="threePt" dir="t"/>
+    </dgm:scene3d>
+    <dgm:sp3d/>
+    <dgm:txPr/>
+    <dgm:style>
+      <a:lnRef idx="0">
+        <a:scrgbClr r="0" g="0" b="0"/>
+      </a:lnRef>
+      <a:fillRef idx="1">
+        <a:scrgbClr r="0" g="0" b="0"/>
+      </a:fillRef>
+      <a:effectRef idx="2">
+        <a:scrgbClr r="0" g="0" b="0"/>
+      </a:effectRef>
+      <a:fontRef idx="minor"/>
+    </dgm:style>
+  </dgm:styleLbl>
+  <dgm:styleLbl name="alignImgPlace1">
+    <dgm:scene3d>
+      <a:camera prst="orthographicFront"/>
+      <a:lightRig rig="threePt" dir="t"/>
+    </dgm:scene3d>
+    <dgm:sp3d/>
+    <dgm:txPr/>
+    <dgm:style>
+      <a:lnRef idx="0">
+        <a:scrgbClr r="0" g="0" b="0"/>
+      </a:lnRef>
+      <a:fillRef idx="1">
+        <a:scrgbClr r="0" g="0" b="0"/>
+      </a:fillRef>
+      <a:effectRef idx="2">
+        <a:scrgbClr r="0" g="0" b="0"/>
+      </a:effectRef>
+      <a:fontRef idx="minor"/>
+    </dgm:style>
+  </dgm:styleLbl>
+  <dgm:styleLbl name="bgImgPlace1">
+    <dgm:scene3d>
+      <a:camera prst="orthographicFront"/>
+      <a:lightRig rig="threePt" dir="t"/>
+    </dgm:scene3d>
+    <dgm:sp3d/>
+    <dgm:txPr/>
+    <dgm:style>
+      <a:lnRef idx="0">
+        <a:scrgbClr r="0" g="0" b="0"/>
+      </a:lnRef>
+      <a:fillRef idx="1">
+        <a:scrgbClr r="0" g="0" b="0"/>
+      </a:fillRef>
+      <a:effectRef idx="2">
+        <a:scrgbClr r="0" g="0" b="0"/>
+      </a:effectRef>
+      <a:fontRef idx="minor"/>
+    </dgm:style>
+  </dgm:styleLbl>
+  <dgm:styleLbl name="sibTrans2D1">
+    <dgm:scene3d>
+      <a:camera prst="orthographicFront"/>
+      <a:lightRig rig="threePt" dir="t"/>
+    </dgm:scene3d>
+    <dgm:sp3d/>
+    <dgm:txPr/>
+    <dgm:style>
+      <a:lnRef idx="0">
+        <a:scrgbClr r="0" g="0" b="0"/>
+      </a:lnRef>
+      <a:fillRef idx="3">
+        <a:scrgbClr r="0" g="0" b="0"/>
+      </a:fillRef>
+      <a:effectRef idx="2">
+        <a:scrgbClr r="0" g="0" b="0"/>
+      </a:effectRef>
+      <a:fontRef idx="minor">
+        <a:schemeClr val="lt1"/>
+      </a:fontRef>
+    </dgm:style>
+  </dgm:styleLbl>
+  <dgm:styleLbl name="fgSibTrans2D1">
+    <dgm:scene3d>
+      <a:camera prst="orthographicFront"/>
+      <a:lightRig rig="threePt" dir="t"/>
+    </dgm:scene3d>
+    <dgm:sp3d/>
+    <dgm:txPr/>
+    <dgm:style>
+      <a:lnRef idx="0">
+        <a:scrgbClr r="0" g="0" b="0"/>
+      </a:lnRef>
+      <a:fillRef idx="3">
+        <a:scrgbClr r="0" g="0" b="0"/>
+      </a:fillRef>
+      <a:effectRef idx="2">
+        <a:scrgbClr r="0" g="0" b="0"/>
+      </a:effectRef>
+      <a:fontRef idx="minor">
+        <a:schemeClr val="lt1"/>
+      </a:fontRef>
+    </dgm:style>
+  </dgm:styleLbl>
+  <dgm:styleLbl name="bgSibTrans2D1">
+    <dgm:scene3d>
+      <a:camera prst="orthographicFront"/>
+      <a:lightRig rig="threePt" dir="t"/>
+    </dgm:scene3d>
+    <dgm:sp3d/>
+    <dgm:txPr/>
+    <dgm:style>
+      <a:lnRef idx="0">
+        <a:scrgbClr r="0" g="0" b="0"/>
+      </a:lnRef>
+      <a:fillRef idx="3">
+        <a:scrgbClr r="0" g="0" b="0"/>
+      </a:fillRef>
+      <a:effectRef idx="2">
+        <a:scrgbClr r="0" g="0" b="0"/>
+      </a:effectRef>
+      <a:fontRef idx="minor">
+        <a:schemeClr val="lt1"/>
+      </a:fontRef>
+    </dgm:style>
+  </dgm:styleLbl>
+  <dgm:styleLbl name="sibTrans1D1">
+    <dgm:scene3d>
+      <a:camera prst="orthographicFront"/>
+      <a:lightRig rig="threePt" dir="t"/>
+    </dgm:scene3d>
+    <dgm:sp3d/>
+    <dgm:txPr/>
+    <dgm:style>
+      <a:lnRef idx="1">
+        <a:scrgbClr r="0" g="0" b="0"/>
+      </a:lnRef>
+      <a:fillRef idx="0">
+        <a:scrgbClr r="0" g="0" b="0"/>
+      </a:fillRef>
+      <a:effectRef idx="0">
+        <a:scrgbClr r="0" g="0" b="0"/>
+      </a:effectRef>
+      <a:fontRef idx="minor"/>
+    </dgm:style>
+  </dgm:styleLbl>
+  <dgm:styleLbl name="callout">
+    <dgm:scene3d>
+      <a:camera prst="orthographicFront"/>
+      <a:lightRig rig="threePt" dir="t"/>
+    </dgm:scene3d>
+    <dgm:sp3d/>
+    <dgm:txPr/>
+    <dgm:style>
+      <a:lnRef idx="2">
+        <a:scrgbClr r="0" g="0" b="0"/>
+      </a:lnRef>
+      <a:fillRef idx="1">
+        <a:scrgbClr r="0" g="0" b="0"/>
+      </a:fillRef>
+      <a:effectRef idx="1">
+        <a:scrgbClr r="0" g="0" b="0"/>
+      </a:effectRef>
+      <a:fontRef idx="minor"/>
+    </dgm:style>
+  </dgm:styleLbl>
+  <dgm:styleLbl name="asst0">
+    <dgm:scene3d>
+      <a:camera prst="orthographicFront"/>
+      <a:lightRig rig="threePt" dir="t"/>
+    </dgm:scene3d>
+    <dgm:sp3d/>
+    <dgm:txPr/>
+    <dgm:style>
+      <a:lnRef idx="0">
+        <a:scrgbClr r="0" g="0" b="0"/>
+      </a:lnRef>
+      <a:fillRef idx="3">
+        <a:scrgbClr r="0" g="0" b="0"/>
+      </a:fillRef>
+      <a:effectRef idx="2">
+        <a:scrgbClr r="0" g="0" b="0"/>
+      </a:effectRef>
+      <a:fontRef idx="minor">
+        <a:schemeClr val="lt1"/>
+      </a:fontRef>
+    </dgm:style>
+  </dgm:styleLbl>
+  <dgm:styleLbl name="asst1">
+    <dgm:scene3d>
+      <a:camera prst="orthographicFront"/>
+      <a:lightRig rig="threePt" dir="t"/>
+    </dgm:scene3d>
+    <dgm:sp3d/>
+    <dgm:txPr/>
+    <dgm:style>
+      <a:lnRef idx="0">
+        <a:scrgbClr r="0" g="0" b="0"/>
+      </a:lnRef>
+      <a:fillRef idx="3">
+        <a:scrgbClr r="0" g="0" b="0"/>
+      </a:fillRef>
+      <a:effectRef idx="2">
+        <a:scrgbClr r="0" g="0" b="0"/>
+      </a:effectRef>
+      <a:fontRef idx="minor">
+        <a:schemeClr val="lt1"/>
+      </a:fontRef>
+    </dgm:style>
+  </dgm:styleLbl>
+  <dgm:styleLbl name="asst2">
+    <dgm:scene3d>
+      <a:camera prst="orthographicFront"/>
+      <a:lightRig rig="threePt" dir="t"/>
+    </dgm:scene3d>
+    <dgm:sp3d/>
+    <dgm:txPr/>
+    <dgm:style>
+      <a:lnRef idx="0">
+        <a:scrgbClr r="0" g="0" b="0"/>
+      </a:lnRef>
+      <a:fillRef idx="3">
+        <a:scrgbClr r="0" g="0" b="0"/>
+      </a:fillRef>
+      <a:effectRef idx="2">
+        <a:scrgbClr r="0" g="0" b="0"/>
+      </a:effectRef>
+      <a:fontRef idx="minor">
+        <a:schemeClr val="lt1"/>
+      </a:fontRef>
+    </dgm:style>
+  </dgm:styleLbl>
+  <dgm:styleLbl name="asst3">
+    <dgm:scene3d>
+      <a:camera prst="orthographicFront"/>
+      <a:lightRig rig="threePt" dir="t"/>
+    </dgm:scene3d>
+    <dgm:sp3d/>
+    <dgm:txPr/>
+    <dgm:style>
+      <a:lnRef idx="0">
+        <a:scrgbClr r="0" g="0" b="0"/>
+      </a:lnRef>
+      <a:fillRef idx="3">
+        <a:scrgbClr r="0" g="0" b="0"/>
+      </a:fillRef>
+      <a:effectRef idx="2">
+        <a:scrgbClr r="0" g="0" b="0"/>
+      </a:effectRef>
+      <a:fontRef idx="minor">
+        <a:schemeClr val="lt1"/>
+      </a:fontRef>
+    </dgm:style>
+  </dgm:styleLbl>
+  <dgm:styleLbl name="asst4">
+    <dgm:scene3d>
+      <a:camera prst="orthographicFront"/>
+      <a:lightRig rig="threePt" dir="t"/>
+    </dgm:scene3d>
+    <dgm:sp3d/>
+    <dgm:txPr/>
+    <dgm:style>
+      <a:lnRef idx="0">
+        <a:scrgbClr r="0" g="0" b="0"/>
+      </a:lnRef>
+      <a:fillRef idx="3">
+        <a:scrgbClr r="0" g="0" b="0"/>
+      </a:fillRef>
+      <a:effectRef idx="2">
+        <a:scrgbClr r="0" g="0" b="0"/>
+      </a:effectRef>
+      <a:fontRef idx="minor">
+        <a:schemeClr val="lt1"/>
+      </a:fontRef>
+    </dgm:style>
+  </dgm:styleLbl>
+  <dgm:styleLbl name="parChTrans2D1">
+    <dgm:scene3d>
+      <a:camera prst="orthographicFront"/>
+      <a:lightRig rig="threePt" dir="t"/>
+    </dgm:scene3d>
+    <dgm:sp3d/>
+    <dgm:txPr/>
+    <dgm:style>
+      <a:lnRef idx="0">
+        <a:scrgbClr r="0" g="0" b="0"/>
+      </a:lnRef>
+      <a:fillRef idx="3">
+        <a:scrgbClr r="0" g="0" b="0"/>
+      </a:fillRef>
+      <a:effectRef idx="2">
+        <a:scrgbClr r="0" g="0" b="0"/>
+      </a:effectRef>
+      <a:fontRef idx="minor">
+        <a:schemeClr val="lt1"/>
+      </a:fontRef>
+    </dgm:style>
+  </dgm:styleLbl>
+  <dgm:styleLbl name="parChTrans2D2">
+    <dgm:scene3d>
+      <a:camera prst="orthographicFront"/>
+      <a:lightRig rig="threePt" dir="t"/>
+    </dgm:scene3d>
+    <dgm:sp3d/>
+    <dgm:txPr/>
+    <dgm:style>
+      <a:lnRef idx="0">
+        <a:scrgbClr r="0" g="0" b="0"/>
+      </a:lnRef>
+      <a:fillRef idx="3">
+        <a:scrgbClr r="0" g="0" b="0"/>
+      </a:fillRef>
+      <a:effectRef idx="2">
+        <a:scrgbClr r="0" g="0" b="0"/>
+      </a:effectRef>
+      <a:fontRef idx="minor">
+        <a:schemeClr val="lt1"/>
+      </a:fontRef>
+    </dgm:style>
+  </dgm:styleLbl>
+  <dgm:styleLbl name="parChTrans2D3">
+    <dgm:scene3d>
+      <a:camera prst="orthographicFront"/>
+      <a:lightRig rig="threePt" dir="t"/>
+    </dgm:scene3d>
+    <dgm:sp3d/>
+    <dgm:txPr/>
+    <dgm:style>
+      <a:lnRef idx="1">
+        <a:scrgbClr r="0" g="0" b="0"/>
+      </a:lnRef>
+      <a:fillRef idx="3">
+        <a:scrgbClr r="0" g="0" b="0"/>
+      </a:fillRef>
+      <a:effectRef idx="2">
+        <a:scrgbClr r="0" g="0" b="0"/>
+      </a:effectRef>
+      <a:fontRef idx="minor">
+        <a:schemeClr val="lt1"/>
+      </a:fontRef>
+    </dgm:style>
+  </dgm:styleLbl>
+  <dgm:styleLbl name="parChTrans2D4">
+    <dgm:scene3d>
+      <a:camera prst="orthographicFront"/>
+      <a:lightRig rig="threePt" dir="t"/>
+    </dgm:scene3d>
+    <dgm:sp3d/>
+    <dgm:txPr/>
+    <dgm:style>
+      <a:lnRef idx="1">
+        <a:scrgbClr r="0" g="0" b="0"/>
+      </a:lnRef>
+      <a:fillRef idx="3">
+        <a:scrgbClr r="0" g="0" b="0"/>
+      </a:fillRef>
+      <a:effectRef idx="2">
+        <a:scrgbClr r="0" g="0" b="0"/>
+      </a:effectRef>
+      <a:fontRef idx="minor">
+        <a:schemeClr val="lt1"/>
+      </a:fontRef>
+    </dgm:style>
+  </dgm:styleLbl>
+  <dgm:styleLbl name="parChTrans1D1">
+    <dgm:scene3d>
+      <a:camera prst="orthographicFront"/>
+      <a:lightRig rig="threePt" dir="t"/>
+    </dgm:scene3d>
+    <dgm:sp3d/>
+    <dgm:txPr/>
+    <dgm:style>
+      <a:lnRef idx="1">
+        <a:scrgbClr r="0" g="0" b="0"/>
+      </a:lnRef>
+      <a:fillRef idx="0">
+        <a:scrgbClr r="0" g="0" b="0"/>
+      </a:fillRef>
+      <a:effectRef idx="0">
+        <a:scrgbClr r="0" g="0" b="0"/>
+      </a:effectRef>
+      <a:fontRef idx="minor"/>
+    </dgm:style>
+  </dgm:styleLbl>
+  <dgm:styleLbl name="parChTrans1D2">
+    <dgm:scene3d>
+      <a:camera prst="orthographicFront"/>
+      <a:lightRig rig="threePt" dir="t"/>
+    </dgm:scene3d>
+    <dgm:sp3d/>
+    <dgm:txPr/>
+    <dgm:style>
+      <a:lnRef idx="1">
+        <a:scrgbClr r="0" g="0" b="0"/>
+      </a:lnRef>
+      <a:fillRef idx="0">
+        <a:scrgbClr r="0" g="0" b="0"/>
+      </a:fillRef>
+      <a:effectRef idx="0">
+        <a:scrgbClr r="0" g="0" b="0"/>
+      </a:effectRef>
+      <a:fontRef idx="minor"/>
+    </dgm:style>
+  </dgm:styleLbl>
+  <dgm:styleLbl name="parChTrans1D3">
+    <dgm:scene3d>
+      <a:camera prst="orthographicFront"/>
+      <a:lightRig rig="threePt" dir="t"/>
+    </dgm:scene3d>
+    <dgm:sp3d/>
+    <dgm:txPr/>
+    <dgm:style>
+      <a:lnRef idx="1">
+        <a:scrgbClr r="0" g="0" b="0"/>
+      </a:lnRef>
+      <a:fillRef idx="0">
+        <a:scrgbClr r="0" g="0" b="0"/>
+      </a:fillRef>
+      <a:effectRef idx="0">
+        <a:scrgbClr r="0" g="0" b="0"/>
+      </a:effectRef>
+      <a:fontRef idx="minor"/>
+    </dgm:style>
+  </dgm:styleLbl>
+  <dgm:styleLbl name="parChTrans1D4">
+    <dgm:scene3d>
+      <a:camera prst="orthographicFront"/>
+      <a:lightRig rig="threePt" dir="t"/>
+    </dgm:scene3d>
+    <dgm:sp3d/>
+    <dgm:txPr/>
+    <dgm:style>
+      <a:lnRef idx="1">
+        <a:scrgbClr r="0" g="0" b="0"/>
+      </a:lnRef>
+      <a:fillRef idx="0">
+        <a:scrgbClr r="0" g="0" b="0"/>
+      </a:fillRef>
+      <a:effectRef idx="0">
+        <a:scrgbClr r="0" g="0" b="0"/>
+      </a:effectRef>
+      <a:fontRef idx="minor"/>
+    </dgm:style>
+  </dgm:styleLbl>
+  <dgm:styleLbl name="fgAcc1">
+    <dgm:scene3d>
+      <a:camera prst="orthographicFront"/>
+      <a:lightRig rig="threePt" dir="t"/>
+    </dgm:scene3d>
+    <dgm:sp3d/>
+    <dgm:txPr/>
+    <dgm:style>
+      <a:lnRef idx="1">
+        <a:scrgbClr r="0" g="0" b="0"/>
+      </a:lnRef>
+      <a:fillRef idx="1">
+        <a:scrgbClr r="0" g="0" b="0"/>
+      </a:fillRef>
+      <a:effectRef idx="0">
+        <a:scrgbClr r="0" g="0" b="0"/>
+      </a:effectRef>
+      <a:fontRef idx="minor"/>
+    </dgm:style>
+  </dgm:styleLbl>
+  <dgm:styleLbl name="conFgAcc1">
+    <dgm:scene3d>
+      <a:camera prst="orthographicFront"/>
+      <a:lightRig rig="threePt" dir="t"/>
+    </dgm:scene3d>
+    <dgm:sp3d/>
+    <dgm:txPr/>
+    <dgm:style>
+      <a:lnRef idx="1">
+        <a:scrgbClr r="0" g="0" b="0"/>
+      </a:lnRef>
+      <a:fillRef idx="1">
+        <a:scrgbClr r="0" g="0" b="0"/>
+      </a:fillRef>
+      <a:effectRef idx="0">
+        <a:scrgbClr r="0" g="0" b="0"/>
+      </a:effectRef>
+      <a:fontRef idx="minor"/>
+    </dgm:style>
+  </dgm:styleLbl>
+  <dgm:styleLbl name="alignAcc1">
+    <dgm:scene3d>
+      <a:camera prst="orthographicFront"/>
+      <a:lightRig rig="threePt" dir="t"/>
+    </dgm:scene3d>
+    <dgm:sp3d/>
+    <dgm:txPr/>
+    <dgm:style>
+      <a:lnRef idx="1">
+        <a:scrgbClr r="0" g="0" b="0"/>
+      </a:lnRef>
+      <a:fillRef idx="1">
+        <a:scrgbClr r="0" g="0" b="0"/>
+      </a:fillRef>
+      <a:effectRef idx="0">
+        <a:scrgbClr r="0" g="0" b="0"/>
+      </a:effectRef>
+      <a:fontRef idx="minor"/>
+    </dgm:style>
+  </dgm:styleLbl>
+  <dgm:styleLbl name="trAlignAcc1">
+    <dgm:scene3d>
+      <a:camera prst="orthographicFront"/>
+      <a:lightRig rig="threePt" dir="t"/>
+    </dgm:scene3d>
+    <dgm:sp3d/>
+    <dgm:txPr/>
+    <dgm:style>
+      <a:lnRef idx="1">
+        <a:scrgbClr r="0" g="0" b="0"/>
+      </a:lnRef>
+      <a:fillRef idx="1">
+        <a:scrgbClr r="0" g="0" b="0"/>
+      </a:fillRef>
+      <a:effectRef idx="0">
+        <a:scrgbClr r="0" g="0" b="0"/>
+      </a:effectRef>
+      <a:fontRef idx="minor"/>
+    </dgm:style>
+  </dgm:styleLbl>
+  <dgm:styleLbl name="bgAcc1">
+    <dgm:scene3d>
+      <a:camera prst="orthographicFront"/>
+      <a:lightRig rig="threePt" dir="t"/>
+    </dgm:scene3d>
+    <dgm:sp3d/>
+    <dgm:txPr/>
+    <dgm:style>
+      <a:lnRef idx="1">
+        <a:scrgbClr r="0" g="0" b="0"/>
+      </a:lnRef>
+      <a:fillRef idx="1">
+        <a:scrgbClr r="0" g="0" b="0"/>
+      </a:fillRef>
+      <a:effectRef idx="0">
+        <a:scrgbClr r="0" g="0" b="0"/>
+      </a:effectRef>
+      <a:fontRef idx="minor"/>
+    </dgm:style>
+  </dgm:styleLbl>
+  <dgm:styleLbl name="solidFgAcc1">
+    <dgm:scene3d>
+      <a:camera prst="orthographicFront"/>
+      <a:lightRig rig="threePt" dir="t"/>
+    </dgm:scene3d>
+    <dgm:sp3d/>
+    <dgm:txPr/>
+    <dgm:style>
+      <a:lnRef idx="1">
+        <a:scrgbClr r="0" g="0" b="0"/>
+      </a:lnRef>
+      <a:fillRef idx="1">
+        <a:scrgbClr r="0" g="0" b="0"/>
+      </a:fillRef>
+      <a:effectRef idx="0">
+        <a:scrgbClr r="0" g="0" b="0"/>
+      </a:effectRef>
+      <a:fontRef idx="minor"/>
+    </dgm:style>
+  </dgm:styleLbl>
+  <dgm:styleLbl name="solidAlignAcc1">
+    <dgm:scene3d>
+      <a:camera prst="orthographicFront"/>
+      <a:lightRig rig="threePt" dir="t"/>
+    </dgm:scene3d>
+    <dgm:sp3d/>
+    <dgm:txPr/>
+    <dgm:style>
+      <a:lnRef idx="1">
+        <a:scrgbClr r="0" g="0" b="0"/>
+      </a:lnRef>
+      <a:fillRef idx="1">
+        <a:scrgbClr r="0" g="0" b="0"/>
+      </a:fillRef>
+      <a:effectRef idx="0">
+        <a:scrgbClr r="0" g="0" b="0"/>
+      </a:effectRef>
+      <a:fontRef idx="minor"/>
+    </dgm:style>
+  </dgm:styleLbl>
+  <dgm:styleLbl name="solidBgAcc1">
+    <dgm:scene3d>
+      <a:camera prst="orthographicFront"/>
+      <a:lightRig rig="threePt" dir="t"/>
+    </dgm:scene3d>
+    <dgm:sp3d/>
+    <dgm:txPr/>
+    <dgm:style>
+      <a:lnRef idx="1">
+        <a:scrgbClr r="0" g="0" b="0"/>
+      </a:lnRef>
+      <a:fillRef idx="1">
+        <a:scrgbClr r="0" g="0" b="0"/>
+      </a:fillRef>
+      <a:effectRef idx="0">
+        <a:scrgbClr r="0" g="0" b="0"/>
+      </a:effectRef>
+      <a:fontRef idx="minor"/>
+    </dgm:style>
+  </dgm:styleLbl>
+  <dgm:styleLbl name="fgAccFollowNode1">
+    <dgm:scene3d>
+      <a:camera prst="orthographicFront"/>
+      <a:lightRig rig="threePt" dir="t"/>
+    </dgm:scene3d>
+    <dgm:sp3d/>
+    <dgm:txPr/>
+    <dgm:style>
+      <a:lnRef idx="1">
+        <a:scrgbClr r="0" g="0" b="0"/>
+      </a:lnRef>
+      <a:fillRef idx="1">
+        <a:scrgbClr r="0" g="0" b="0"/>
+      </a:fillRef>
+      <a:effectRef idx="0">
+        <a:scrgbClr r="0" g="0" b="0"/>
+      </a:effectRef>
+      <a:fontRef idx="minor"/>
+    </dgm:style>
+  </dgm:styleLbl>
+  <dgm:styleLbl name="alignAccFollowNode1">
+    <dgm:scene3d>
+      <a:camera prst="orthographicFront"/>
+      <a:lightRig rig="threePt" dir="t"/>
+    </dgm:scene3d>
+    <dgm:sp3d/>
+    <dgm:txPr/>
+    <dgm:style>
+      <a:lnRef idx="1">
+        <a:scrgbClr r="0" g="0" b="0"/>
+      </a:lnRef>
+      <a:fillRef idx="1">
+        <a:scrgbClr r="0" g="0" b="0"/>
+      </a:fillRef>
+      <a:effectRef idx="0">
+        <a:scrgbClr r="0" g="0" b="0"/>
+      </a:effectRef>
+      <a:fontRef idx="minor"/>
+    </dgm:style>
+  </dgm:styleLbl>
+  <dgm:styleLbl name="bgAccFollowNode1">
+    <dgm:scene3d>
+      <a:camera prst="orthographicFront"/>
+      <a:lightRig rig="threePt" dir="t"/>
+    </dgm:scene3d>
+    <dgm:sp3d/>
+    <dgm:txPr/>
+    <dgm:style>
+      <a:lnRef idx="1">
+        <a:scrgbClr r="0" g="0" b="0"/>
+      </a:lnRef>
+      <a:fillRef idx="1">
+        <a:scrgbClr r="0" g="0" b="0"/>
+      </a:fillRef>
+      <a:effectRef idx="0">
+        <a:scrgbClr r="0" g="0" b="0"/>
+      </a:effectRef>
+      <a:fontRef idx="minor"/>
+    </dgm:style>
+  </dgm:styleLbl>
+  <dgm:styleLbl name="fgAcc0">
+    <dgm:scene3d>
+      <a:camera prst="orthographicFront"/>
+      <a:lightRig rig="threePt" dir="t"/>
+    </dgm:scene3d>
+    <dgm:sp3d/>
+    <dgm:txPr/>
+    <dgm:style>
+      <a:lnRef idx="1">
+        <a:scrgbClr r="0" g="0" b="0"/>
+      </a:lnRef>
+      <a:fillRef idx="1">
+        <a:scrgbClr r="0" g="0" b="0"/>
+      </a:fillRef>
+      <a:effectRef idx="0">
+        <a:scrgbClr r="0" g="0" b="0"/>
+      </a:effectRef>
+      <a:fontRef idx="minor"/>
+    </dgm:style>
+  </dgm:styleLbl>
+  <dgm:styleLbl name="fgAcc2">
+    <dgm:scene3d>
+      <a:camera prst="orthographicFront"/>
+      <a:lightRig rig="threePt" dir="t"/>
+    </dgm:scene3d>
+    <dgm:sp3d/>
+    <dgm:txPr/>
+    <dgm:style>
+      <a:lnRef idx="1">
+        <a:scrgbClr r="0" g="0" b="0"/>
+      </a:lnRef>
+      <a:fillRef idx="1">
+        <a:scrgbClr r="0" g="0" b="0"/>
+      </a:fillRef>
+      <a:effectRef idx="0">
+        <a:scrgbClr r="0" g="0" b="0"/>
+      </a:effectRef>
+      <a:fontRef idx="minor"/>
+    </dgm:style>
+  </dgm:styleLbl>
+  <dgm:styleLbl name="fgAcc3">
+    <dgm:scene3d>
+      <a:camera prst="orthographicFront"/>
+      <a:lightRig rig="threePt" dir="t"/>
+    </dgm:scene3d>
+    <dgm:sp3d/>
+    <dgm:txPr/>
+    <dgm:style>
+      <a:lnRef idx="1">
+        <a:scrgbClr r="0" g="0" b="0"/>
+      </a:lnRef>
+      <a:fillRef idx="1">
+        <a:scrgbClr r="0" g="0" b="0"/>
+      </a:fillRef>
+      <a:effectRef idx="0">
+        <a:scrgbClr r="0" g="0" b="0"/>
+      </a:effectRef>
+      <a:fontRef idx="minor"/>
+    </dgm:style>
+  </dgm:styleLbl>
+  <dgm:styleLbl name="fgAcc4">
+    <dgm:scene3d>
+      <a:camera prst="orthographicFront"/>
+      <a:lightRig rig="threePt" dir="t"/>
+    </dgm:scene3d>
+    <dgm:sp3d/>
+    <dgm:txPr/>
+    <dgm:style>
+      <a:lnRef idx="1">
+        <a:scrgbClr r="0" g="0" b="0"/>
+      </a:lnRef>
+      <a:fillRef idx="1">
+        <a:scrgbClr r="0" g="0" b="0"/>
+      </a:fillRef>
+      <a:effectRef idx="0">
+        <a:scrgbClr r="0" g="0" b="0"/>
+      </a:effectRef>
+      <a:fontRef idx="minor"/>
+    </dgm:style>
+  </dgm:styleLbl>
+  <dgm:styleLbl name="bgShp">
+    <dgm:scene3d>
+      <a:camera prst="orthographicFront"/>
+      <a:lightRig rig="threePt" dir="t"/>
+    </dgm:scene3d>
+    <dgm:sp3d/>
+    <dgm:txPr/>
+    <dgm:style>
+      <a:lnRef idx="0">
+        <a:scrgbClr r="0" g="0" b="0"/>
+      </a:lnRef>
+      <a:fillRef idx="1">
+        <a:scrgbClr r="0" g="0" b="0"/>
+      </a:fillRef>
+      <a:effectRef idx="2">
+        <a:scrgbClr r="0" g="0" b="0"/>
+      </a:effectRef>
+      <a:fontRef idx="minor"/>
+    </dgm:style>
+  </dgm:styleLbl>
+  <dgm:styleLbl name="dkBgShp">
+    <dgm:scene3d>
+      <a:camera prst="orthographicFront"/>
+      <a:lightRig rig="threePt" dir="t"/>
+    </dgm:scene3d>
+    <dgm:sp3d/>
+    <dgm:txPr/>
+    <dgm:style>
+      <a:lnRef idx="0">
+        <a:scrgbClr r="0" g="0" b="0"/>
+      </a:lnRef>
+      <a:fillRef idx="1">
+        <a:scrgbClr r="0" g="0" b="0"/>
+      </a:fillRef>
+      <a:effectRef idx="2">
+        <a:scrgbClr r="0" g="0" b="0"/>
+      </a:effectRef>
+      <a:fontRef idx="minor"/>
+    </dgm:style>
+  </dgm:styleLbl>
+  <dgm:styleLbl name="trBgShp">
+    <dgm:scene3d>
+      <a:camera prst="orthographicFront"/>
+      <a:lightRig rig="threePt" dir="t"/>
+    </dgm:scene3d>
+    <dgm:sp3d/>
+    <dgm:txPr/>
+    <dgm:style>
+      <a:lnRef idx="0">
+        <a:scrgbClr r="0" g="0" b="0"/>
+      </a:lnRef>
+      <a:fillRef idx="1">
+        <a:scrgbClr r="0" g="0" b="0"/>
+      </a:fillRef>
+      <a:effectRef idx="0">
+        <a:scrgbClr r="0" g="0" b="0"/>
+      </a:effectRef>
+      <a:fontRef idx="minor"/>
+    </dgm:style>
+  </dgm:styleLbl>
+  <dgm:styleLbl name="fgShp">
+    <dgm:scene3d>
+      <a:camera prst="orthographicFront"/>
+      <a:lightRig rig="threePt" dir="t"/>
+    </dgm:scene3d>
+    <dgm:sp3d/>
+    <dgm:txPr/>
+    <dgm:style>
+      <a:lnRef idx="0">
+        <a:scrgbClr r="0" g="0" b="0"/>
+      </a:lnRef>
+      <a:fillRef idx="3">
+        <a:scrgbClr r="0" g="0" b="0"/>
+      </a:fillRef>
+      <a:effectRef idx="2">
+        <a:scrgbClr r="0" g="0" b="0"/>
+      </a:effectRef>
+      <a:fontRef idx="minor"/>
+    </dgm:style>
+  </dgm:styleLbl>
+  <dgm:styleLbl name="revTx">
+    <dgm:scene3d>
+      <a:camera prst="orthographicFront"/>
+      <a:lightRig rig="threePt" dir="t"/>
+    </dgm:scene3d>
+    <dgm:sp3d/>
+    <dgm:txPr/>
+    <dgm:style>
+      <a:lnRef idx="0">
+        <a:scrgbClr r="0" g="0" b="0"/>
+      </a:lnRef>
+      <a:fillRef idx="0">
+        <a:scrgbClr r="0" g="0" b="0"/>
+      </a:fillRef>
+      <a:effectRef idx="0">
+        <a:scrgbClr r="0" g="0" b="0"/>
+      </a:effectRef>
+      <a:fontRef idx="minor"/>
+    </dgm:style>
+  </dgm:styleLbl>
+</dgm:styleDef>
+</file>
+
+<file path=ppt/diagrams/quickStyle5.xml><?xml version="1.0" encoding="utf-8"?>
 <dgm:styleDef xmlns:dgm="http://schemas.openxmlformats.org/drawingml/2006/diagram" xmlns:a="http://schemas.openxmlformats.org/drawingml/2006/main" uniqueId="urn:microsoft.com/office/officeart/2005/8/quickstyle/simple1">
   <dgm:title val=""/>
   <dgm:desc val=""/>
@@ -25751,67 +31875,119 @@
           <a:p>
             <a:pPr algn="just"/>
             <a:r>
-              <a:rPr lang="en-US" dirty="0"/>
+              <a:rPr lang="en-US" dirty="0">
+                <a:latin typeface="Calibri" panose="020F0502020204030204" pitchFamily="34" charset="0"/>
+                <a:ea typeface="Calibri" panose="020F0502020204030204" pitchFamily="34" charset="0"/>
+                <a:cs typeface="Calibri" panose="020F0502020204030204" pitchFamily="34" charset="0"/>
+              </a:rPr>
               <a:t>We used deep learning models like Convolutional Neural Networks (CNNs) and Open CV libraries for the detection of drowsiness.</a:t>
             </a:r>
           </a:p>
           <a:p>
             <a:pPr algn="just"/>
             <a:r>
-              <a:rPr lang="en-US" dirty="0"/>
+              <a:rPr lang="en-US" dirty="0">
+                <a:latin typeface="Calibri" panose="020F0502020204030204" pitchFamily="34" charset="0"/>
+                <a:ea typeface="Calibri" panose="020F0502020204030204" pitchFamily="34" charset="0"/>
+                <a:cs typeface="Calibri" panose="020F0502020204030204" pitchFamily="34" charset="0"/>
+              </a:rPr>
               <a:t>CNN models take photos or video frames as input and automatically learn to extract key information. For input we have used the dataset from Kaggle to train the model. In model building we used Sequential , Conv2D , Maxpooling2D and dense layers. </a:t>
             </a:r>
           </a:p>
           <a:p>
             <a:pPr algn="just"/>
             <a:r>
-              <a:rPr lang="en-US" dirty="0"/>
+              <a:rPr lang="en-US" dirty="0">
+                <a:latin typeface="Calibri" panose="020F0502020204030204" pitchFamily="34" charset="0"/>
+                <a:ea typeface="Calibri" panose="020F0502020204030204" pitchFamily="34" charset="0"/>
+                <a:cs typeface="Calibri" panose="020F0502020204030204" pitchFamily="34" charset="0"/>
+              </a:rPr>
               <a:t>Focusing on the Open - Closed Eye and Yawn – No Yawn dataset, and we achieved the accuracy of 90.68% while predicting the drowsiness of driver.</a:t>
             </a:r>
           </a:p>
           <a:p>
             <a:pPr algn="just"/>
             <a:r>
-              <a:rPr lang="en-US" dirty="0"/>
+              <a:rPr lang="en-US" dirty="0">
+                <a:latin typeface="Calibri" panose="020F0502020204030204" pitchFamily="34" charset="0"/>
+                <a:ea typeface="Calibri" panose="020F0502020204030204" pitchFamily="34" charset="0"/>
+                <a:cs typeface="Calibri" panose="020F0502020204030204" pitchFamily="34" charset="0"/>
+              </a:rPr>
               <a:t>We worked on another model using OpenCV and </a:t>
             </a:r>
             <a:r>
-              <a:rPr lang="en-US" dirty="0" err="1"/>
+              <a:rPr lang="en-US" dirty="0" err="1">
+                <a:latin typeface="Calibri" panose="020F0502020204030204" pitchFamily="34" charset="0"/>
+                <a:ea typeface="Calibri" panose="020F0502020204030204" pitchFamily="34" charset="0"/>
+                <a:cs typeface="Calibri" panose="020F0502020204030204" pitchFamily="34" charset="0"/>
+              </a:rPr>
               <a:t>Dlib</a:t>
             </a:r>
             <a:r>
-              <a:rPr lang="en-US" dirty="0"/>
+              <a:rPr lang="en-US" dirty="0">
+                <a:latin typeface="Calibri" panose="020F0502020204030204" pitchFamily="34" charset="0"/>
+                <a:ea typeface="Calibri" panose="020F0502020204030204" pitchFamily="34" charset="0"/>
+                <a:cs typeface="Calibri" panose="020F0502020204030204" pitchFamily="34" charset="0"/>
+              </a:rPr>
               <a:t> libraries where we were able to generalize the drowsiness detection using the live webcam which is quite accurate.</a:t>
             </a:r>
           </a:p>
           <a:p>
             <a:pPr algn="just"/>
             <a:r>
-              <a:rPr lang="en-US" dirty="0"/>
+              <a:rPr lang="en-US" dirty="0">
+                <a:latin typeface="Calibri" panose="020F0502020204030204" pitchFamily="34" charset="0"/>
+                <a:ea typeface="Calibri" panose="020F0502020204030204" pitchFamily="34" charset="0"/>
+                <a:cs typeface="Calibri" panose="020F0502020204030204" pitchFamily="34" charset="0"/>
+              </a:rPr>
               <a:t>We worked on 3</a:t>
             </a:r>
             <a:r>
-              <a:rPr lang="en-US" baseline="30000" dirty="0"/>
+              <a:rPr lang="en-US" baseline="30000" dirty="0">
+                <a:latin typeface="Calibri" panose="020F0502020204030204" pitchFamily="34" charset="0"/>
+                <a:ea typeface="Calibri" panose="020F0502020204030204" pitchFamily="34" charset="0"/>
+                <a:cs typeface="Calibri" panose="020F0502020204030204" pitchFamily="34" charset="0"/>
+              </a:rPr>
               <a:t>rd</a:t>
             </a:r>
             <a:r>
-              <a:rPr lang="en-US" dirty="0"/>
+              <a:rPr lang="en-US" dirty="0">
+                <a:latin typeface="Calibri" panose="020F0502020204030204" pitchFamily="34" charset="0"/>
+                <a:ea typeface="Calibri" panose="020F0502020204030204" pitchFamily="34" charset="0"/>
+                <a:cs typeface="Calibri" panose="020F0502020204030204" pitchFamily="34" charset="0"/>
+              </a:rPr>
               <a:t> model where we used </a:t>
             </a:r>
             <a:r>
-              <a:rPr lang="en-US" dirty="0" err="1"/>
+              <a:rPr lang="en-US" dirty="0" err="1">
+                <a:latin typeface="Calibri" panose="020F0502020204030204" pitchFamily="34" charset="0"/>
+                <a:ea typeface="Calibri" panose="020F0502020204030204" pitchFamily="34" charset="0"/>
+                <a:cs typeface="Calibri" panose="020F0502020204030204" pitchFamily="34" charset="0"/>
+              </a:rPr>
               <a:t>MediaPipe</a:t>
             </a:r>
             <a:r>
-              <a:rPr lang="en-US" dirty="0"/>
+              <a:rPr lang="en-US" dirty="0">
+                <a:latin typeface="Calibri" panose="020F0502020204030204" pitchFamily="34" charset="0"/>
+                <a:ea typeface="Calibri" panose="020F0502020204030204" pitchFamily="34" charset="0"/>
+                <a:cs typeface="Calibri" panose="020F0502020204030204" pitchFamily="34" charset="0"/>
+              </a:rPr>
               <a:t> Library for detection which does have more capability in detecting drowsiness for it includes </a:t>
             </a:r>
             <a:r>
-              <a:rPr lang="en-US" dirty="0" err="1"/>
+              <a:rPr lang="en-US" dirty="0" err="1">
+                <a:latin typeface="Calibri" panose="020F0502020204030204" pitchFamily="34" charset="0"/>
+                <a:ea typeface="Calibri" panose="020F0502020204030204" pitchFamily="34" charset="0"/>
+                <a:cs typeface="Calibri" panose="020F0502020204030204" pitchFamily="34" charset="0"/>
+              </a:rPr>
               <a:t>FaceMesh</a:t>
             </a:r>
             <a:r>
-              <a:rPr lang="en-US" dirty="0"/>
+              <a:rPr lang="en-US" dirty="0">
+                <a:latin typeface="Calibri" panose="020F0502020204030204" pitchFamily="34" charset="0"/>
+                <a:ea typeface="Calibri" panose="020F0502020204030204" pitchFamily="34" charset="0"/>
+                <a:cs typeface="Calibri" panose="020F0502020204030204" pitchFamily="34" charset="0"/>
+              </a:rPr>
               <a:t>  Modules and we were able to get accurate Open and Closed Eye Detection.</a:t>
             </a:r>
           </a:p>
@@ -26096,7 +32272,7 @@
           <a:lstStyle/>
           <a:p>
             <a:r>
-              <a:rPr lang="en-US" dirty="0"/>
+              <a:rPr lang="en-US"/>
               <a:t>Ethical Concerns</a:t>
             </a:r>
             <a:endParaRPr lang="en-CA" dirty="0"/>
@@ -26121,8 +32297,8 @@
         </p:nvSpPr>
         <p:spPr>
           <a:xfrm>
-            <a:off x="1154954" y="2324099"/>
-            <a:ext cx="9998821" cy="3952875"/>
+            <a:off x="1027135" y="2852740"/>
+            <a:ext cx="9998821" cy="3125274"/>
           </a:xfrm>
         </p:spPr>
         <p:txBody>
@@ -26213,19 +32389,6 @@
               <a:t>Drowsiness detection systems using machine learning algorithms may produce false positives, which can cause drivers to take unnecessary breaks or reduce their productivity. </a:t>
             </a:r>
           </a:p>
-          <a:p>
-            <a:pPr algn="just"/>
-            <a:r>
-              <a:rPr lang="en-CA" dirty="0">
-                <a:solidFill>
-                  <a:srgbClr val="000000"/>
-                </a:solidFill>
-                <a:latin typeface="Calibri" panose="020F0502020204030204" pitchFamily="34" charset="0"/>
-                <a:ea typeface="Calibri" panose="020F0502020204030204" pitchFamily="34" charset="0"/>
-              </a:rPr>
-              <a:t>Informed Consent</a:t>
-            </a:r>
-          </a:p>
         </p:txBody>
       </p:sp>
     </p:spTree>
@@ -26244,6 +32407,14 @@
 <file path=ppt/slides/slide14.xml><?xml version="1.0" encoding="utf-8"?>
 <p:sld xmlns:a="http://schemas.openxmlformats.org/drawingml/2006/main" xmlns:r="http://schemas.openxmlformats.org/officeDocument/2006/relationships" xmlns:p="http://schemas.openxmlformats.org/presentationml/2006/main">
   <p:cSld>
+    <p:bg>
+      <p:bgPr>
+        <a:solidFill>
+          <a:schemeClr val="bg2"/>
+        </a:solidFill>
+        <a:effectLst/>
+      </p:bgPr>
+    </p:bg>
     <p:spTree>
       <p:nvGrpSpPr>
         <p:cNvPr id="1" name=""/>
@@ -26258,6 +32429,187 @@
           <a:chExt cx="0" cy="0"/>
         </a:xfrm>
       </p:grpSpPr>
+      <p:grpSp>
+        <p:nvGrpSpPr>
+          <p:cNvPr id="10" name="Group 9">
+            <a:extLst>
+              <a:ext uri="{FF2B5EF4-FFF2-40B4-BE49-F238E27FC236}">
+                <a16:creationId xmlns:a16="http://schemas.microsoft.com/office/drawing/2014/main" id="{2F448CB3-7B4F-45D7-B7C0-DF553DF61453}"/>
+              </a:ext>
+              <a:ext uri="{C183D7F6-B498-43B3-948B-1728B52AA6E4}">
+                <adec:decorative xmlns:adec="http://schemas.microsoft.com/office/drawing/2017/decorative" val="1"/>
+              </a:ext>
+            </a:extLst>
+          </p:cNvPr>
+          <p:cNvGrpSpPr>
+            <a:grpSpLocks noGrp="1" noUngrp="1" noRot="1" noChangeAspect="1" noMove="1" noResize="1"/>
+          </p:cNvGrpSpPr>
+          <p:nvPr>
+            <p:extLst>
+              <p:ext uri="{386F3935-93C4-4BCD-93E2-E3B085C9AB24}">
+                <p16:designElem xmlns:p16="http://schemas.microsoft.com/office/powerpoint/2015/main" val="1"/>
+              </p:ext>
+            </p:extLst>
+          </p:nvPr>
+        </p:nvGrpSpPr>
+        <p:grpSpPr>
+          <a:xfrm>
+            <a:off x="0" y="0"/>
+            <a:ext cx="12192000" cy="6858000"/>
+            <a:chOff x="0" y="0"/>
+            <a:chExt cx="12192000" cy="6858000"/>
+          </a:xfrm>
+        </p:grpSpPr>
+        <p:sp>
+          <p:nvSpPr>
+            <p:cNvPr id="11" name="Rectangle 10">
+              <a:extLst>
+                <a:ext uri="{FF2B5EF4-FFF2-40B4-BE49-F238E27FC236}">
+                  <a16:creationId xmlns:a16="http://schemas.microsoft.com/office/drawing/2014/main" id="{5C5305EA-7A88-413D-BE8A-47A02476F00C}"/>
+                </a:ext>
+                <a:ext uri="{C183D7F6-B498-43B3-948B-1728B52AA6E4}">
+                  <adec:decorative xmlns:adec="http://schemas.microsoft.com/office/drawing/2017/decorative" val="1"/>
+                </a:ext>
+              </a:extLst>
+            </p:cNvPr>
+            <p:cNvSpPr/>
+            <p:nvPr>
+              <p:extLst>
+                <p:ext uri="{386F3935-93C4-4BCD-93E2-E3B085C9AB24}">
+                  <p16:designElem xmlns:p16="http://schemas.microsoft.com/office/powerpoint/2015/main" val="1"/>
+                </p:ext>
+              </p:extLst>
+            </p:nvPr>
+          </p:nvSpPr>
+          <p:spPr>
+            <a:xfrm>
+              <a:off x="0" y="0"/>
+              <a:ext cx="12192000" cy="6858000"/>
+            </a:xfrm>
+            <a:prstGeom prst="rect">
+              <a:avLst/>
+            </a:prstGeom>
+            <a:blipFill>
+              <a:blip r:embed="rId2">
+                <a:duotone>
+                  <a:schemeClr val="dk2">
+                    <a:shade val="69000"/>
+                    <a:hueMod val="91000"/>
+                    <a:satMod val="164000"/>
+                    <a:lumMod val="74000"/>
+                  </a:schemeClr>
+                  <a:schemeClr val="dk2">
+                    <a:hueMod val="124000"/>
+                    <a:satMod val="140000"/>
+                    <a:lumMod val="142000"/>
+                  </a:schemeClr>
+                </a:duotone>
+              </a:blip>
+              <a:stretch>
+                <a:fillRect/>
+              </a:stretch>
+            </a:blipFill>
+            <a:ln>
+              <a:noFill/>
+            </a:ln>
+          </p:spPr>
+          <p:style>
+            <a:lnRef idx="2">
+              <a:schemeClr val="accent1">
+                <a:shade val="50000"/>
+              </a:schemeClr>
+            </a:lnRef>
+            <a:fillRef idx="1">
+              <a:schemeClr val="accent1"/>
+            </a:fillRef>
+            <a:effectRef idx="0">
+              <a:schemeClr val="accent1"/>
+            </a:effectRef>
+            <a:fontRef idx="minor">
+              <a:schemeClr val="lt1"/>
+            </a:fontRef>
+          </p:style>
+        </p:sp>
+        <p:sp>
+          <p:nvSpPr>
+            <p:cNvPr id="12" name="Freeform 5">
+              <a:extLst>
+                <a:ext uri="{FF2B5EF4-FFF2-40B4-BE49-F238E27FC236}">
+                  <a16:creationId xmlns:a16="http://schemas.microsoft.com/office/drawing/2014/main" id="{FCA94DB5-FE56-4A3D-BC48-31B5595197FD}"/>
+                </a:ext>
+                <a:ext uri="{C183D7F6-B498-43B3-948B-1728B52AA6E4}">
+                  <adec:decorative xmlns:adec="http://schemas.microsoft.com/office/drawing/2017/decorative" val="1"/>
+                </a:ext>
+              </a:extLst>
+            </p:cNvPr>
+            <p:cNvSpPr>
+              <a:spLocks noEditPoints="1"/>
+            </p:cNvSpPr>
+            <p:nvPr>
+              <p:extLst>
+                <p:ext uri="{386F3935-93C4-4BCD-93E2-E3B085C9AB24}">
+                  <p16:designElem xmlns:p16="http://schemas.microsoft.com/office/powerpoint/2015/main" val="1"/>
+                </p:ext>
+              </p:extLst>
+            </p:nvPr>
+          </p:nvSpPr>
+          <p:spPr bwMode="gray">
+            <a:xfrm>
+              <a:off x="0" y="1587"/>
+              <a:ext cx="12192000" cy="6856413"/>
+            </a:xfrm>
+            <a:custGeom>
+              <a:avLst/>
+              <a:gdLst/>
+              <a:ahLst/>
+              <a:cxnLst/>
+              <a:rect l="0" t="0" r="r" b="b"/>
+              <a:pathLst>
+                <a:path w="15356" h="8638">
+                  <a:moveTo>
+                    <a:pt x="0" y="0"/>
+                  </a:moveTo>
+                  <a:lnTo>
+                    <a:pt x="0" y="8638"/>
+                  </a:lnTo>
+                  <a:lnTo>
+                    <a:pt x="15356" y="8638"/>
+                  </a:lnTo>
+                  <a:lnTo>
+                    <a:pt x="15356" y="0"/>
+                  </a:lnTo>
+                  <a:lnTo>
+                    <a:pt x="0" y="0"/>
+                  </a:lnTo>
+                  <a:close/>
+                  <a:moveTo>
+                    <a:pt x="14748" y="8038"/>
+                  </a:moveTo>
+                  <a:lnTo>
+                    <a:pt x="600" y="8038"/>
+                  </a:lnTo>
+                  <a:lnTo>
+                    <a:pt x="600" y="592"/>
+                  </a:lnTo>
+                  <a:lnTo>
+                    <a:pt x="14748" y="592"/>
+                  </a:lnTo>
+                  <a:lnTo>
+                    <a:pt x="14748" y="8038"/>
+                  </a:lnTo>
+                  <a:close/>
+                </a:path>
+              </a:pathLst>
+            </a:custGeom>
+            <a:solidFill>
+              <a:srgbClr val="FFFFFF"/>
+            </a:solidFill>
+            <a:ln>
+              <a:noFill/>
+            </a:ln>
+          </p:spPr>
+        </p:sp>
+      </p:grpSp>
       <p:sp>
         <p:nvSpPr>
           <p:cNvPr id="2" name="Title 1">
@@ -26274,192 +32626,118 @@
             <p:ph type="title"/>
           </p:nvPr>
         </p:nvSpPr>
-        <p:spPr/>
+        <p:spPr>
+          <a:xfrm>
+            <a:off x="1154954" y="973668"/>
+            <a:ext cx="8761413" cy="706964"/>
+          </a:xfrm>
+        </p:spPr>
         <p:txBody>
-          <a:bodyPr/>
+          <a:bodyPr>
+            <a:normAutofit/>
+          </a:bodyPr>
           <a:lstStyle/>
           <a:p>
             <a:r>
-              <a:rPr lang="en-US" sz="3600" dirty="0"/>
+              <a:rPr lang="en-US">
+                <a:solidFill>
+                  <a:srgbClr val="FFFFFF"/>
+                </a:solidFill>
+              </a:rPr>
               <a:t>Benefits</a:t>
             </a:r>
-            <a:endParaRPr lang="en-IN" dirty="0"/>
+            <a:endParaRPr lang="en-IN">
+              <a:solidFill>
+                <a:srgbClr val="FFFFFF"/>
+              </a:solidFill>
+            </a:endParaRPr>
           </a:p>
         </p:txBody>
       </p:sp>
       <p:sp>
         <p:nvSpPr>
-          <p:cNvPr id="4" name="Content Placeholder 2">
+          <p:cNvPr id="14" name="Rectangle 13">
             <a:extLst>
               <a:ext uri="{FF2B5EF4-FFF2-40B4-BE49-F238E27FC236}">
-                <a16:creationId xmlns:a16="http://schemas.microsoft.com/office/drawing/2014/main" id="{A05A630F-FBA8-D53B-0F25-E55C3EFC23FD}"/>
+                <a16:creationId xmlns:a16="http://schemas.microsoft.com/office/drawing/2014/main" id="{F9ED434F-8767-46CC-B26B-5AF62FF01E66}"/>
+              </a:ext>
+              <a:ext uri="{C183D7F6-B498-43B3-948B-1728B52AA6E4}">
+                <adec:decorative xmlns:adec="http://schemas.microsoft.com/office/drawing/2017/decorative" val="1"/>
               </a:ext>
             </a:extLst>
           </p:cNvPr>
           <p:cNvSpPr>
-            <a:spLocks noGrp="1"/>
+            <a:spLocks noGrp="1" noRot="1" noChangeAspect="1" noMove="1" noResize="1" noEditPoints="1" noAdjustHandles="1" noChangeArrowheads="1" noChangeShapeType="1" noTextEdit="1"/>
           </p:cNvSpPr>
           <p:nvPr>
-            <p:ph idx="1"/>
+            <p:extLst>
+              <p:ext uri="{386F3935-93C4-4BCD-93E2-E3B085C9AB24}">
+                <p16:designElem xmlns:p16="http://schemas.microsoft.com/office/powerpoint/2015/main" val="1"/>
+              </p:ext>
+            </p:extLst>
           </p:nvPr>
         </p:nvSpPr>
         <p:spPr>
           <a:xfrm>
-            <a:off x="248093" y="2924067"/>
-            <a:ext cx="11695814" cy="3481374"/>
+            <a:off x="10437812" y="0"/>
+            <a:ext cx="685800" cy="1143000"/>
           </a:xfrm>
+          <a:prstGeom prst="rect">
+            <a:avLst/>
+          </a:prstGeom>
+          <a:solidFill>
+            <a:schemeClr val="accent1"/>
+          </a:solidFill>
+          <a:ln>
+            <a:noFill/>
+          </a:ln>
         </p:spPr>
-        <p:txBody>
-          <a:bodyPr vert="horz" lIns="91440" tIns="45720" rIns="91440" bIns="45720" rtlCol="0" anchor="t">
-            <a:normAutofit/>
-          </a:bodyPr>
-          <a:lstStyle/>
-          <a:p>
-            <a:pPr marL="285750" indent="-285750" algn="just">
-              <a:lnSpc>
-                <a:spcPct val="90000"/>
-              </a:lnSpc>
-              <a:buFont typeface="Wingdings" panose="05000000000000000000" pitchFamily="2" charset="2"/>
-              <a:buChar char="Ø"/>
-            </a:pPr>
-            <a:r>
-              <a:rPr lang="en-US" sz="1600" b="1" cap="none" dirty="0">
-                <a:solidFill>
-                  <a:schemeClr val="tx1"/>
-                </a:solidFill>
-              </a:rPr>
-              <a:t>Increased safety: </a:t>
-            </a:r>
-            <a:r>
-              <a:rPr lang="en-US" sz="1600" cap="none" dirty="0">
-                <a:solidFill>
-                  <a:schemeClr val="tx1"/>
-                </a:solidFill>
-              </a:rPr>
-              <a:t>Drowsy driving or working can lead to accidents and mistakes. Early detection of drowsiness can help prevent accidents and ensure the safety of individuals.</a:t>
-            </a:r>
-          </a:p>
-          <a:p>
-            <a:pPr marL="0" indent="0" algn="just">
-              <a:lnSpc>
-                <a:spcPct val="90000"/>
-              </a:lnSpc>
-              <a:buNone/>
-            </a:pPr>
-            <a:endParaRPr lang="en-US" sz="1600" cap="none" dirty="0">
-              <a:solidFill>
-                <a:schemeClr val="tx1"/>
-              </a:solidFill>
-            </a:endParaRPr>
-          </a:p>
-          <a:p>
-            <a:pPr marL="285750" indent="-285750" algn="just">
-              <a:lnSpc>
-                <a:spcPct val="90000"/>
-              </a:lnSpc>
-              <a:buFont typeface="Wingdings" panose="05000000000000000000" pitchFamily="2" charset="2"/>
-              <a:buChar char="Ø"/>
-            </a:pPr>
-            <a:r>
-              <a:rPr lang="en-US" sz="1600" b="1" cap="none" dirty="0">
-                <a:solidFill>
-                  <a:schemeClr val="tx1"/>
-                </a:solidFill>
-              </a:rPr>
-              <a:t>Improved productivity: </a:t>
-            </a:r>
-            <a:r>
-              <a:rPr lang="en-US" sz="1600" cap="none" dirty="0">
-                <a:solidFill>
-                  <a:schemeClr val="tx1"/>
-                </a:solidFill>
-              </a:rPr>
-              <a:t>When individuals are alert and awake, they are more productive and efficient in their work. Drowsiness detection can help ensure that individuals are alert and performing at their best.</a:t>
-            </a:r>
-          </a:p>
-          <a:p>
-            <a:pPr marL="0" indent="0" algn="just">
-              <a:lnSpc>
-                <a:spcPct val="90000"/>
-              </a:lnSpc>
-              <a:buNone/>
-            </a:pPr>
-            <a:endParaRPr lang="en-US" sz="1600" cap="none" dirty="0">
-              <a:solidFill>
-                <a:schemeClr val="tx1"/>
-              </a:solidFill>
-            </a:endParaRPr>
-          </a:p>
-          <a:p>
-            <a:pPr marL="285750" indent="-285750" algn="just">
-              <a:lnSpc>
-                <a:spcPct val="90000"/>
-              </a:lnSpc>
-              <a:buFont typeface="Wingdings" panose="05000000000000000000" pitchFamily="2" charset="2"/>
-              <a:buChar char="Ø"/>
-            </a:pPr>
-            <a:r>
-              <a:rPr lang="en-US" sz="1600" b="1" cap="none" dirty="0">
-                <a:solidFill>
-                  <a:schemeClr val="tx1"/>
-                </a:solidFill>
-              </a:rPr>
-              <a:t>Early intervention: </a:t>
-            </a:r>
-            <a:r>
-              <a:rPr lang="en-US" sz="1600" cap="none" dirty="0">
-                <a:solidFill>
-                  <a:schemeClr val="tx1"/>
-                </a:solidFill>
-              </a:rPr>
-              <a:t>Early detection of drowsiness can allow for early intervention, such as taking a break or resting, to prevent further fatigue and drowsiness.</a:t>
-            </a:r>
-          </a:p>
-          <a:p>
-            <a:pPr marL="0" indent="0" algn="just">
-              <a:lnSpc>
-                <a:spcPct val="90000"/>
-              </a:lnSpc>
-              <a:buNone/>
-            </a:pPr>
-            <a:endParaRPr lang="en-US" sz="1600" cap="none" dirty="0">
-              <a:solidFill>
-                <a:schemeClr val="tx1"/>
-              </a:solidFill>
-            </a:endParaRPr>
-          </a:p>
-          <a:p>
-            <a:pPr marL="285750" indent="-285750" algn="just">
-              <a:lnSpc>
-                <a:spcPct val="90000"/>
-              </a:lnSpc>
-              <a:buFont typeface="Wingdings" panose="05000000000000000000" pitchFamily="2" charset="2"/>
-              <a:buChar char="Ø"/>
-            </a:pPr>
-            <a:r>
-              <a:rPr lang="en-US" sz="1600" b="1" cap="none" dirty="0">
-                <a:solidFill>
-                  <a:schemeClr val="tx1"/>
-                </a:solidFill>
-              </a:rPr>
-              <a:t>Cost-effective: </a:t>
-            </a:r>
-            <a:r>
-              <a:rPr lang="en-US" sz="1600" cap="none" dirty="0">
-                <a:solidFill>
-                  <a:schemeClr val="tx1"/>
-                </a:solidFill>
-              </a:rPr>
-              <a:t>Drowsiness detection using deep learning can be cost-effective compared to traditional methods such as hiring a dedicated observer or using expensive equipment.</a:t>
-            </a:r>
-            <a:endParaRPr lang="en-US" sz="500" dirty="0">
-              <a:solidFill>
-                <a:schemeClr val="tx1"/>
-              </a:solidFill>
-            </a:endParaRPr>
-          </a:p>
-        </p:txBody>
+        <p:style>
+          <a:lnRef idx="1">
+            <a:schemeClr val="accent1"/>
+          </a:lnRef>
+          <a:fillRef idx="3">
+            <a:schemeClr val="accent1"/>
+          </a:fillRef>
+          <a:effectRef idx="2">
+            <a:schemeClr val="accent1"/>
+          </a:effectRef>
+          <a:fontRef idx="minor">
+            <a:schemeClr val="lt1"/>
+          </a:fontRef>
+        </p:style>
       </p:sp>
+      <p:graphicFrame>
+        <p:nvGraphicFramePr>
+          <p:cNvPr id="6" name="Content Placeholder 2">
+            <a:extLst>
+              <a:ext uri="{FF2B5EF4-FFF2-40B4-BE49-F238E27FC236}">
+                <a16:creationId xmlns:a16="http://schemas.microsoft.com/office/drawing/2014/main" id="{FA770D59-FA0B-A74B-CBAB-3B0B8C02A11C}"/>
+              </a:ext>
+            </a:extLst>
+          </p:cNvPr>
+          <p:cNvGraphicFramePr>
+            <a:graphicFrameLocks noGrp="1"/>
+          </p:cNvGraphicFramePr>
+          <p:nvPr>
+            <p:ph idx="1"/>
+            <p:extLst>
+              <p:ext uri="{D42A27DB-BD31-4B8C-83A1-F6EECF244321}">
+                <p14:modId xmlns:p14="http://schemas.microsoft.com/office/powerpoint/2010/main" val="22507592"/>
+              </p:ext>
+            </p:extLst>
+          </p:nvPr>
+        </p:nvGraphicFramePr>
+        <p:xfrm>
+          <a:off x="1286934" y="2324100"/>
+          <a:ext cx="9625383" cy="3422683"/>
+        </p:xfrm>
+        <a:graphic>
+          <a:graphicData uri="http://schemas.openxmlformats.org/drawingml/2006/diagram">
+            <dgm:relIds xmlns:dgm="http://schemas.openxmlformats.org/drawingml/2006/diagram" xmlns:r="http://schemas.openxmlformats.org/officeDocument/2006/relationships" r:dm="rId3" r:lo="rId4" r:qs="rId5" r:cs="rId6"/>
+          </a:graphicData>
+        </a:graphic>
+      </p:graphicFrame>
     </p:spTree>
     <p:extLst>
       <p:ext uri="{BB962C8B-B14F-4D97-AF65-F5344CB8AC3E}">
@@ -26468,7 +32746,7 @@
     </p:extLst>
   </p:cSld>
   <p:clrMapOvr>
-    <a:masterClrMapping/>
+    <a:overrideClrMapping bg1="dk1" tx1="lt1" bg2="dk2" tx2="lt2" accent1="accent1" accent2="accent2" accent3="accent3" accent4="accent4" accent5="accent5" accent6="accent6" hlink="hlink" folHlink="folHlink"/>
   </p:clrMapOvr>
 </p:sld>
 </file>
@@ -26519,170 +32797,28 @@
           </a:p>
         </p:txBody>
       </p:sp>
-      <p:sp>
-        <p:nvSpPr>
-          <p:cNvPr id="3" name="Text Placeholder 2">
+      <p:graphicFrame>
+        <p:nvGraphicFramePr>
+          <p:cNvPr id="5" name="Text Placeholder 2">
             <a:extLst>
               <a:ext uri="{FF2B5EF4-FFF2-40B4-BE49-F238E27FC236}">
-                <a16:creationId xmlns:a16="http://schemas.microsoft.com/office/drawing/2014/main" id="{CE0071A4-97FD-0623-2915-BC357A98D690}"/>
+                <a16:creationId xmlns:a16="http://schemas.microsoft.com/office/drawing/2014/main" id="{58F4E292-C796-5F9A-135A-9560616D46C8}"/>
               </a:ext>
             </a:extLst>
           </p:cNvPr>
-          <p:cNvSpPr>
-            <a:spLocks noGrp="1"/>
-          </p:cNvSpPr>
-          <p:nvPr>
-            <p:ph type="body" idx="1"/>
-          </p:nvPr>
-        </p:nvSpPr>
-        <p:spPr>
-          <a:xfrm>
-            <a:off x="6686023" y="542925"/>
-            <a:ext cx="5354740" cy="5848350"/>
-          </a:xfrm>
-        </p:spPr>
-        <p:txBody>
-          <a:bodyPr>
-            <a:normAutofit/>
-          </a:bodyPr>
-          <a:lstStyle/>
-          <a:p>
-            <a:pPr algn="just"/>
-            <a:endParaRPr lang="en-US" b="1" i="0" dirty="0">
-              <a:solidFill>
-                <a:schemeClr val="tx1"/>
-              </a:solidFill>
-              <a:effectLst/>
-              <a:latin typeface="Söhne"/>
-            </a:endParaRPr>
-          </a:p>
-          <a:p>
-            <a:pPr algn="just"/>
-            <a:endParaRPr lang="en-US" b="1" dirty="0">
-              <a:solidFill>
-                <a:schemeClr val="tx1"/>
-              </a:solidFill>
-              <a:latin typeface="Söhne"/>
-            </a:endParaRPr>
-          </a:p>
-          <a:p>
-            <a:pPr algn="just"/>
-            <a:endParaRPr lang="en-US" b="1" i="0" dirty="0">
-              <a:solidFill>
-                <a:schemeClr val="tx1"/>
-              </a:solidFill>
-              <a:effectLst/>
-              <a:latin typeface="Söhne"/>
-            </a:endParaRPr>
-          </a:p>
-          <a:p>
-            <a:pPr marL="342900" indent="-342900" algn="just">
-              <a:buFont typeface="Wingdings 3" charset="2"/>
-              <a:buChar char=""/>
-            </a:pPr>
-            <a:endParaRPr lang="en-US" sz="1800" dirty="0">
-              <a:solidFill>
-                <a:srgbClr val="000000"/>
-              </a:solidFill>
-              <a:latin typeface="Calibri" panose="020F0502020204030204" pitchFamily="34" charset="0"/>
-              <a:ea typeface="Calibri" panose="020F0502020204030204" pitchFamily="34" charset="0"/>
-            </a:endParaRPr>
-          </a:p>
-          <a:p>
-            <a:pPr marL="342900" indent="-342900" algn="just">
-              <a:buFont typeface="Wingdings 3" charset="2"/>
-              <a:buChar char=""/>
-            </a:pPr>
-            <a:r>
-              <a:rPr lang="en-US" sz="1800" cap="none" dirty="0">
-                <a:solidFill>
-                  <a:srgbClr val="000000"/>
-                </a:solidFill>
-                <a:latin typeface="Calibri" panose="020F0502020204030204" pitchFamily="34" charset="0"/>
-                <a:ea typeface="Calibri" panose="020F0502020204030204" pitchFamily="34" charset="0"/>
-              </a:rPr>
-              <a:t>A machine learning-based drowsiness detection system is a promising solution for reducing the risk of accidents caused by driver fatigue.</a:t>
-            </a:r>
-          </a:p>
-          <a:p>
-            <a:pPr marL="342900" indent="-342900" algn="just">
-              <a:buFont typeface="Wingdings 3" charset="2"/>
-              <a:buChar char=""/>
-            </a:pPr>
-            <a:r>
-              <a:rPr lang="en-US" sz="1800" cap="none" dirty="0">
-                <a:solidFill>
-                  <a:srgbClr val="000000"/>
-                </a:solidFill>
-                <a:latin typeface="Calibri" panose="020F0502020204030204" pitchFamily="34" charset="0"/>
-                <a:ea typeface="Calibri" panose="020F0502020204030204" pitchFamily="34" charset="0"/>
-              </a:rPr>
-              <a:t>The ml-based drowsiness detection system has several advantages over traditional methods, including its high accuracy, non-invasiveness, and real-time detection. </a:t>
-            </a:r>
-          </a:p>
-          <a:p>
-            <a:pPr marL="342900" indent="-342900" algn="just">
-              <a:buFont typeface="Wingdings 3" charset="2"/>
-              <a:buChar char=""/>
-            </a:pPr>
-            <a:r>
-              <a:rPr lang="en-US" sz="1800" cap="none" dirty="0">
-                <a:solidFill>
-                  <a:srgbClr val="000000"/>
-                </a:solidFill>
-                <a:latin typeface="Calibri" panose="020F0502020204030204" pitchFamily="34" charset="0"/>
-                <a:ea typeface="Calibri" panose="020F0502020204030204" pitchFamily="34" charset="0"/>
-              </a:rPr>
-              <a:t>The system have potential to significantly improve road safety and reduce the number of accidents caused by fatigue driving</a:t>
-            </a:r>
-          </a:p>
-          <a:p>
-            <a:pPr algn="just"/>
-            <a:endParaRPr lang="en-US" b="1" dirty="0">
-              <a:solidFill>
-                <a:schemeClr val="tx1"/>
-              </a:solidFill>
-              <a:latin typeface="Söhne"/>
-            </a:endParaRPr>
-          </a:p>
-          <a:p>
-            <a:pPr algn="just"/>
-            <a:endParaRPr lang="en-US" b="1" dirty="0">
-              <a:solidFill>
-                <a:schemeClr val="tx1"/>
-              </a:solidFill>
-              <a:latin typeface="Söhne"/>
-            </a:endParaRPr>
-          </a:p>
-          <a:p>
-            <a:pPr algn="just"/>
-            <a:endParaRPr lang="en-US" b="1" dirty="0">
-              <a:solidFill>
-                <a:schemeClr val="tx1"/>
-              </a:solidFill>
-              <a:latin typeface="Söhne"/>
-            </a:endParaRPr>
-          </a:p>
-          <a:p>
-            <a:pPr algn="just"/>
-            <a:endParaRPr lang="en-US" b="1" dirty="0">
-              <a:solidFill>
-                <a:schemeClr val="tx1"/>
-              </a:solidFill>
-              <a:latin typeface="Söhne"/>
-            </a:endParaRPr>
-          </a:p>
-          <a:p>
-            <a:pPr algn="just"/>
-            <a:endParaRPr lang="en-CA" b="1" dirty="0">
-              <a:solidFill>
-                <a:schemeClr val="tx1"/>
-              </a:solidFill>
-              <a:latin typeface="Söhne"/>
-            </a:endParaRPr>
-          </a:p>
-        </p:txBody>
-      </p:sp>
+          <p:cNvGraphicFramePr/>
+          <p:nvPr/>
+        </p:nvGraphicFramePr>
+        <p:xfrm>
+          <a:off x="6686023" y="542925"/>
+          <a:ext cx="5354740" cy="5848350"/>
+        </p:xfrm>
+        <a:graphic>
+          <a:graphicData uri="http://schemas.openxmlformats.org/drawingml/2006/diagram">
+            <dgm:relIds xmlns:dgm="http://schemas.openxmlformats.org/drawingml/2006/diagram" xmlns:r="http://schemas.openxmlformats.org/officeDocument/2006/relationships" r:dm="rId2" r:lo="rId3" r:qs="rId4" r:cs="rId5"/>
+          </a:graphicData>
+        </a:graphic>
+      </p:graphicFrame>
     </p:spTree>
     <p:extLst>
       <p:ext uri="{BB962C8B-B14F-4D97-AF65-F5344CB8AC3E}">
@@ -27686,65 +33822,64 @@
           </a:bodyPr>
           <a:lstStyle/>
           <a:p>
+            <a:pPr algn="just"/>
             <a:r>
               <a:rPr lang="en-US" dirty="0">
-                <a:latin typeface="Times New Roman" panose="02020603050405020304" pitchFamily="18" charset="0"/>
-                <a:cs typeface="Times New Roman" panose="02020603050405020304" pitchFamily="18" charset="0"/>
+                <a:latin typeface="Calibri" panose="020F0502020204030204" pitchFamily="34" charset="0"/>
+                <a:ea typeface="Calibri" panose="020F0502020204030204" pitchFamily="34" charset="0"/>
+                <a:cs typeface="Calibri" panose="020F0502020204030204" pitchFamily="34" charset="0"/>
               </a:rPr>
               <a:t>From year 1999-2020, there were approximately 326,000 Truck accidents.</a:t>
             </a:r>
           </a:p>
           <a:p>
+            <a:pPr algn="just"/>
             <a:r>
               <a:rPr lang="en-US" dirty="0">
-                <a:latin typeface="Times New Roman" panose="02020603050405020304" pitchFamily="18" charset="0"/>
-                <a:cs typeface="Times New Roman" panose="02020603050405020304" pitchFamily="18" charset="0"/>
-              </a:rPr>
-              <a:t>Amongst the above count 12,000 Truck Accidents occur due to Driver Drowsiness.</a:t>
-            </a:r>
-          </a:p>
-          <a:p>
-            <a:r>
-              <a:rPr lang="en-US" dirty="0">
-                <a:latin typeface="Times New Roman" panose="02020603050405020304" pitchFamily="18" charset="0"/>
-                <a:cs typeface="Times New Roman" panose="02020603050405020304" pitchFamily="18" charset="0"/>
+                <a:latin typeface="Calibri" panose="020F0502020204030204" pitchFamily="34" charset="0"/>
+                <a:ea typeface="Calibri" panose="020F0502020204030204" pitchFamily="34" charset="0"/>
+                <a:cs typeface="Calibri" panose="020F0502020204030204" pitchFamily="34" charset="0"/>
               </a:rPr>
               <a:t>According to the Centers for Disease Control and Prevention, about 1 in 25 adult drivers report having fallen asleep while driving.</a:t>
             </a:r>
           </a:p>
           <a:p>
+            <a:pPr algn="just"/>
             <a:r>
               <a:rPr lang="en-US" dirty="0">
-                <a:latin typeface="Times New Roman" panose="02020603050405020304" pitchFamily="18" charset="0"/>
-                <a:cs typeface="Times New Roman" panose="02020603050405020304" pitchFamily="18" charset="0"/>
+                <a:latin typeface="Calibri" panose="020F0502020204030204" pitchFamily="34" charset="0"/>
+                <a:ea typeface="Calibri" panose="020F0502020204030204" pitchFamily="34" charset="0"/>
+                <a:cs typeface="Calibri" panose="020F0502020204030204" pitchFamily="34" charset="0"/>
               </a:rPr>
               <a:t>According to the National Highway Traffic Safety Administration, 100,000 police-reported crashes each year are caused primarily by drowsy driving, resulting in more than 71,000 injuries and $12.5 million in monetary losses.</a:t>
             </a:r>
           </a:p>
           <a:p>
-            <a:pPr>
+            <a:pPr algn="just">
               <a:lnSpc>
                 <a:spcPct val="90000"/>
               </a:lnSpc>
             </a:pPr>
             <a:r>
               <a:rPr lang="en-US" dirty="0">
-                <a:latin typeface="Times New Roman" panose="02020603050405020304" pitchFamily="18" charset="0"/>
-                <a:cs typeface="Times New Roman" panose="02020603050405020304" pitchFamily="18" charset="0"/>
+                <a:latin typeface="Calibri" panose="020F0502020204030204" pitchFamily="34" charset="0"/>
+                <a:ea typeface="Calibri" panose="020F0502020204030204" pitchFamily="34" charset="0"/>
+                <a:cs typeface="Calibri" panose="020F0502020204030204" pitchFamily="34" charset="0"/>
               </a:rPr>
               <a:t>We analyzed the data from National Collision Data and  created the dashboard representing few of the above stats. </a:t>
             </a:r>
           </a:p>
           <a:p>
-            <a:pPr>
+            <a:pPr algn="just">
               <a:lnSpc>
                 <a:spcPct val="90000"/>
               </a:lnSpc>
             </a:pPr>
             <a:r>
               <a:rPr lang="en-US" dirty="0">
-                <a:latin typeface="Times New Roman" panose="02020603050405020304" pitchFamily="18" charset="0"/>
-                <a:cs typeface="Times New Roman" panose="02020603050405020304" pitchFamily="18" charset="0"/>
+                <a:latin typeface="Calibri" panose="020F0502020204030204" pitchFamily="34" charset="0"/>
+                <a:ea typeface="Calibri" panose="020F0502020204030204" pitchFamily="34" charset="0"/>
+                <a:cs typeface="Calibri" panose="020F0502020204030204" pitchFamily="34" charset="0"/>
               </a:rPr>
               <a:t>Dataset link - </a:t>
             </a:r>
@@ -27755,8 +33890,9 @@
                     <a:lumMod val="75000"/>
                   </a:schemeClr>
                 </a:solidFill>
-                <a:latin typeface="Times New Roman" panose="02020603050405020304" pitchFamily="18" charset="0"/>
-                <a:cs typeface="Times New Roman" panose="02020603050405020304" pitchFamily="18" charset="0"/>
+                <a:latin typeface="Calibri" panose="020F0502020204030204" pitchFamily="34" charset="0"/>
+                <a:ea typeface="Calibri" panose="020F0502020204030204" pitchFamily="34" charset="0"/>
+                <a:cs typeface="Calibri" panose="020F0502020204030204" pitchFamily="34" charset="0"/>
                 <a:hlinkClick r:id="rId3">
                   <a:extLst>
                     <a:ext uri="{A12FA001-AC4F-418D-AE19-62706E023703}">
@@ -27768,8 +33904,9 @@
               <a:t>https://wwwapps2.tc.gc.ca/saf-sec-sur/7/ncdb-bndc/p.aspx?l=en</a:t>
             </a:r>
             <a:endParaRPr lang="en-US" dirty="0">
-              <a:latin typeface="Times New Roman" panose="02020603050405020304" pitchFamily="18" charset="0"/>
-              <a:cs typeface="Times New Roman" panose="02020603050405020304" pitchFamily="18" charset="0"/>
+              <a:latin typeface="Calibri" panose="020F0502020204030204" pitchFamily="34" charset="0"/>
+              <a:ea typeface="Calibri" panose="020F0502020204030204" pitchFamily="34" charset="0"/>
+              <a:cs typeface="Calibri" panose="020F0502020204030204" pitchFamily="34" charset="0"/>
             </a:endParaRPr>
           </a:p>
           <a:p>
@@ -28910,7 +35047,7 @@
           </a:bodyPr>
           <a:lstStyle/>
           <a:p>
-            <a:pPr>
+            <a:pPr algn="just">
               <a:lnSpc>
                 <a:spcPct val="90000"/>
               </a:lnSpc>
@@ -28918,13 +35055,15 @@
             <a:r>
               <a:rPr lang="en-US" sz="1500" b="0" i="0" dirty="0">
                 <a:effectLst/>
-                <a:latin typeface="Söhne"/>
+                <a:latin typeface="Calibri" panose="020F0502020204030204" pitchFamily="34" charset="0"/>
+                <a:ea typeface="Calibri" panose="020F0502020204030204" pitchFamily="34" charset="0"/>
+                <a:cs typeface="Calibri" panose="020F0502020204030204" pitchFamily="34" charset="0"/>
               </a:rPr>
               <a:t>Eye aspect ratio and Mouth aspect ratio are important features used in drowsiness detection algorithms to monitor and analyze facial expressions and movements. </a:t>
             </a:r>
           </a:p>
           <a:p>
-            <a:pPr>
+            <a:pPr algn="just">
               <a:lnSpc>
                 <a:spcPct val="90000"/>
               </a:lnSpc>
@@ -28934,26 +35073,32 @@
             <a:r>
               <a:rPr lang="en-US" sz="1500" b="0" i="0" dirty="0">
                 <a:effectLst/>
-                <a:latin typeface="Söhne"/>
+                <a:latin typeface="Calibri" panose="020F0502020204030204" pitchFamily="34" charset="0"/>
+                <a:ea typeface="Calibri" panose="020F0502020204030204" pitchFamily="34" charset="0"/>
+                <a:cs typeface="Calibri" panose="020F0502020204030204" pitchFamily="34" charset="0"/>
               </a:rPr>
               <a:t>Eye Aspect </a:t>
             </a:r>
             <a:r>
               <a:rPr lang="en-US" sz="1500" dirty="0">
-                <a:latin typeface="Söhne"/>
+                <a:latin typeface="Calibri" panose="020F0502020204030204" pitchFamily="34" charset="0"/>
+                <a:ea typeface="Calibri" panose="020F0502020204030204" pitchFamily="34" charset="0"/>
+                <a:cs typeface="Calibri" panose="020F0502020204030204" pitchFamily="34" charset="0"/>
               </a:rPr>
               <a:t>R</a:t>
             </a:r>
             <a:r>
               <a:rPr lang="en-US" sz="1500" b="0" i="0" dirty="0">
                 <a:effectLst/>
-                <a:latin typeface="Söhne"/>
+                <a:latin typeface="Calibri" panose="020F0502020204030204" pitchFamily="34" charset="0"/>
+                <a:ea typeface="Calibri" panose="020F0502020204030204" pitchFamily="34" charset="0"/>
+                <a:cs typeface="Calibri" panose="020F0502020204030204" pitchFamily="34" charset="0"/>
               </a:rPr>
               <a:t>atio is a measurement used in drowsiness detection systems to determine the level of eye closure or blink frequency.</a:t>
             </a:r>
           </a:p>
           <a:p>
-            <a:pPr>
+            <a:pPr algn="just">
               <a:lnSpc>
                 <a:spcPct val="90000"/>
               </a:lnSpc>
@@ -28963,13 +35108,15 @@
             <a:r>
               <a:rPr lang="en-US" sz="1500" b="0" i="0" dirty="0">
                 <a:effectLst/>
-                <a:latin typeface="Söhne"/>
+                <a:latin typeface="Calibri" panose="020F0502020204030204" pitchFamily="34" charset="0"/>
+                <a:ea typeface="Calibri" panose="020F0502020204030204" pitchFamily="34" charset="0"/>
+                <a:cs typeface="Calibri" panose="020F0502020204030204" pitchFamily="34" charset="0"/>
               </a:rPr>
               <a:t>EAR is calculated by measuring the ratio of the vertical eye landmarks to the horizontal eye landmarks, usually using facial landmark detection algorithms.</a:t>
             </a:r>
           </a:p>
           <a:p>
-            <a:pPr>
+            <a:pPr algn="just">
               <a:lnSpc>
                 <a:spcPct val="90000"/>
               </a:lnSpc>
@@ -28979,26 +35126,32 @@
             <a:r>
               <a:rPr lang="en-US" sz="1500" b="0" i="0" dirty="0">
                 <a:effectLst/>
-                <a:latin typeface="Söhne"/>
+                <a:latin typeface="Calibri" panose="020F0502020204030204" pitchFamily="34" charset="0"/>
+                <a:ea typeface="Calibri" panose="020F0502020204030204" pitchFamily="34" charset="0"/>
+                <a:cs typeface="Calibri" panose="020F0502020204030204" pitchFamily="34" charset="0"/>
               </a:rPr>
               <a:t>Mouth Aspect </a:t>
             </a:r>
             <a:r>
               <a:rPr lang="en-US" sz="1500" dirty="0">
-                <a:latin typeface="Söhne"/>
+                <a:latin typeface="Calibri" panose="020F0502020204030204" pitchFamily="34" charset="0"/>
+                <a:ea typeface="Calibri" panose="020F0502020204030204" pitchFamily="34" charset="0"/>
+                <a:cs typeface="Calibri" panose="020F0502020204030204" pitchFamily="34" charset="0"/>
               </a:rPr>
               <a:t>R</a:t>
             </a:r>
             <a:r>
               <a:rPr lang="en-US" sz="1500" b="0" i="0" dirty="0">
                 <a:effectLst/>
-                <a:latin typeface="Söhne"/>
+                <a:latin typeface="Calibri" panose="020F0502020204030204" pitchFamily="34" charset="0"/>
+                <a:ea typeface="Calibri" panose="020F0502020204030204" pitchFamily="34" charset="0"/>
+                <a:cs typeface="Calibri" panose="020F0502020204030204" pitchFamily="34" charset="0"/>
               </a:rPr>
               <a:t>atio is another measurement used in drowsiness detection systems to assess the state of the mouth, particularly related to yawning.</a:t>
             </a:r>
           </a:p>
           <a:p>
-            <a:pPr>
+            <a:pPr algn="just">
               <a:lnSpc>
                 <a:spcPct val="90000"/>
               </a:lnSpc>
@@ -29008,7 +35161,9 @@
             <a:r>
               <a:rPr lang="en-US" sz="1500" b="0" i="0" dirty="0">
                 <a:effectLst/>
-                <a:latin typeface="Söhne"/>
+                <a:latin typeface="Calibri" panose="020F0502020204030204" pitchFamily="34" charset="0"/>
+                <a:ea typeface="Calibri" panose="020F0502020204030204" pitchFamily="34" charset="0"/>
+                <a:cs typeface="Calibri" panose="020F0502020204030204" pitchFamily="34" charset="0"/>
               </a:rPr>
               <a:t>MAR is calculated by measuring the ratio of vertical mouth landmarks to horizontal mouth landmarks.</a:t>
             </a:r>
@@ -30136,7 +36291,7 @@
           </a:bodyPr>
           <a:lstStyle/>
           <a:p>
-            <a:pPr>
+            <a:pPr algn="just">
               <a:lnSpc>
                 <a:spcPct val="90000"/>
               </a:lnSpc>
@@ -30158,6 +36313,9 @@
                     <a:lumOff val="25000"/>
                   </a:schemeClr>
                 </a:solidFill>
+                <a:latin typeface="Calibri" panose="020F0502020204030204" pitchFamily="34" charset="0"/>
+                <a:ea typeface="Calibri" panose="020F0502020204030204" pitchFamily="34" charset="0"/>
+                <a:cs typeface="Calibri" panose="020F0502020204030204" pitchFamily="34" charset="0"/>
               </a:rPr>
               <a:t>T</a:t>
             </a:r>
@@ -30170,12 +36328,15 @@
                   </a:schemeClr>
                 </a:solidFill>
                 <a:effectLst/>
+                <a:latin typeface="Calibri" panose="020F0502020204030204" pitchFamily="34" charset="0"/>
+                <a:ea typeface="Calibri" panose="020F0502020204030204" pitchFamily="34" charset="0"/>
+                <a:cs typeface="Calibri" panose="020F0502020204030204" pitchFamily="34" charset="0"/>
               </a:rPr>
               <a:t>he two diagrams correspond to the change of the MAR curve in yawning state and the EAR curve in the one eye closing process, respectively. </a:t>
             </a:r>
           </a:p>
           <a:p>
-            <a:pPr>
+            <a:pPr algn="just">
               <a:lnSpc>
                 <a:spcPct val="90000"/>
               </a:lnSpc>
@@ -30198,12 +36359,15 @@
                   </a:schemeClr>
                 </a:solidFill>
                 <a:effectLst/>
+                <a:latin typeface="Calibri" panose="020F0502020204030204" pitchFamily="34" charset="0"/>
+                <a:ea typeface="Calibri" panose="020F0502020204030204" pitchFamily="34" charset="0"/>
+                <a:cs typeface="Calibri" panose="020F0502020204030204" pitchFamily="34" charset="0"/>
               </a:rPr>
               <a:t>The EAR value drops rapidly to close to zero, and then rises rapidly, representing that the driver blinks once. When the eyes of the driver are open, the EAR is over 0.2, or when the EAR is less than 0.2, it means that the eyes of the driver closed due to dozing. </a:t>
             </a:r>
           </a:p>
           <a:p>
-            <a:pPr>
+            <a:pPr algn="just">
               <a:lnSpc>
                 <a:spcPct val="90000"/>
               </a:lnSpc>
@@ -30226,12 +36390,15 @@
                   </a:schemeClr>
                 </a:solidFill>
                 <a:effectLst/>
+                <a:latin typeface="Calibri" panose="020F0502020204030204" pitchFamily="34" charset="0"/>
+                <a:ea typeface="Calibri" panose="020F0502020204030204" pitchFamily="34" charset="0"/>
+                <a:cs typeface="Calibri" panose="020F0502020204030204" pitchFamily="34" charset="0"/>
               </a:rPr>
               <a:t>When the driver yawns, the wider the mouth opens, the greater the MAR value, which determines that the driver yawns. </a:t>
             </a:r>
           </a:p>
           <a:p>
-            <a:pPr>
+            <a:pPr algn="just">
               <a:lnSpc>
                 <a:spcPct val="90000"/>
               </a:lnSpc>
@@ -30254,6 +36421,9 @@
                   </a:schemeClr>
                 </a:solidFill>
                 <a:effectLst/>
+                <a:latin typeface="Calibri" panose="020F0502020204030204" pitchFamily="34" charset="0"/>
+                <a:ea typeface="Calibri" panose="020F0502020204030204" pitchFamily="34" charset="0"/>
+                <a:cs typeface="Calibri" panose="020F0502020204030204" pitchFamily="34" charset="0"/>
               </a:rPr>
               <a:t>According to the experimental curve, when the driver’s mouth yawns, the MAR value is more than 0.60. Therefore, the values of EAR/MAR can be adopted to detect whether the driver is fatigue driving.</a:t>
             </a:r>
@@ -30264,6 +36434,9 @@
                   <a:lumOff val="25000"/>
                 </a:schemeClr>
               </a:solidFill>
+              <a:latin typeface="Calibri" panose="020F0502020204030204" pitchFamily="34" charset="0"/>
+              <a:ea typeface="Calibri" panose="020F0502020204030204" pitchFamily="34" charset="0"/>
+              <a:cs typeface="Calibri" panose="020F0502020204030204" pitchFamily="34" charset="0"/>
             </a:endParaRPr>
           </a:p>
         </p:txBody>
@@ -30665,7 +36838,7 @@
           </a:bodyPr>
           <a:lstStyle/>
           <a:p>
-            <a:pPr>
+            <a:pPr algn="just">
               <a:lnSpc>
                 <a:spcPct val="90000"/>
               </a:lnSpc>
@@ -30675,6 +36848,9 @@
                 <a:solidFill>
                   <a:schemeClr val="bg1"/>
                 </a:solidFill>
+                <a:latin typeface="Calibri" panose="020F0502020204030204" pitchFamily="34" charset="0"/>
+                <a:ea typeface="Calibri" panose="020F0502020204030204" pitchFamily="34" charset="0"/>
+                <a:cs typeface="Calibri" panose="020F0502020204030204" pitchFamily="34" charset="0"/>
               </a:rPr>
               <a:t>We will be using our own images that we will retrieve as frames from self shot videos and, we will look out for open datasets/sources to feed them as input while training our model. </a:t>
             </a:r>
@@ -30980,7 +37156,11 @@
           <a:lstStyle/>
           <a:p>
             <a:r>
-              <a:rPr lang="en-US" dirty="0"/>
+              <a:rPr lang="en-US" dirty="0">
+                <a:latin typeface="Calibri" panose="020F0502020204030204" pitchFamily="34" charset="0"/>
+                <a:ea typeface="Calibri" panose="020F0502020204030204" pitchFamily="34" charset="0"/>
+                <a:cs typeface="Calibri" panose="020F0502020204030204" pitchFamily="34" charset="0"/>
+              </a:rPr>
               <a:t>We are using python libraries like:</a:t>
             </a:r>
           </a:p>
@@ -30990,7 +37170,11 @@
               <a:buChar char="•"/>
             </a:pPr>
             <a:r>
-              <a:rPr lang="en-US" dirty="0"/>
+              <a:rPr lang="en-US" dirty="0">
+                <a:latin typeface="Calibri" panose="020F0502020204030204" pitchFamily="34" charset="0"/>
+                <a:ea typeface="Calibri" panose="020F0502020204030204" pitchFamily="34" charset="0"/>
+                <a:cs typeface="Calibri" panose="020F0502020204030204" pitchFamily="34" charset="0"/>
+              </a:rPr>
               <a:t>OpenCV</a:t>
             </a:r>
           </a:p>
@@ -31000,10 +37184,18 @@
               <a:buChar char="•"/>
             </a:pPr>
             <a:r>
-              <a:rPr lang="en-US" dirty="0" err="1"/>
+              <a:rPr lang="en-US" dirty="0" err="1">
+                <a:latin typeface="Calibri" panose="020F0502020204030204" pitchFamily="34" charset="0"/>
+                <a:ea typeface="Calibri" panose="020F0502020204030204" pitchFamily="34" charset="0"/>
+                <a:cs typeface="Calibri" panose="020F0502020204030204" pitchFamily="34" charset="0"/>
+              </a:rPr>
               <a:t>Dlib</a:t>
             </a:r>
-            <a:endParaRPr lang="en-US" dirty="0"/>
+            <a:endParaRPr lang="en-US" dirty="0">
+              <a:latin typeface="Calibri" panose="020F0502020204030204" pitchFamily="34" charset="0"/>
+              <a:ea typeface="Calibri" panose="020F0502020204030204" pitchFamily="34" charset="0"/>
+              <a:cs typeface="Calibri" panose="020F0502020204030204" pitchFamily="34" charset="0"/>
+            </a:endParaRPr>
           </a:p>
           <a:p>
             <a:pPr>
@@ -31011,10 +37203,18 @@
               <a:buChar char="•"/>
             </a:pPr>
             <a:r>
-              <a:rPr lang="en-US" dirty="0" err="1"/>
+              <a:rPr lang="en-US" dirty="0" err="1">
+                <a:latin typeface="Calibri" panose="020F0502020204030204" pitchFamily="34" charset="0"/>
+                <a:ea typeface="Calibri" panose="020F0502020204030204" pitchFamily="34" charset="0"/>
+                <a:cs typeface="Calibri" panose="020F0502020204030204" pitchFamily="34" charset="0"/>
+              </a:rPr>
               <a:t>Mediapipe</a:t>
             </a:r>
-            <a:endParaRPr lang="en-US" dirty="0"/>
+            <a:endParaRPr lang="en-US" dirty="0">
+              <a:latin typeface="Calibri" panose="020F0502020204030204" pitchFamily="34" charset="0"/>
+              <a:ea typeface="Calibri" panose="020F0502020204030204" pitchFamily="34" charset="0"/>
+              <a:cs typeface="Calibri" panose="020F0502020204030204" pitchFamily="34" charset="0"/>
+            </a:endParaRPr>
           </a:p>
           <a:p>
             <a:pPr>
@@ -31022,10 +37222,18 @@
               <a:buChar char="•"/>
             </a:pPr>
             <a:r>
-              <a:rPr lang="en-US" dirty="0" err="1"/>
+              <a:rPr lang="en-US" dirty="0" err="1">
+                <a:latin typeface="Calibri" panose="020F0502020204030204" pitchFamily="34" charset="0"/>
+                <a:ea typeface="Calibri" panose="020F0502020204030204" pitchFamily="34" charset="0"/>
+                <a:cs typeface="Calibri" panose="020F0502020204030204" pitchFamily="34" charset="0"/>
+              </a:rPr>
               <a:t>FaceMesh</a:t>
             </a:r>
-            <a:endParaRPr lang="en-US" dirty="0"/>
+            <a:endParaRPr lang="en-US" dirty="0">
+              <a:latin typeface="Calibri" panose="020F0502020204030204" pitchFamily="34" charset="0"/>
+              <a:ea typeface="Calibri" panose="020F0502020204030204" pitchFamily="34" charset="0"/>
+              <a:cs typeface="Calibri" panose="020F0502020204030204" pitchFamily="34" charset="0"/>
+            </a:endParaRPr>
           </a:p>
           <a:p>
             <a:pPr marL="0" indent="0">
